--- a/Praesentation.pptx
+++ b/Praesentation.pptx
@@ -1,1625 +1,134 @@
 
 <file path=ppt/presentation.xml><?xml version="1.0" encoding="utf-8"?>
-<p:presentation xmlns:p="http://schemas.openxmlformats.org/presentationml/2006/main">
+<p:presentation xmlns:a="http://schemas.openxmlformats.org/drawingml/2006/main" xmlns:r="http://schemas.openxmlformats.org/officeDocument/2006/relationships" xmlns:p="http://schemas.openxmlformats.org/presentationml/2006/main">
   <p:sldMasterIdLst>
-    <p:sldMasterId xmlns:r="http://schemas.openxmlformats.org/officeDocument/2006/relationships" id="2147483648" r:id="R027368aa924d4e23"/>
+    <p:sldMasterId id="2147483648" r:id="rId1"/>
   </p:sldMasterIdLst>
   <p:notesMasterIdLst>
-    <p:notesMasterId xmlns:r="http://schemas.openxmlformats.org/officeDocument/2006/relationships" r:id="R3e2484e943af43b7"/>
+    <p:notesMasterId r:id="rId10"/>
   </p:notesMasterIdLst>
   <p:sldIdLst>
-    <p:sldId xmlns:r="http://schemas.openxmlformats.org/officeDocument/2006/relationships" id="256" r:id="R182cea90b8c04e38"/>
-    <p:sldId xmlns:r="http://schemas.openxmlformats.org/officeDocument/2006/relationships" id="257" r:id="Ra6cca2775da54076"/>
-    <p:sldId xmlns:r="http://schemas.openxmlformats.org/officeDocument/2006/relationships" id="258" r:id="Rc87d10342e474582"/>
-    <p:sldId xmlns:r="http://schemas.openxmlformats.org/officeDocument/2006/relationships" id="259" r:id="Rbfe595ec571c4117"/>
-    <p:sldId xmlns:r="http://schemas.openxmlformats.org/officeDocument/2006/relationships" id="260" r:id="R01da79d7c36a4c6f"/>
-    <p:sldId xmlns:r="http://schemas.openxmlformats.org/officeDocument/2006/relationships" id="261" r:id="R360ec25e9b284f2c"/>
-    <p:sldId xmlns:r="http://schemas.openxmlformats.org/officeDocument/2006/relationships" id="262" r:id="R99fb6c3764ba42a7"/>
-    <p:sldId xmlns:r="http://schemas.openxmlformats.org/officeDocument/2006/relationships" id="263" r:id="R2474333752d94989"/>
+    <p:sldId id="256" r:id="rId2"/>
+    <p:sldId id="257" r:id="rId3"/>
+    <p:sldId id="258" r:id="rId4"/>
+    <p:sldId id="259" r:id="rId5"/>
+    <p:sldId id="260" r:id="rId6"/>
+    <p:sldId id="261" r:id="rId7"/>
+    <p:sldId id="262" r:id="rId8"/>
+    <p:sldId id="263" r:id="rId9"/>
   </p:sldIdLst>
   <p:sldSz cx="12192000" cy="6858000"/>
   <p:notesSz cx="6858000" cy="9144000"/>
+  <p:defaultTextStyle>
+    <a:defPPr>
+      <a:defRPr lang="de-DE"/>
+    </a:defPPr>
+    <a:lvl1pPr marL="0" algn="l" defTabSz="914400" rtl="0" eaLnBrk="1" latinLnBrk="0" hangingPunct="1">
+      <a:defRPr sz="1800" kern="1200">
+        <a:solidFill>
+          <a:schemeClr val="tx1"/>
+        </a:solidFill>
+        <a:latin typeface="+mn-lt"/>
+        <a:ea typeface="+mn-ea"/>
+        <a:cs typeface="+mn-cs"/>
+      </a:defRPr>
+    </a:lvl1pPr>
+    <a:lvl2pPr marL="457200" algn="l" defTabSz="914400" rtl="0" eaLnBrk="1" latinLnBrk="0" hangingPunct="1">
+      <a:defRPr sz="1800" kern="1200">
+        <a:solidFill>
+          <a:schemeClr val="tx1"/>
+        </a:solidFill>
+        <a:latin typeface="+mn-lt"/>
+        <a:ea typeface="+mn-ea"/>
+        <a:cs typeface="+mn-cs"/>
+      </a:defRPr>
+    </a:lvl2pPr>
+    <a:lvl3pPr marL="914400" algn="l" defTabSz="914400" rtl="0" eaLnBrk="1" latinLnBrk="0" hangingPunct="1">
+      <a:defRPr sz="1800" kern="1200">
+        <a:solidFill>
+          <a:schemeClr val="tx1"/>
+        </a:solidFill>
+        <a:latin typeface="+mn-lt"/>
+        <a:ea typeface="+mn-ea"/>
+        <a:cs typeface="+mn-cs"/>
+      </a:defRPr>
+    </a:lvl3pPr>
+    <a:lvl4pPr marL="1371600" algn="l" defTabSz="914400" rtl="0" eaLnBrk="1" latinLnBrk="0" hangingPunct="1">
+      <a:defRPr sz="1800" kern="1200">
+        <a:solidFill>
+          <a:schemeClr val="tx1"/>
+        </a:solidFill>
+        <a:latin typeface="+mn-lt"/>
+        <a:ea typeface="+mn-ea"/>
+        <a:cs typeface="+mn-cs"/>
+      </a:defRPr>
+    </a:lvl4pPr>
+    <a:lvl5pPr marL="1828800" algn="l" defTabSz="914400" rtl="0" eaLnBrk="1" latinLnBrk="0" hangingPunct="1">
+      <a:defRPr sz="1800" kern="1200">
+        <a:solidFill>
+          <a:schemeClr val="tx1"/>
+        </a:solidFill>
+        <a:latin typeface="+mn-lt"/>
+        <a:ea typeface="+mn-ea"/>
+        <a:cs typeface="+mn-cs"/>
+      </a:defRPr>
+    </a:lvl5pPr>
+    <a:lvl6pPr marL="2286000" algn="l" defTabSz="914400" rtl="0" eaLnBrk="1" latinLnBrk="0" hangingPunct="1">
+      <a:defRPr sz="1800" kern="1200">
+        <a:solidFill>
+          <a:schemeClr val="tx1"/>
+        </a:solidFill>
+        <a:latin typeface="+mn-lt"/>
+        <a:ea typeface="+mn-ea"/>
+        <a:cs typeface="+mn-cs"/>
+      </a:defRPr>
+    </a:lvl6pPr>
+    <a:lvl7pPr marL="2743200" algn="l" defTabSz="914400" rtl="0" eaLnBrk="1" latinLnBrk="0" hangingPunct="1">
+      <a:defRPr sz="1800" kern="1200">
+        <a:solidFill>
+          <a:schemeClr val="tx1"/>
+        </a:solidFill>
+        <a:latin typeface="+mn-lt"/>
+        <a:ea typeface="+mn-ea"/>
+        <a:cs typeface="+mn-cs"/>
+      </a:defRPr>
+    </a:lvl7pPr>
+    <a:lvl8pPr marL="3200400" algn="l" defTabSz="914400" rtl="0" eaLnBrk="1" latinLnBrk="0" hangingPunct="1">
+      <a:defRPr sz="1800" kern="1200">
+        <a:solidFill>
+          <a:schemeClr val="tx1"/>
+        </a:solidFill>
+        <a:latin typeface="+mn-lt"/>
+        <a:ea typeface="+mn-ea"/>
+        <a:cs typeface="+mn-cs"/>
+      </a:defRPr>
+    </a:lvl8pPr>
+    <a:lvl9pPr marL="3657600" algn="l" defTabSz="914400" rtl="0" eaLnBrk="1" latinLnBrk="0" hangingPunct="1">
+      <a:defRPr sz="1800" kern="1200">
+        <a:solidFill>
+          <a:schemeClr val="tx1"/>
+        </a:solidFill>
+        <a:latin typeface="+mn-lt"/>
+        <a:ea typeface="+mn-ea"/>
+        <a:cs typeface="+mn-cs"/>
+      </a:defRPr>
+    </a:lvl9pPr>
+  </p:defaultTextStyle>
 </p:presentation>
 </file>
 
-<file path=ppt/notesMasters/notesMaster1.xml><?xml version="1.0" encoding="utf-8"?>
-<p:notesMaster xmlns:p="http://schemas.openxmlformats.org/presentationml/2006/main">
-  <p:cSld>
-    <p:bg>
-      <p:bgRef idx="1001">
-        <a:schemeClr xmlns:a="http://schemas.openxmlformats.org/drawingml/2006/main" val="bg1"/>
-      </p:bgRef>
-    </p:bg>
-    <p:spTree>
-      <p:nvGrpSpPr>
-        <p:cNvPr id="1" name=""/>
-        <p:cNvGrpSpPr/>
-        <p:nvPr/>
-      </p:nvGrpSpPr>
-      <p:grpSpPr>
-        <a:xfrm xmlns:a="http://schemas.openxmlformats.org/drawingml/2006/main"/>
-      </p:grpSpPr>
-      <p:sp>
-        <p:nvSpPr>
-          <p:cNvPr id="2" name="Header Placeholder"/>
-          <p:cNvSpPr/>
-          <p:nvPr>
-            <p:ph type="hdr" sz="quarter"/>
-          </p:nvPr>
-        </p:nvSpPr>
-        <p:spPr>
-          <a:prstGeom xmlns:a="http://schemas.openxmlformats.org/drawingml/2006/main" prst="rect">
-            <a:avLst/>
-          </a:prstGeom>
-        </p:spPr>
-        <p:txBody>
-          <a:bodyPr xmlns:a="http://schemas.openxmlformats.org/drawingml/2006/main"/>
-          <a:lstStyle xmlns:a="http://schemas.openxmlformats.org/drawingml/2006/main"/>
-          <a:p xmlns:a="http://schemas.openxmlformats.org/drawingml/2006/main"/>
-        </p:txBody>
-      </p:sp>
-      <p:sp>
-        <p:nvSpPr>
-          <p:cNvPr id="3" name="Date Placeholder"/>
-          <p:cNvSpPr/>
-          <p:nvPr>
-            <p:ph type="dt" sz="quarter" idx="1"/>
-          </p:nvPr>
-        </p:nvSpPr>
-        <p:spPr>
-          <a:prstGeom xmlns:a="http://schemas.openxmlformats.org/drawingml/2006/main" prst="rect">
-            <a:avLst/>
-          </a:prstGeom>
-        </p:spPr>
-        <p:txBody>
-          <a:bodyPr xmlns:a="http://schemas.openxmlformats.org/drawingml/2006/main"/>
-          <a:lstStyle xmlns:a="http://schemas.openxmlformats.org/drawingml/2006/main"/>
-          <a:p xmlns:a="http://schemas.openxmlformats.org/drawingml/2006/main"/>
-        </p:txBody>
-      </p:sp>
-      <p:sp>
-        <p:nvSpPr>
-          <p:cNvPr id="4" name="Slide Image Placeholder"/>
-          <p:cNvSpPr/>
-          <p:nvPr>
-            <p:ph type="sldImg" idx="2"/>
-          </p:nvPr>
-        </p:nvSpPr>
-        <p:spPr>
-          <a:prstGeom xmlns:a="http://schemas.openxmlformats.org/drawingml/2006/main" prst="rect">
-            <a:avLst/>
-          </a:prstGeom>
-        </p:spPr>
-        <p:txBody>
-          <a:bodyPr xmlns:a="http://schemas.openxmlformats.org/drawingml/2006/main"/>
-          <a:lstStyle xmlns:a="http://schemas.openxmlformats.org/drawingml/2006/main"/>
-          <a:p xmlns:a="http://schemas.openxmlformats.org/drawingml/2006/main"/>
-        </p:txBody>
-      </p:sp>
-      <p:sp>
-        <p:nvSpPr>
-          <p:cNvPr id="5" name="Notes Placeholder"/>
-          <p:cNvSpPr/>
-          <p:nvPr>
-            <p:ph type="body" sz="quarter" idx="3"/>
-          </p:nvPr>
-        </p:nvSpPr>
-        <p:spPr>
-          <a:prstGeom xmlns:a="http://schemas.openxmlformats.org/drawingml/2006/main" prst="rect">
-            <a:avLst/>
-          </a:prstGeom>
-        </p:spPr>
-        <p:txBody>
-          <a:bodyPr xmlns:a="http://schemas.openxmlformats.org/drawingml/2006/main"/>
-          <a:lstStyle xmlns:a="http://schemas.openxmlformats.org/drawingml/2006/main"/>
-          <a:p xmlns:a="http://schemas.openxmlformats.org/drawingml/2006/main"/>
-        </p:txBody>
-      </p:sp>
-      <p:sp>
-        <p:nvSpPr>
-          <p:cNvPr id="6" name="Footer Placeholder"/>
-          <p:cNvSpPr/>
-          <p:nvPr>
-            <p:ph type="ftr" sz="quarter" idx="4"/>
-          </p:nvPr>
-        </p:nvSpPr>
-        <p:spPr>
-          <a:prstGeom xmlns:a="http://schemas.openxmlformats.org/drawingml/2006/main" prst="rect">
-            <a:avLst/>
-          </a:prstGeom>
-        </p:spPr>
-        <p:txBody>
-          <a:bodyPr xmlns:a="http://schemas.openxmlformats.org/drawingml/2006/main"/>
-          <a:lstStyle xmlns:a="http://schemas.openxmlformats.org/drawingml/2006/main"/>
-          <a:p xmlns:a="http://schemas.openxmlformats.org/drawingml/2006/main"/>
-        </p:txBody>
-      </p:sp>
-      <p:sp>
-        <p:nvSpPr>
-          <p:cNvPr id="7" name="Slide Number Placeholder"/>
-          <p:cNvSpPr/>
-          <p:nvPr>
-            <p:ph type="sldNum" sz="quarter" idx="5"/>
-          </p:nvPr>
-        </p:nvSpPr>
-        <p:spPr>
-          <a:prstGeom xmlns:a="http://schemas.openxmlformats.org/drawingml/2006/main" prst="rect">
-            <a:avLst/>
-          </a:prstGeom>
-        </p:spPr>
-        <p:txBody>
-          <a:bodyPr xmlns:a="http://schemas.openxmlformats.org/drawingml/2006/main"/>
-          <a:lstStyle xmlns:a="http://schemas.openxmlformats.org/drawingml/2006/main"/>
-          <a:p xmlns:a="http://schemas.openxmlformats.org/drawingml/2006/main"/>
-        </p:txBody>
-      </p:sp>
-    </p:spTree>
-  </p:cSld>
-  <p:clrMap bg1="lt1" tx1="dk1" bg2="lt2" tx2="dk2" accent1="accent1" accent2="accent2" accent3="accent3" accent4="accent4" accent5="accent5" accent6="accent6" hlink="hlink" folHlink="folHlink"/>
-  <p:notesStyle>
-    <a:lvl1pPr xmlns:a="http://schemas.openxmlformats.org/drawingml/2006/main" marL="0" algn="l" defTabSz="914400" rtl="0" eaLnBrk="1" latinLnBrk="0" hangingPunct="1">
-      <a:defRPr sz="1200" kern="1200"/>
-    </a:lvl1pPr>
-  </p:notesStyle>
-</p:notesMaster>
-</file>
-
-<file path=ppt/notesMasters/theme/theme3.xml><?xml version="1.0" encoding="utf-8"?>
-<a:theme xmlns:a="http://schemas.openxmlformats.org/drawingml/2006/main" name="ChatGPT">
-  <a:themeElements>
-    <a:clrScheme name="ChatGPT">
-      <a:dk1>
-        <a:srgbClr val="000000"/>
-      </a:dk1>
-      <a:lt1>
-        <a:srgbClr val="FFFFFF"/>
-      </a:lt1>
-      <a:dk2>
-        <a:srgbClr val="0E2841"/>
-      </a:dk2>
-      <a:lt2>
-        <a:srgbClr val="E8E8E8"/>
-      </a:lt2>
-      <a:accent1>
-        <a:srgbClr val="156082"/>
-      </a:accent1>
-      <a:accent2>
-        <a:srgbClr val="E97132"/>
-      </a:accent2>
-      <a:accent3>
-        <a:srgbClr val="196B24"/>
-      </a:accent3>
-      <a:accent4>
-        <a:srgbClr val="0F9ED5"/>
-      </a:accent4>
-      <a:accent5>
-        <a:srgbClr val="A02B93"/>
-      </a:accent5>
-      <a:accent6>
-        <a:srgbClr val="4EA72E"/>
-      </a:accent6>
-      <a:hlink>
-        <a:srgbClr val="467886"/>
-      </a:hlink>
-      <a:folHlink>
-        <a:srgbClr val="96607D"/>
-      </a:folHlink>
-    </a:clrScheme>
-    <a:fontScheme name="Office">
-      <a:majorFont>
-        <a:latin typeface="Calibri Light"/>
-        <a:ea typeface="Calibri Light"/>
-        <a:cs typeface="Calibri Light"/>
-      </a:majorFont>
-      <a:minorFont>
-        <a:latin typeface="Calibri"/>
-        <a:ea typeface="Calibri"/>
-        <a:cs typeface="Calibri"/>
-      </a:minorFont>
-    </a:fontScheme>
-    <a:fmtScheme name="ChatGPT">
-      <a:fillStyleLst>
-        <a:solidFill>
-          <a:schemeClr val="phClr"/>
-        </a:solidFill>
-        <a:gradFill>
-          <a:gsLst>
-            <a:gs pos="0">
-              <a:schemeClr val="phClr">
-                <a:tint val="67000"/>
-                <a:lumMod val="110000"/>
-                <a:satMod val="105000"/>
-              </a:schemeClr>
-            </a:gs>
-            <a:gs pos="50000">
-              <a:schemeClr val="phClr">
-                <a:tint val="73000"/>
-                <a:lumMod val="105000"/>
-                <a:satMod val="103000"/>
-              </a:schemeClr>
-            </a:gs>
-            <a:gs pos="100000">
-              <a:schemeClr val="phClr">
-                <a:tint val="81000"/>
-                <a:lumMod val="105000"/>
-                <a:satMod val="109000"/>
-              </a:schemeClr>
-            </a:gs>
-          </a:gsLst>
-          <a:lin ang="5400000" scaled="0"/>
-        </a:gradFill>
-        <a:gradFill>
-          <a:gsLst>
-            <a:gs pos="0">
-              <a:schemeClr val="phClr">
-                <a:tint val="94000"/>
-                <a:lumMod val="102000"/>
-                <a:satMod val="103000"/>
-              </a:schemeClr>
-            </a:gs>
-            <a:gs pos="50000">
-              <a:schemeClr val="phClr">
-                <a:shade val="100000"/>
-                <a:lumMod val="100000"/>
-                <a:satMod val="110000"/>
-              </a:schemeClr>
-            </a:gs>
-            <a:gs pos="100000">
-              <a:schemeClr val="phClr">
-                <a:shade val="78000"/>
-                <a:lumMod val="99000"/>
-                <a:satMod val="120000"/>
-              </a:schemeClr>
-            </a:gs>
-          </a:gsLst>
-          <a:lin ang="5400000" scaled="0"/>
-        </a:gradFill>
-      </a:fillStyleLst>
-      <a:lnStyleLst>
-        <a:ln w="12700">
-          <a:solidFill>
-            <a:schemeClr val="phClr"/>
-          </a:solidFill>
-          <a:prstDash val="solid"/>
-        </a:ln>
-        <a:ln w="19050">
-          <a:solidFill>
-            <a:schemeClr val="phClr"/>
-          </a:solidFill>
-          <a:prstDash val="solid"/>
-        </a:ln>
-        <a:ln w="25400">
-          <a:solidFill>
-            <a:schemeClr val="phClr"/>
-          </a:solidFill>
-          <a:prstDash val="solid"/>
-        </a:ln>
-      </a:lnStyleLst>
-      <a:effectStyleLst>
-        <a:effectStyle>
-          <a:effectLst/>
-        </a:effectStyle>
-        <a:effectStyle>
-          <a:effectLst/>
-        </a:effectStyle>
-        <a:effectStyle>
-          <a:effectLst>
-            <a:outerShdw blurRad="57150" dist="19050" dir="5400000">
-              <a:srgbClr val="000000">
-                <a:alpha val="16000"/>
-              </a:srgbClr>
-            </a:outerShdw>
-          </a:effectLst>
-        </a:effectStyle>
-        <a:effectStyle>
-          <a:effectLst>
-            <a:outerShdw blurRad="19050" dist="9525" dir="5400000">
-              <a:srgbClr val="000000">
-                <a:alpha val="6000"/>
-              </a:srgbClr>
-            </a:outerShdw>
-          </a:effectLst>
-        </a:effectStyle>
-        <a:effectStyle>
-          <a:effectLst>
-            <a:outerShdw blurRad="28575" dist="9525" dir="5400000">
-              <a:srgbClr val="000000">
-                <a:alpha val="8000"/>
-              </a:srgbClr>
-            </a:outerShdw>
-          </a:effectLst>
-        </a:effectStyle>
-        <a:effectStyle>
-          <a:effectLst>
-            <a:outerShdw blurRad="57150" dist="19050" dir="5400000">
-              <a:srgbClr val="000000">
-                <a:alpha val="10000"/>
-              </a:srgbClr>
-            </a:outerShdw>
-          </a:effectLst>
-        </a:effectStyle>
-        <a:effectStyle>
-          <a:effectLst>
-            <a:outerShdw blurRad="114300" dist="38100" dir="5400000">
-              <a:srgbClr val="000000">
-                <a:alpha val="12000"/>
-              </a:srgbClr>
-            </a:outerShdw>
-          </a:effectLst>
-        </a:effectStyle>
-        <a:effectStyle>
-          <a:effectLst>
-            <a:outerShdw blurRad="171450" dist="57150" dir="5400000">
-              <a:srgbClr val="000000">
-                <a:alpha val="16000"/>
-              </a:srgbClr>
-            </a:outerShdw>
-          </a:effectLst>
-        </a:effectStyle>
-        <a:effectStyle>
-          <a:effectLst>
-            <a:outerShdw blurRad="266700" dist="95250" dir="5400000">
-              <a:srgbClr val="000000">
-                <a:alpha val="24000"/>
-              </a:srgbClr>
-            </a:outerShdw>
-          </a:effectLst>
-        </a:effectStyle>
-      </a:effectStyleLst>
-      <a:bgFillStyleLst>
-        <a:solidFill>
-          <a:schemeClr val="phClr"/>
-        </a:solidFill>
-        <a:solidFill>
-          <a:schemeClr val="phClr">
-            <a:tint val="95000"/>
-            <a:satMod val="170000"/>
-          </a:schemeClr>
-        </a:solidFill>
-        <a:gradFill>
-          <a:gsLst>
-            <a:gs pos="0">
-              <a:schemeClr val="phClr">
-                <a:tint val="93000"/>
-                <a:shade val="98000"/>
-                <a:lumMod val="102000"/>
-                <a:satMod val="150000"/>
-              </a:schemeClr>
-            </a:gs>
-            <a:gs pos="50000">
-              <a:schemeClr val="phClr">
-                <a:tint val="98000"/>
-                <a:shade val="90000"/>
-                <a:lumMod val="103000"/>
-                <a:satMod val="130000"/>
-              </a:schemeClr>
-            </a:gs>
-            <a:gs pos="100000">
-              <a:schemeClr val="phClr">
-                <a:shade val="63000"/>
-                <a:satMod val="120000"/>
-              </a:schemeClr>
-            </a:gs>
-          </a:gsLst>
-          <a:lin ang="5400000" scaled="0"/>
-        </a:gradFill>
-      </a:bgFillStyleLst>
-    </a:fmtScheme>
-  </a:themeElements>
-</a:theme>
-</file>
-
-<file path=ppt/notesSlides/notesSlide1.xml><?xml version="1.0" encoding="utf-8"?>
-<p:notes xmlns:p="http://schemas.openxmlformats.org/presentationml/2006/main">
-  <p:cSld>
-    <p:spTree>
-      <p:nvGrpSpPr>
-        <p:cNvPr id="1" name=""/>
-        <p:cNvGrpSpPr/>
-        <p:nvPr/>
-      </p:nvGrpSpPr>
-      <p:grpSpPr>
-        <a:xfrm xmlns:a="http://schemas.openxmlformats.org/drawingml/2006/main"/>
-      </p:grpSpPr>
-      <p:sp>
-        <p:nvSpPr>
-          <p:cNvPr id="2" name="Slide Image Placeholder 1"/>
-          <p:cNvSpPr>
-            <a:spLocks xmlns:a="http://schemas.openxmlformats.org/drawingml/2006/main" noGrp="1"/>
-          </p:cNvSpPr>
-          <p:nvPr>
-            <p:ph type="sldImg" idx="0"/>
-          </p:nvPr>
-        </p:nvSpPr>
-        <p:spPr/>
-      </p:sp>
-      <p:sp>
-        <p:nvSpPr>
-          <p:cNvPr id="3" name="Notes Placeholder 2"/>
-          <p:cNvSpPr>
-            <a:spLocks xmlns:a="http://schemas.openxmlformats.org/drawingml/2006/main" noGrp="1"/>
-          </p:cNvSpPr>
-          <p:nvPr>
-            <p:ph type="body" idx="1"/>
-          </p:nvPr>
-        </p:nvSpPr>
-        <p:spPr/>
-        <p:txBody>
-          <a:bodyPr xmlns:a="http://schemas.openxmlformats.org/drawingml/2006/main"/>
-          <a:lstStyle xmlns:a="http://schemas.openxmlformats.org/drawingml/2006/main"/>
-          <a:p xmlns:a="http://schemas.openxmlformats.org/drawingml/2006/main">
-            <a:r>
-              <a:t>Zeit: ca. 25 Sekunden</a:t>
-            </a:r>
-          </a:p>
-          <a:p xmlns:a="http://schemas.openxmlformats.org/drawingml/2006/main">
-            <a:r>
-              <a:t/>
-            </a:r>
-          </a:p>
-          <a:p xmlns:a="http://schemas.openxmlformats.org/drawingml/2006/main">
-            <a:r>
-              <a:t>Ich zeige heute, wie ich den Release Candidate TaskFlow geprüft habe. Im Mittelpunkt stehen die wichtigsten Risiken, die gefundenen Defects, die Korrektur von DEF-02 und meine abschliessende Release-Entscheidung.</a:t>
-            </a:r>
-          </a:p>
-        </p:txBody>
-      </p:sp>
-      <p:sp>
-        <p:nvSpPr>
-          <p:cNvPr id="4" name="Slide Number Placeholder 3"/>
-          <p:cNvSpPr>
-            <a:spLocks xmlns:a="http://schemas.openxmlformats.org/drawingml/2006/main" noGrp="1"/>
-          </p:cNvSpPr>
-          <p:nvPr>
-            <p:ph type="sldNum" idx="5"/>
-          </p:nvPr>
-        </p:nvSpPr>
-        <p:spPr/>
-        <p:txBody>
-          <a:bodyPr xmlns:a="http://schemas.openxmlformats.org/drawingml/2006/main"/>
-          <a:lstStyle xmlns:a="http://schemas.openxmlformats.org/drawingml/2006/main"/>
-          <a:p xmlns:a="http://schemas.openxmlformats.org/drawingml/2006/main"/>
-        </p:txBody>
-      </p:sp>
-    </p:spTree>
-  </p:cSld>
-  <p:clrMapOvr>
-    <a:masterClrMapping xmlns:a="http://schemas.openxmlformats.org/drawingml/2006/main"/>
-  </p:clrMapOvr>
-</p:notes>
-</file>
-
-<file path=ppt/notesSlides/notesSlide2.xml><?xml version="1.0" encoding="utf-8"?>
-<p:notes xmlns:p="http://schemas.openxmlformats.org/presentationml/2006/main">
-  <p:cSld>
-    <p:spTree>
-      <p:nvGrpSpPr>
-        <p:cNvPr id="1" name=""/>
-        <p:cNvGrpSpPr/>
-        <p:nvPr/>
-      </p:nvGrpSpPr>
-      <p:grpSpPr>
-        <a:xfrm xmlns:a="http://schemas.openxmlformats.org/drawingml/2006/main"/>
-      </p:grpSpPr>
-      <p:sp>
-        <p:nvSpPr>
-          <p:cNvPr id="2" name="Slide Image Placeholder 1"/>
-          <p:cNvSpPr>
-            <a:spLocks xmlns:a="http://schemas.openxmlformats.org/drawingml/2006/main" noGrp="1"/>
-          </p:cNvSpPr>
-          <p:nvPr>
-            <p:ph type="sldImg" idx="0"/>
-          </p:nvPr>
-        </p:nvSpPr>
-        <p:spPr/>
-      </p:sp>
-      <p:sp>
-        <p:nvSpPr>
-          <p:cNvPr id="3" name="Notes Placeholder 2"/>
-          <p:cNvSpPr>
-            <a:spLocks xmlns:a="http://schemas.openxmlformats.org/drawingml/2006/main" noGrp="1"/>
-          </p:cNvSpPr>
-          <p:nvPr>
-            <p:ph type="body" idx="1"/>
-          </p:nvPr>
-        </p:nvSpPr>
-        <p:spPr/>
-        <p:txBody>
-          <a:bodyPr xmlns:a="http://schemas.openxmlformats.org/drawingml/2006/main"/>
-          <a:lstStyle xmlns:a="http://schemas.openxmlformats.org/drawingml/2006/main"/>
-          <a:p xmlns:a="http://schemas.openxmlformats.org/drawingml/2006/main">
-            <a:r>
-              <a:t>Zeit: ca. 45 Sekunden</a:t>
-            </a:r>
-          </a:p>
-          <a:p xmlns:a="http://schemas.openxmlformats.org/drawingml/2006/main">
-            <a:r>
-              <a:t/>
-            </a:r>
-          </a:p>
-          <a:p xmlns:a="http://schemas.openxmlformats.org/drawingml/2006/main">
-            <a:r>
-              <a:t>Das Testobjekt ist die REST-API TaskFlow. Ich habe Login, Taskzugriff, Taskbearbeitung und Validierung geprüft. Das wichtigste Ergebnis vorweg: Der Release erhält ein NO-GO. Zwei offene Sicherheitsdefects besitzen eine hohe Severity und blockieren die Produktivsetzung.</a:t>
-            </a:r>
-          </a:p>
-        </p:txBody>
-      </p:sp>
-      <p:sp>
-        <p:nvSpPr>
-          <p:cNvPr id="4" name="Slide Number Placeholder 3"/>
-          <p:cNvSpPr>
-            <a:spLocks xmlns:a="http://schemas.openxmlformats.org/drawingml/2006/main" noGrp="1"/>
-          </p:cNvSpPr>
-          <p:nvPr>
-            <p:ph type="sldNum" idx="5"/>
-          </p:nvPr>
-        </p:nvSpPr>
-        <p:spPr/>
-        <p:txBody>
-          <a:bodyPr xmlns:a="http://schemas.openxmlformats.org/drawingml/2006/main"/>
-          <a:lstStyle xmlns:a="http://schemas.openxmlformats.org/drawingml/2006/main"/>
-          <a:p xmlns:a="http://schemas.openxmlformats.org/drawingml/2006/main"/>
-        </p:txBody>
-      </p:sp>
-    </p:spTree>
-  </p:cSld>
-  <p:clrMapOvr>
-    <a:masterClrMapping xmlns:a="http://schemas.openxmlformats.org/drawingml/2006/main"/>
-  </p:clrMapOvr>
-</p:notes>
-</file>
-
-<file path=ppt/notesSlides/notesSlide3.xml><?xml version="1.0" encoding="utf-8"?>
-<p:notes xmlns:p="http://schemas.openxmlformats.org/presentationml/2006/main">
-  <p:cSld>
-    <p:spTree>
-      <p:nvGrpSpPr>
-        <p:cNvPr id="1" name=""/>
-        <p:cNvGrpSpPr/>
-        <p:nvPr/>
-      </p:nvGrpSpPr>
-      <p:grpSpPr>
-        <a:xfrm xmlns:a="http://schemas.openxmlformats.org/drawingml/2006/main"/>
-      </p:grpSpPr>
-      <p:sp>
-        <p:nvSpPr>
-          <p:cNvPr id="2" name="Slide Image Placeholder 1"/>
-          <p:cNvSpPr>
-            <a:spLocks xmlns:a="http://schemas.openxmlformats.org/drawingml/2006/main" noGrp="1"/>
-          </p:cNvSpPr>
-          <p:nvPr>
-            <p:ph type="sldImg" idx="0"/>
-          </p:nvPr>
-        </p:nvSpPr>
-        <p:spPr/>
-      </p:sp>
-      <p:sp>
-        <p:nvSpPr>
-          <p:cNvPr id="3" name="Notes Placeholder 2"/>
-          <p:cNvSpPr>
-            <a:spLocks xmlns:a="http://schemas.openxmlformats.org/drawingml/2006/main" noGrp="1"/>
-          </p:cNvSpPr>
-          <p:nvPr>
-            <p:ph type="body" idx="1"/>
-          </p:nvPr>
-        </p:nvSpPr>
-        <p:spPr/>
-        <p:txBody>
-          <a:bodyPr xmlns:a="http://schemas.openxmlformats.org/drawingml/2006/main"/>
-          <a:lstStyle xmlns:a="http://schemas.openxmlformats.org/drawingml/2006/main"/>
-          <a:p xmlns:a="http://schemas.openxmlformats.org/drawingml/2006/main">
-            <a:r>
-              <a:t>Zeit: ca. 55 Sekunden</a:t>
-            </a:r>
-          </a:p>
-          <a:p xmlns:a="http://schemas.openxmlformats.org/drawingml/2006/main">
-            <a:r>
-              <a:t/>
-            </a:r>
-          </a:p>
-          <a:p xmlns:a="http://schemas.openxmlformats.org/drawingml/2006/main">
-            <a:r>
-              <a:t>Ich habe risikobasiert gearbeitet. Wahrscheinlichkeit und Auswirkung wurden jeweils von eins bis drei bewertet. Vier Risiken erreichten den Höchstwert neun. Deshalb habe ich Security und Berechtigungen zuerst geprüft. Lasttests, produktive Infrastruktur und langfristige Persistenz lagen ausserhalb des Testumfangs.</a:t>
-            </a:r>
-          </a:p>
-        </p:txBody>
-      </p:sp>
-      <p:sp>
-        <p:nvSpPr>
-          <p:cNvPr id="4" name="Slide Number Placeholder 3"/>
-          <p:cNvSpPr>
-            <a:spLocks xmlns:a="http://schemas.openxmlformats.org/drawingml/2006/main" noGrp="1"/>
-          </p:cNvSpPr>
-          <p:nvPr>
-            <p:ph type="sldNum" idx="5"/>
-          </p:nvPr>
-        </p:nvSpPr>
-        <p:spPr/>
-        <p:txBody>
-          <a:bodyPr xmlns:a="http://schemas.openxmlformats.org/drawingml/2006/main"/>
-          <a:lstStyle xmlns:a="http://schemas.openxmlformats.org/drawingml/2006/main"/>
-          <a:p xmlns:a="http://schemas.openxmlformats.org/drawingml/2006/main"/>
-        </p:txBody>
-      </p:sp>
-    </p:spTree>
-  </p:cSld>
-  <p:clrMapOvr>
-    <a:masterClrMapping xmlns:a="http://schemas.openxmlformats.org/drawingml/2006/main"/>
-  </p:clrMapOvr>
-</p:notes>
-</file>
-
-<file path=ppt/notesSlides/notesSlide4.xml><?xml version="1.0" encoding="utf-8"?>
-<p:notes xmlns:p="http://schemas.openxmlformats.org/presentationml/2006/main">
-  <p:cSld>
-    <p:spTree>
-      <p:nvGrpSpPr>
-        <p:cNvPr id="1" name=""/>
-        <p:cNvGrpSpPr/>
-        <p:nvPr/>
-      </p:nvGrpSpPr>
-      <p:grpSpPr>
-        <a:xfrm xmlns:a="http://schemas.openxmlformats.org/drawingml/2006/main"/>
-      </p:grpSpPr>
-      <p:sp>
-        <p:nvSpPr>
-          <p:cNvPr id="2" name="Slide Image Placeholder 1"/>
-          <p:cNvSpPr>
-            <a:spLocks xmlns:a="http://schemas.openxmlformats.org/drawingml/2006/main" noGrp="1"/>
-          </p:cNvSpPr>
-          <p:nvPr>
-            <p:ph type="sldImg" idx="0"/>
-          </p:nvPr>
-        </p:nvSpPr>
-        <p:spPr/>
-      </p:sp>
-      <p:sp>
-        <p:nvSpPr>
-          <p:cNvPr id="3" name="Notes Placeholder 2"/>
-          <p:cNvSpPr>
-            <a:spLocks xmlns:a="http://schemas.openxmlformats.org/drawingml/2006/main" noGrp="1"/>
-          </p:cNvSpPr>
-          <p:nvPr>
-            <p:ph type="body" idx="1"/>
-          </p:nvPr>
-        </p:nvSpPr>
-        <p:spPr/>
-        <p:txBody>
-          <a:bodyPr xmlns:a="http://schemas.openxmlformats.org/drawingml/2006/main"/>
-          <a:lstStyle xmlns:a="http://schemas.openxmlformats.org/drawingml/2006/main"/>
-          <a:p xmlns:a="http://schemas.openxmlformats.org/drawingml/2006/main">
-            <a:r>
-              <a:t>Zeit: ca. 55 Sekunden</a:t>
-            </a:r>
-          </a:p>
-          <a:p xmlns:a="http://schemas.openxmlformats.org/drawingml/2006/main">
-            <a:r>
-              <a:t/>
-            </a:r>
-          </a:p>
-          <a:p xmlns:a="http://schemas.openxmlformats.org/drawingml/2006/main">
-            <a:r>
-              <a:t>Ich habe 16 wiederholbare Testfälle definiert. Sieben neue Tests erweitern die vorhandene Testsuite. Dazu kommen zehn dokumentierte Postman-Szenarien. Nach dem Fix bestanden sieben von elf automatisierten Tests. Vier Tests schlagen weiterhin fehl und belegen die offenen Defects.</a:t>
-            </a:r>
-          </a:p>
-        </p:txBody>
-      </p:sp>
-      <p:sp>
-        <p:nvSpPr>
-          <p:cNvPr id="4" name="Slide Number Placeholder 3"/>
-          <p:cNvSpPr>
-            <a:spLocks xmlns:a="http://schemas.openxmlformats.org/drawingml/2006/main" noGrp="1"/>
-          </p:cNvSpPr>
-          <p:nvPr>
-            <p:ph type="sldNum" idx="5"/>
-          </p:nvPr>
-        </p:nvSpPr>
-        <p:spPr/>
-        <p:txBody>
-          <a:bodyPr xmlns:a="http://schemas.openxmlformats.org/drawingml/2006/main"/>
-          <a:lstStyle xmlns:a="http://schemas.openxmlformats.org/drawingml/2006/main"/>
-          <a:p xmlns:a="http://schemas.openxmlformats.org/drawingml/2006/main"/>
-        </p:txBody>
-      </p:sp>
-    </p:spTree>
-  </p:cSld>
-  <p:clrMapOvr>
-    <a:masterClrMapping xmlns:a="http://schemas.openxmlformats.org/drawingml/2006/main"/>
-  </p:clrMapOvr>
-</p:notes>
-</file>
-
-<file path=ppt/notesSlides/notesSlide5.xml><?xml version="1.0" encoding="utf-8"?>
-<p:notes xmlns:p="http://schemas.openxmlformats.org/presentationml/2006/main">
-  <p:cSld>
-    <p:spTree>
-      <p:nvGrpSpPr>
-        <p:cNvPr id="1" name=""/>
-        <p:cNvGrpSpPr/>
-        <p:nvPr/>
-      </p:nvGrpSpPr>
-      <p:grpSpPr>
-        <a:xfrm xmlns:a="http://schemas.openxmlformats.org/drawingml/2006/main"/>
-      </p:grpSpPr>
-      <p:sp>
-        <p:nvSpPr>
-          <p:cNvPr id="2" name="Slide Image Placeholder 1"/>
-          <p:cNvSpPr>
-            <a:spLocks xmlns:a="http://schemas.openxmlformats.org/drawingml/2006/main" noGrp="1"/>
-          </p:cNvSpPr>
-          <p:nvPr>
-            <p:ph type="sldImg" idx="0"/>
-          </p:nvPr>
-        </p:nvSpPr>
-        <p:spPr/>
-      </p:sp>
-      <p:sp>
-        <p:nvSpPr>
-          <p:cNvPr id="3" name="Notes Placeholder 2"/>
-          <p:cNvSpPr>
-            <a:spLocks xmlns:a="http://schemas.openxmlformats.org/drawingml/2006/main" noGrp="1"/>
-          </p:cNvSpPr>
-          <p:nvPr>
-            <p:ph type="body" idx="1"/>
-          </p:nvPr>
-        </p:nvSpPr>
-        <p:spPr/>
-        <p:txBody>
-          <a:bodyPr xmlns:a="http://schemas.openxmlformats.org/drawingml/2006/main"/>
-          <a:lstStyle xmlns:a="http://schemas.openxmlformats.org/drawingml/2006/main"/>
-          <a:p xmlns:a="http://schemas.openxmlformats.org/drawingml/2006/main">
-            <a:r>
-              <a:t>Zeit: ca. 70 Sekunden</a:t>
-            </a:r>
-          </a:p>
-          <a:p xmlns:a="http://schemas.openxmlformats.org/drawingml/2006/main">
-            <a:r>
-              <a:t/>
-            </a:r>
-          </a:p>
-          <a:p xmlns:a="http://schemas.openxmlformats.org/drawingml/2006/main">
-            <a:r>
-              <a:t>Die wichtigsten offenen Defects sind DEF-01 und DEF-05. Links sieht man, dass Alice beide Tasks erhält, obwohl t2 Bob gehört. Rechts führt ungültiges JSON zu HTTP 500. Die Antwort enthält einen Stacktrace und lokale Dateipfade. Beide Defects besitzen hohe Severity und sind release-blockierend.</a:t>
-            </a:r>
-          </a:p>
-        </p:txBody>
-      </p:sp>
-      <p:sp>
-        <p:nvSpPr>
-          <p:cNvPr id="4" name="Slide Number Placeholder 3"/>
-          <p:cNvSpPr>
-            <a:spLocks xmlns:a="http://schemas.openxmlformats.org/drawingml/2006/main" noGrp="1"/>
-          </p:cNvSpPr>
-          <p:nvPr>
-            <p:ph type="sldNum" idx="5"/>
-          </p:nvPr>
-        </p:nvSpPr>
-        <p:spPr/>
-        <p:txBody>
-          <a:bodyPr xmlns:a="http://schemas.openxmlformats.org/drawingml/2006/main"/>
-          <a:lstStyle xmlns:a="http://schemas.openxmlformats.org/drawingml/2006/main"/>
-          <a:p xmlns:a="http://schemas.openxmlformats.org/drawingml/2006/main"/>
-        </p:txBody>
-      </p:sp>
-    </p:spTree>
-  </p:cSld>
-  <p:clrMapOvr>
-    <a:masterClrMapping xmlns:a="http://schemas.openxmlformats.org/drawingml/2006/main"/>
-  </p:clrMapOvr>
-</p:notes>
-</file>
-
-<file path=ppt/notesSlides/notesSlide6.xml><?xml version="1.0" encoding="utf-8"?>
-<p:notes xmlns:p="http://schemas.openxmlformats.org/presentationml/2006/main">
-  <p:cSld>
-    <p:spTree>
-      <p:nvGrpSpPr>
-        <p:cNvPr id="1" name=""/>
-        <p:cNvGrpSpPr/>
-        <p:nvPr/>
-      </p:nvGrpSpPr>
-      <p:grpSpPr>
-        <a:xfrm xmlns:a="http://schemas.openxmlformats.org/drawingml/2006/main"/>
-      </p:grpSpPr>
-      <p:sp>
-        <p:nvSpPr>
-          <p:cNvPr id="2" name="Slide Image Placeholder 1"/>
-          <p:cNvSpPr>
-            <a:spLocks xmlns:a="http://schemas.openxmlformats.org/drawingml/2006/main" noGrp="1"/>
-          </p:cNvSpPr>
-          <p:nvPr>
-            <p:ph type="sldImg" idx="0"/>
-          </p:nvPr>
-        </p:nvSpPr>
-        <p:spPr/>
-      </p:sp>
-      <p:sp>
-        <p:nvSpPr>
-          <p:cNvPr id="3" name="Notes Placeholder 2"/>
-          <p:cNvSpPr>
-            <a:spLocks xmlns:a="http://schemas.openxmlformats.org/drawingml/2006/main" noGrp="1"/>
-          </p:cNvSpPr>
-          <p:nvPr>
-            <p:ph type="body" idx="1"/>
-          </p:nvPr>
-        </p:nvSpPr>
-        <p:spPr/>
-        <p:txBody>
-          <a:bodyPr xmlns:a="http://schemas.openxmlformats.org/drawingml/2006/main"/>
-          <a:lstStyle xmlns:a="http://schemas.openxmlformats.org/drawingml/2006/main"/>
-          <a:p xmlns:a="http://schemas.openxmlformats.org/drawingml/2006/main">
-            <a:r>
-              <a:t>Zeit: ca. 60 Sekunden</a:t>
-            </a:r>
-          </a:p>
-          <a:p xmlns:a="http://schemas.openxmlformats.org/drawingml/2006/main">
-            <a:r>
-              <a:t/>
-            </a:r>
-          </a:p>
-          <a:p xmlns:a="http://schemas.openxmlformats.org/drawingml/2006/main">
-            <a:r>
-              <a:t>Ich habe DEF-02 korrigiert. Vorher reichte es, dass irgendein Benutzer angemeldet war. Danach prüft die Funktion, ob der Benutzer Administrator oder Eigentümer des Tasks ist. Der Retest bestätigt HTTP 403 für Bob. Der Regressionstest bestätigt, dass Alice ihren eigenen Task weiterhin bearbeiten kann.</a:t>
-            </a:r>
-          </a:p>
-        </p:txBody>
-      </p:sp>
-      <p:sp>
-        <p:nvSpPr>
-          <p:cNvPr id="4" name="Slide Number Placeholder 3"/>
-          <p:cNvSpPr>
-            <a:spLocks xmlns:a="http://schemas.openxmlformats.org/drawingml/2006/main" noGrp="1"/>
-          </p:cNvSpPr>
-          <p:nvPr>
-            <p:ph type="sldNum" idx="5"/>
-          </p:nvPr>
-        </p:nvSpPr>
-        <p:spPr/>
-        <p:txBody>
-          <a:bodyPr xmlns:a="http://schemas.openxmlformats.org/drawingml/2006/main"/>
-          <a:lstStyle xmlns:a="http://schemas.openxmlformats.org/drawingml/2006/main"/>
-          <a:p xmlns:a="http://schemas.openxmlformats.org/drawingml/2006/main"/>
-        </p:txBody>
-      </p:sp>
-    </p:spTree>
-  </p:cSld>
-  <p:clrMapOvr>
-    <a:masterClrMapping xmlns:a="http://schemas.openxmlformats.org/drawingml/2006/main"/>
-  </p:clrMapOvr>
-</p:notes>
-</file>
-
-<file path=ppt/notesSlides/notesSlide7.xml><?xml version="1.0" encoding="utf-8"?>
-<p:notes xmlns:p="http://schemas.openxmlformats.org/presentationml/2006/main">
-  <p:cSld>
-    <p:spTree>
-      <p:nvGrpSpPr>
-        <p:cNvPr id="1" name=""/>
-        <p:cNvGrpSpPr/>
-        <p:nvPr/>
-      </p:nvGrpSpPr>
-      <p:grpSpPr>
-        <a:xfrm xmlns:a="http://schemas.openxmlformats.org/drawingml/2006/main"/>
-      </p:grpSpPr>
-      <p:sp>
-        <p:nvSpPr>
-          <p:cNvPr id="2" name="Slide Image Placeholder 1"/>
-          <p:cNvSpPr>
-            <a:spLocks xmlns:a="http://schemas.openxmlformats.org/drawingml/2006/main" noGrp="1"/>
-          </p:cNvSpPr>
-          <p:nvPr>
-            <p:ph type="sldImg" idx="0"/>
-          </p:nvPr>
-        </p:nvSpPr>
-        <p:spPr/>
-      </p:sp>
-      <p:sp>
-        <p:nvSpPr>
-          <p:cNvPr id="3" name="Notes Placeholder 2"/>
-          <p:cNvSpPr>
-            <a:spLocks xmlns:a="http://schemas.openxmlformats.org/drawingml/2006/main" noGrp="1"/>
-          </p:cNvSpPr>
-          <p:nvPr>
-            <p:ph type="body" idx="1"/>
-          </p:nvPr>
-        </p:nvSpPr>
-        <p:spPr/>
-        <p:txBody>
-          <a:bodyPr xmlns:a="http://schemas.openxmlformats.org/drawingml/2006/main"/>
-          <a:lstStyle xmlns:a="http://schemas.openxmlformats.org/drawingml/2006/main"/>
-          <a:p xmlns:a="http://schemas.openxmlformats.org/drawingml/2006/main">
-            <a:r>
-              <a:t>Zeit: ca. 55 Sekunden</a:t>
-            </a:r>
-          </a:p>
-          <a:p xmlns:a="http://schemas.openxmlformats.org/drawingml/2006/main">
-            <a:r>
-              <a:t/>
-            </a:r>
-          </a:p>
-          <a:p xmlns:a="http://schemas.openxmlformats.org/drawingml/2006/main">
-            <a:r>
-              <a:t>In der Live-Demo starte ich zuerst npm test. Dabei zeige ich, dass der Test für DEF-02 und der Regressionstest bestehen. Danach sende ich als Bob einen PATCH-Request auf Alices Task. Die API antwortet mit HTTP 403 und verändert den Task nicht.</a:t>
-            </a:r>
-          </a:p>
-        </p:txBody>
-      </p:sp>
-      <p:sp>
-        <p:nvSpPr>
-          <p:cNvPr id="4" name="Slide Number Placeholder 3"/>
-          <p:cNvSpPr>
-            <a:spLocks xmlns:a="http://schemas.openxmlformats.org/drawingml/2006/main" noGrp="1"/>
-          </p:cNvSpPr>
-          <p:nvPr>
-            <p:ph type="sldNum" idx="5"/>
-          </p:nvPr>
-        </p:nvSpPr>
-        <p:spPr/>
-        <p:txBody>
-          <a:bodyPr xmlns:a="http://schemas.openxmlformats.org/drawingml/2006/main"/>
-          <a:lstStyle xmlns:a="http://schemas.openxmlformats.org/drawingml/2006/main"/>
-          <a:p xmlns:a="http://schemas.openxmlformats.org/drawingml/2006/main"/>
-        </p:txBody>
-      </p:sp>
-    </p:spTree>
-  </p:cSld>
-  <p:clrMapOvr>
-    <a:masterClrMapping xmlns:a="http://schemas.openxmlformats.org/drawingml/2006/main"/>
-  </p:clrMapOvr>
-</p:notes>
-</file>
-
-<file path=ppt/notesSlides/notesSlide8.xml><?xml version="1.0" encoding="utf-8"?>
-<p:notes xmlns:p="http://schemas.openxmlformats.org/presentationml/2006/main">
-  <p:cSld>
-    <p:spTree>
-      <p:nvGrpSpPr>
-        <p:cNvPr id="1" name=""/>
-        <p:cNvGrpSpPr/>
-        <p:nvPr/>
-      </p:nvGrpSpPr>
-      <p:grpSpPr>
-        <a:xfrm xmlns:a="http://schemas.openxmlformats.org/drawingml/2006/main"/>
-      </p:grpSpPr>
-      <p:sp>
-        <p:nvSpPr>
-          <p:cNvPr id="2" name="Slide Image Placeholder 1"/>
-          <p:cNvSpPr>
-            <a:spLocks xmlns:a="http://schemas.openxmlformats.org/drawingml/2006/main" noGrp="1"/>
-          </p:cNvSpPr>
-          <p:nvPr>
-            <p:ph type="sldImg" idx="0"/>
-          </p:nvPr>
-        </p:nvSpPr>
-        <p:spPr/>
-      </p:sp>
-      <p:sp>
-        <p:nvSpPr>
-          <p:cNvPr id="3" name="Notes Placeholder 2"/>
-          <p:cNvSpPr>
-            <a:spLocks xmlns:a="http://schemas.openxmlformats.org/drawingml/2006/main" noGrp="1"/>
-          </p:cNvSpPr>
-          <p:nvPr>
-            <p:ph type="body" idx="1"/>
-          </p:nvPr>
-        </p:nvSpPr>
-        <p:spPr/>
-        <p:txBody>
-          <a:bodyPr xmlns:a="http://schemas.openxmlformats.org/drawingml/2006/main"/>
-          <a:lstStyle xmlns:a="http://schemas.openxmlformats.org/drawingml/2006/main"/>
-          <a:p xmlns:a="http://schemas.openxmlformats.org/drawingml/2006/main">
-            <a:r>
-              <a:t>Zeit: ca. 45 Sekunden</a:t>
-            </a:r>
-          </a:p>
-          <a:p xmlns:a="http://schemas.openxmlformats.org/drawingml/2006/main">
-            <a:r>
-              <a:t/>
-            </a:r>
-          </a:p>
-          <a:p xmlns:a="http://schemas.openxmlformats.org/drawingml/2006/main">
-            <a:r>
-              <a:t>Meine Entscheidung lautet NO-GO. DEF-01 verletzt die Vertraulichkeit und DEF-05 legt interne Informationen offen. Vor einem neuen Release-Entscheid müssen die offenen Defects korrigiert, gezielt retestet und mit einer vollständigen Regression abgesichert werden.</a:t>
-            </a:r>
-          </a:p>
-        </p:txBody>
-      </p:sp>
-      <p:sp>
-        <p:nvSpPr>
-          <p:cNvPr id="4" name="Slide Number Placeholder 3"/>
-          <p:cNvSpPr>
-            <a:spLocks xmlns:a="http://schemas.openxmlformats.org/drawingml/2006/main" noGrp="1"/>
-          </p:cNvSpPr>
-          <p:nvPr>
-            <p:ph type="sldNum" idx="5"/>
-          </p:nvPr>
-        </p:nvSpPr>
-        <p:spPr/>
-        <p:txBody>
-          <a:bodyPr xmlns:a="http://schemas.openxmlformats.org/drawingml/2006/main"/>
-          <a:lstStyle xmlns:a="http://schemas.openxmlformats.org/drawingml/2006/main"/>
-          <a:p xmlns:a="http://schemas.openxmlformats.org/drawingml/2006/main"/>
-        </p:txBody>
-      </p:sp>
-    </p:spTree>
-  </p:cSld>
-  <p:clrMapOvr>
-    <a:masterClrMapping xmlns:a="http://schemas.openxmlformats.org/drawingml/2006/main"/>
-  </p:clrMapOvr>
-</p:notes>
-</file>
-
-<file path=ppt/slideLayouts/slideLayout1.xml><?xml version="1.0" encoding="utf-8"?>
-<p:sldLayout xmlns:p="http://schemas.openxmlformats.org/presentationml/2006/main" type="title">
-  <p:cSld name="Title Slide">
-    <p:spTree>
-      <p:nvGrpSpPr>
-        <p:cNvPr id="1" name=""/>
-        <p:cNvGrpSpPr/>
-        <p:nvPr/>
-      </p:nvGrpSpPr>
-      <p:grpSpPr>
-        <a:xfrm xmlns:a="http://schemas.openxmlformats.org/drawingml/2006/main"/>
-      </p:grpSpPr>
-    </p:spTree>
-  </p:cSld>
-</p:sldLayout>
-</file>
-
-<file path=ppt/slideMasters/slideMaster1.xml><?xml version="1.0" encoding="utf-8"?>
-<p:sldMaster xmlns:p="http://schemas.openxmlformats.org/presentationml/2006/main">
-  <p:cSld name="Master">
-    <p:bg>
-      <p:bgRef idx="1001">
-        <a:schemeClr xmlns:a="http://schemas.openxmlformats.org/drawingml/2006/main" val="bg1"/>
-      </p:bgRef>
-    </p:bg>
-    <p:spTree>
-      <p:nvGrpSpPr>
-        <p:cNvPr id="1" name=""/>
-        <p:cNvGrpSpPr/>
-        <p:nvPr/>
-      </p:nvGrpSpPr>
-      <p:grpSpPr>
-        <a:xfrm xmlns:a="http://schemas.openxmlformats.org/drawingml/2006/main"/>
-      </p:grpSpPr>
-    </p:spTree>
-  </p:cSld>
-  <p:clrMap bg1="lt1" tx1="dk1" bg2="lt2" tx2="dk2" accent1="accent1" accent2="accent2" accent3="accent3" accent4="accent4" accent5="accent5" accent6="accent6" hlink="hlink" folHlink="folHlink"/>
-  <p:sldLayoutIdLst>
-    <p:sldLayoutId xmlns:r="http://schemas.openxmlformats.org/officeDocument/2006/relationships" id="2147483649" r:id="R4499537c32ff4abd"/>
-  </p:sldLayoutIdLst>
-  <p:txStyles>
-    <p:titleStyle>
-      <a:lvl1pPr xmlns:a="http://schemas.openxmlformats.org/drawingml/2006/main" algn="l">
-        <a:lnSpc>
-          <a:spcPct val="90000"/>
-        </a:lnSpc>
-        <a:spcBef>
-          <a:spcPts val="0"/>
-        </a:spcBef>
-        <a:buNone/>
-        <a:defRPr sz="4400">
-          <a:solidFill>
-            <a:schemeClr val="tx1"/>
-          </a:solidFill>
-          <a:latin typeface="+mj-lt"/>
-          <a:ea typeface="+mj-lt"/>
-          <a:cs typeface="+mj-lt"/>
-        </a:defRPr>
-      </a:lvl1pPr>
-    </p:titleStyle>
-    <p:bodyStyle>
-      <a:lvl1pPr xmlns:a="http://schemas.openxmlformats.org/drawingml/2006/main" marL="228600" indent="-228600" algn="l">
-        <a:lnSpc>
-          <a:spcPct val="90000"/>
-        </a:lnSpc>
-        <a:spcBef>
-          <a:spcPts val="1000"/>
-        </a:spcBef>
-        <a:buChar char="•"/>
-        <a:defRPr sz="2800">
-          <a:solidFill>
-            <a:schemeClr val="tx1"/>
-          </a:solidFill>
-          <a:latin typeface="+mn-lt"/>
-          <a:ea typeface="+mn-lt"/>
-          <a:cs typeface="+mn-lt"/>
-        </a:defRPr>
-      </a:lvl1pPr>
-      <a:lvl2pPr xmlns:a="http://schemas.openxmlformats.org/drawingml/2006/main" marL="685800" indent="-228600" algn="l">
-        <a:lnSpc>
-          <a:spcPct val="90000"/>
-        </a:lnSpc>
-        <a:spcBef>
-          <a:spcPts val="500"/>
-        </a:spcBef>
-        <a:buChar char="•"/>
-        <a:defRPr sz="2400">
-          <a:solidFill>
-            <a:schemeClr val="tx1"/>
-          </a:solidFill>
-          <a:latin typeface="+mn-lt"/>
-          <a:ea typeface="+mn-lt"/>
-          <a:cs typeface="+mn-lt"/>
-        </a:defRPr>
-      </a:lvl2pPr>
-      <a:lvl3pPr xmlns:a="http://schemas.openxmlformats.org/drawingml/2006/main" marL="1143000" indent="-228600" algn="l">
-        <a:lnSpc>
-          <a:spcPct val="90000"/>
-        </a:lnSpc>
-        <a:spcBef>
-          <a:spcPts val="500"/>
-        </a:spcBef>
-        <a:buChar char="•"/>
-        <a:defRPr sz="2000">
-          <a:solidFill>
-            <a:schemeClr val="tx1"/>
-          </a:solidFill>
-          <a:latin typeface="+mn-lt"/>
-          <a:ea typeface="+mn-lt"/>
-          <a:cs typeface="+mn-lt"/>
-        </a:defRPr>
-      </a:lvl3pPr>
-      <a:lvl4pPr xmlns:a="http://schemas.openxmlformats.org/drawingml/2006/main" marL="1600200" indent="-228600" algn="l">
-        <a:lnSpc>
-          <a:spcPct val="90000"/>
-        </a:lnSpc>
-        <a:spcBef>
-          <a:spcPts val="500"/>
-        </a:spcBef>
-        <a:buChar char="•"/>
-        <a:defRPr sz="1800">
-          <a:solidFill>
-            <a:schemeClr val="tx1"/>
-          </a:solidFill>
-          <a:latin typeface="+mn-lt"/>
-          <a:ea typeface="+mn-lt"/>
-          <a:cs typeface="+mn-lt"/>
-        </a:defRPr>
-      </a:lvl4pPr>
-      <a:lvl5pPr xmlns:a="http://schemas.openxmlformats.org/drawingml/2006/main" marL="2057400" indent="-228600" algn="l">
-        <a:lnSpc>
-          <a:spcPct val="90000"/>
-        </a:lnSpc>
-        <a:spcBef>
-          <a:spcPts val="500"/>
-        </a:spcBef>
-        <a:buChar char="•"/>
-        <a:defRPr sz="1800">
-          <a:solidFill>
-            <a:schemeClr val="tx1"/>
-          </a:solidFill>
-          <a:latin typeface="+mn-lt"/>
-          <a:ea typeface="+mn-lt"/>
-          <a:cs typeface="+mn-lt"/>
-        </a:defRPr>
-      </a:lvl5pPr>
-      <a:lvl6pPr xmlns:a="http://schemas.openxmlformats.org/drawingml/2006/main" marL="2514600" indent="-228600" algn="l">
-        <a:lnSpc>
-          <a:spcPct val="90000"/>
-        </a:lnSpc>
-        <a:spcBef>
-          <a:spcPts val="500"/>
-        </a:spcBef>
-        <a:buChar char="•"/>
-        <a:defRPr sz="1800">
-          <a:solidFill>
-            <a:schemeClr val="tx1"/>
-          </a:solidFill>
-          <a:latin typeface="+mn-lt"/>
-          <a:ea typeface="+mn-lt"/>
-          <a:cs typeface="+mn-lt"/>
-        </a:defRPr>
-      </a:lvl6pPr>
-      <a:lvl7pPr xmlns:a="http://schemas.openxmlformats.org/drawingml/2006/main" marL="2971800" indent="-228600" algn="l">
-        <a:lnSpc>
-          <a:spcPct val="90000"/>
-        </a:lnSpc>
-        <a:spcBef>
-          <a:spcPts val="500"/>
-        </a:spcBef>
-        <a:buChar char="•"/>
-        <a:defRPr sz="1800">
-          <a:solidFill>
-            <a:schemeClr val="tx1"/>
-          </a:solidFill>
-          <a:latin typeface="+mn-lt"/>
-          <a:ea typeface="+mn-lt"/>
-          <a:cs typeface="+mn-lt"/>
-        </a:defRPr>
-      </a:lvl7pPr>
-      <a:lvl8pPr xmlns:a="http://schemas.openxmlformats.org/drawingml/2006/main" marL="3429000" indent="-228600" algn="l">
-        <a:lnSpc>
-          <a:spcPct val="90000"/>
-        </a:lnSpc>
-        <a:spcBef>
-          <a:spcPts val="500"/>
-        </a:spcBef>
-        <a:buChar char="•"/>
-        <a:defRPr sz="1800">
-          <a:solidFill>
-            <a:schemeClr val="tx1"/>
-          </a:solidFill>
-          <a:latin typeface="+mn-lt"/>
-          <a:ea typeface="+mn-lt"/>
-          <a:cs typeface="+mn-lt"/>
-        </a:defRPr>
-      </a:lvl8pPr>
-      <a:lvl9pPr xmlns:a="http://schemas.openxmlformats.org/drawingml/2006/main" marL="3886200" indent="-228600" algn="l">
-        <a:lnSpc>
-          <a:spcPct val="90000"/>
-        </a:lnSpc>
-        <a:spcBef>
-          <a:spcPts val="500"/>
-        </a:spcBef>
-        <a:buChar char="•"/>
-        <a:defRPr sz="1800">
-          <a:solidFill>
-            <a:schemeClr val="tx1"/>
-          </a:solidFill>
-          <a:latin typeface="+mn-lt"/>
-          <a:ea typeface="+mn-lt"/>
-          <a:cs typeface="+mn-lt"/>
-        </a:defRPr>
-      </a:lvl9pPr>
-    </p:bodyStyle>
-    <p:otherStyle>
-      <a:lvl1pPr xmlns:a="http://schemas.openxmlformats.org/drawingml/2006/main" marL="0" algn="l">
-        <a:buNone/>
-        <a:defRPr sz="1800">
-          <a:solidFill>
-            <a:schemeClr val="tx1"/>
-          </a:solidFill>
-          <a:latin typeface="+mn-lt"/>
-          <a:ea typeface="+mn-lt"/>
-          <a:cs typeface="+mn-lt"/>
-        </a:defRPr>
-      </a:lvl1pPr>
-      <a:lvl2pPr xmlns:a="http://schemas.openxmlformats.org/drawingml/2006/main" marL="457200" algn="l">
-        <a:buNone/>
-        <a:defRPr sz="1800">
-          <a:solidFill>
-            <a:schemeClr val="tx1"/>
-          </a:solidFill>
-          <a:latin typeface="+mn-lt"/>
-          <a:ea typeface="+mn-lt"/>
-          <a:cs typeface="+mn-lt"/>
-        </a:defRPr>
-      </a:lvl2pPr>
-      <a:lvl3pPr xmlns:a="http://schemas.openxmlformats.org/drawingml/2006/main" marL="914400" algn="l">
-        <a:buNone/>
-        <a:defRPr sz="1800">
-          <a:solidFill>
-            <a:schemeClr val="tx1"/>
-          </a:solidFill>
-          <a:latin typeface="+mn-lt"/>
-          <a:ea typeface="+mn-lt"/>
-          <a:cs typeface="+mn-lt"/>
-        </a:defRPr>
-      </a:lvl3pPr>
-      <a:lvl4pPr xmlns:a="http://schemas.openxmlformats.org/drawingml/2006/main" marL="1371600" algn="l">
-        <a:buNone/>
-        <a:defRPr sz="1800">
-          <a:solidFill>
-            <a:schemeClr val="tx1"/>
-          </a:solidFill>
-          <a:latin typeface="+mn-lt"/>
-          <a:ea typeface="+mn-lt"/>
-          <a:cs typeface="+mn-lt"/>
-        </a:defRPr>
-      </a:lvl4pPr>
-      <a:lvl5pPr xmlns:a="http://schemas.openxmlformats.org/drawingml/2006/main" marL="1828800" algn="l">
-        <a:buNone/>
-        <a:defRPr sz="1800">
-          <a:solidFill>
-            <a:schemeClr val="tx1"/>
-          </a:solidFill>
-          <a:latin typeface="+mn-lt"/>
-          <a:ea typeface="+mn-lt"/>
-          <a:cs typeface="+mn-lt"/>
-        </a:defRPr>
-      </a:lvl5pPr>
-      <a:lvl6pPr xmlns:a="http://schemas.openxmlformats.org/drawingml/2006/main" marL="2286000" algn="l">
-        <a:buNone/>
-        <a:defRPr sz="1800">
-          <a:solidFill>
-            <a:schemeClr val="tx1"/>
-          </a:solidFill>
-          <a:latin typeface="+mn-lt"/>
-          <a:ea typeface="+mn-lt"/>
-          <a:cs typeface="+mn-lt"/>
-        </a:defRPr>
-      </a:lvl6pPr>
-      <a:lvl7pPr xmlns:a="http://schemas.openxmlformats.org/drawingml/2006/main" marL="2743200" algn="l">
-        <a:buNone/>
-        <a:defRPr sz="1800">
-          <a:solidFill>
-            <a:schemeClr val="tx1"/>
-          </a:solidFill>
-          <a:latin typeface="+mn-lt"/>
-          <a:ea typeface="+mn-lt"/>
-          <a:cs typeface="+mn-lt"/>
-        </a:defRPr>
-      </a:lvl7pPr>
-      <a:lvl8pPr xmlns:a="http://schemas.openxmlformats.org/drawingml/2006/main" marL="3200400" algn="l">
-        <a:buNone/>
-        <a:defRPr sz="1800">
-          <a:solidFill>
-            <a:schemeClr val="tx1"/>
-          </a:solidFill>
-          <a:latin typeface="+mn-lt"/>
-          <a:ea typeface="+mn-lt"/>
-          <a:cs typeface="+mn-lt"/>
-        </a:defRPr>
-      </a:lvl8pPr>
-      <a:lvl9pPr xmlns:a="http://schemas.openxmlformats.org/drawingml/2006/main" marL="3657600" algn="l">
-        <a:buNone/>
-        <a:defRPr sz="1800">
-          <a:solidFill>
-            <a:schemeClr val="tx1"/>
-          </a:solidFill>
-          <a:latin typeface="+mn-lt"/>
-          <a:ea typeface="+mn-lt"/>
-          <a:cs typeface="+mn-lt"/>
-        </a:defRPr>
-      </a:lvl9pPr>
-    </p:otherStyle>
-  </p:txStyles>
-</p:sldMaster>
-</file>
-
-<file path=ppt/slideMasters/theme/theme2.xml><?xml version="1.0" encoding="utf-8"?>
-<a:theme xmlns:a="http://schemas.openxmlformats.org/drawingml/2006/main" name="ChatGPT">
-  <a:themeElements>
-    <a:clrScheme name="ChatGPT">
-      <a:dk1>
-        <a:srgbClr val="000000"/>
-      </a:dk1>
-      <a:lt1>
-        <a:srgbClr val="FFFFFF"/>
-      </a:lt1>
-      <a:dk2>
-        <a:srgbClr val="0E2841"/>
-      </a:dk2>
-      <a:lt2>
-        <a:srgbClr val="E8E8E8"/>
-      </a:lt2>
-      <a:accent1>
-        <a:srgbClr val="156082"/>
-      </a:accent1>
-      <a:accent2>
-        <a:srgbClr val="E97132"/>
-      </a:accent2>
-      <a:accent3>
-        <a:srgbClr val="196B24"/>
-      </a:accent3>
-      <a:accent4>
-        <a:srgbClr val="0F9ED5"/>
-      </a:accent4>
-      <a:accent5>
-        <a:srgbClr val="A02B93"/>
-      </a:accent5>
-      <a:accent6>
-        <a:srgbClr val="4EA72E"/>
-      </a:accent6>
-      <a:hlink>
-        <a:srgbClr val="467886"/>
-      </a:hlink>
-      <a:folHlink>
-        <a:srgbClr val="96607D"/>
-      </a:folHlink>
-    </a:clrScheme>
-    <a:fontScheme name="Office">
-      <a:majorFont>
-        <a:latin typeface="Calibri Light"/>
-        <a:ea typeface="Calibri Light"/>
-        <a:cs typeface="Calibri Light"/>
-      </a:majorFont>
-      <a:minorFont>
-        <a:latin typeface="Calibri"/>
-        <a:ea typeface="Calibri"/>
-        <a:cs typeface="Calibri"/>
-      </a:minorFont>
-    </a:fontScheme>
-    <a:fmtScheme name="ChatGPT">
-      <a:fillStyleLst>
-        <a:solidFill>
-          <a:schemeClr val="phClr"/>
-        </a:solidFill>
-        <a:gradFill>
-          <a:gsLst>
-            <a:gs pos="0">
-              <a:schemeClr val="phClr">
-                <a:tint val="67000"/>
-                <a:lumMod val="110000"/>
-                <a:satMod val="105000"/>
-              </a:schemeClr>
-            </a:gs>
-            <a:gs pos="50000">
-              <a:schemeClr val="phClr">
-                <a:tint val="73000"/>
-                <a:lumMod val="105000"/>
-                <a:satMod val="103000"/>
-              </a:schemeClr>
-            </a:gs>
-            <a:gs pos="100000">
-              <a:schemeClr val="phClr">
-                <a:tint val="81000"/>
-                <a:lumMod val="105000"/>
-                <a:satMod val="109000"/>
-              </a:schemeClr>
-            </a:gs>
-          </a:gsLst>
-          <a:lin ang="5400000" scaled="0"/>
-        </a:gradFill>
-        <a:gradFill>
-          <a:gsLst>
-            <a:gs pos="0">
-              <a:schemeClr val="phClr">
-                <a:tint val="94000"/>
-                <a:lumMod val="102000"/>
-                <a:satMod val="103000"/>
-              </a:schemeClr>
-            </a:gs>
-            <a:gs pos="50000">
-              <a:schemeClr val="phClr">
-                <a:shade val="100000"/>
-                <a:lumMod val="100000"/>
-                <a:satMod val="110000"/>
-              </a:schemeClr>
-            </a:gs>
-            <a:gs pos="100000">
-              <a:schemeClr val="phClr">
-                <a:shade val="78000"/>
-                <a:lumMod val="99000"/>
-                <a:satMod val="120000"/>
-              </a:schemeClr>
-            </a:gs>
-          </a:gsLst>
-          <a:lin ang="5400000" scaled="0"/>
-        </a:gradFill>
-      </a:fillStyleLst>
-      <a:lnStyleLst>
-        <a:ln w="12700">
-          <a:solidFill>
-            <a:schemeClr val="phClr"/>
-          </a:solidFill>
-          <a:prstDash val="solid"/>
-        </a:ln>
-        <a:ln w="19050">
-          <a:solidFill>
-            <a:schemeClr val="phClr"/>
-          </a:solidFill>
-          <a:prstDash val="solid"/>
-        </a:ln>
-        <a:ln w="25400">
-          <a:solidFill>
-            <a:schemeClr val="phClr"/>
-          </a:solidFill>
-          <a:prstDash val="solid"/>
-        </a:ln>
-      </a:lnStyleLst>
-      <a:effectStyleLst>
-        <a:effectStyle>
-          <a:effectLst/>
-        </a:effectStyle>
-        <a:effectStyle>
-          <a:effectLst/>
-        </a:effectStyle>
-        <a:effectStyle>
-          <a:effectLst>
-            <a:outerShdw blurRad="57150" dist="19050" dir="5400000">
-              <a:srgbClr val="000000">
-                <a:alpha val="16000"/>
-              </a:srgbClr>
-            </a:outerShdw>
-          </a:effectLst>
-        </a:effectStyle>
-        <a:effectStyle>
-          <a:effectLst>
-            <a:outerShdw blurRad="19050" dist="9525" dir="5400000">
-              <a:srgbClr val="000000">
-                <a:alpha val="6000"/>
-              </a:srgbClr>
-            </a:outerShdw>
-          </a:effectLst>
-        </a:effectStyle>
-        <a:effectStyle>
-          <a:effectLst>
-            <a:outerShdw blurRad="28575" dist="9525" dir="5400000">
-              <a:srgbClr val="000000">
-                <a:alpha val="8000"/>
-              </a:srgbClr>
-            </a:outerShdw>
-          </a:effectLst>
-        </a:effectStyle>
-        <a:effectStyle>
-          <a:effectLst>
-            <a:outerShdw blurRad="57150" dist="19050" dir="5400000">
-              <a:srgbClr val="000000">
-                <a:alpha val="10000"/>
-              </a:srgbClr>
-            </a:outerShdw>
-          </a:effectLst>
-        </a:effectStyle>
-        <a:effectStyle>
-          <a:effectLst>
-            <a:outerShdw blurRad="114300" dist="38100" dir="5400000">
-              <a:srgbClr val="000000">
-                <a:alpha val="12000"/>
-              </a:srgbClr>
-            </a:outerShdw>
-          </a:effectLst>
-        </a:effectStyle>
-        <a:effectStyle>
-          <a:effectLst>
-            <a:outerShdw blurRad="171450" dist="57150" dir="5400000">
-              <a:srgbClr val="000000">
-                <a:alpha val="16000"/>
-              </a:srgbClr>
-            </a:outerShdw>
-          </a:effectLst>
-        </a:effectStyle>
-        <a:effectStyle>
-          <a:effectLst>
-            <a:outerShdw blurRad="266700" dist="95250" dir="5400000">
-              <a:srgbClr val="000000">
-                <a:alpha val="24000"/>
-              </a:srgbClr>
-            </a:outerShdw>
-          </a:effectLst>
-        </a:effectStyle>
-      </a:effectStyleLst>
-      <a:bgFillStyleLst>
-        <a:solidFill>
-          <a:schemeClr val="phClr"/>
-        </a:solidFill>
-        <a:solidFill>
-          <a:schemeClr val="phClr">
-            <a:tint val="95000"/>
-            <a:satMod val="170000"/>
-          </a:schemeClr>
-        </a:solidFill>
-        <a:gradFill>
-          <a:gsLst>
-            <a:gs pos="0">
-              <a:schemeClr val="phClr">
-                <a:tint val="93000"/>
-                <a:shade val="98000"/>
-                <a:lumMod val="102000"/>
-                <a:satMod val="150000"/>
-              </a:schemeClr>
-            </a:gs>
-            <a:gs pos="50000">
-              <a:schemeClr val="phClr">
-                <a:tint val="98000"/>
-                <a:shade val="90000"/>
-                <a:lumMod val="103000"/>
-                <a:satMod val="130000"/>
-              </a:schemeClr>
-            </a:gs>
-            <a:gs pos="100000">
-              <a:schemeClr val="phClr">
-                <a:shade val="63000"/>
-                <a:satMod val="120000"/>
-              </a:schemeClr>
-            </a:gs>
-          </a:gsLst>
-          <a:lin ang="5400000" scaled="0"/>
-        </a:gradFill>
-      </a:bgFillStyleLst>
-    </a:fmtScheme>
-  </a:themeElements>
-</a:theme>
-</file>
-
-<file path=ppt/slides/charts/chart1.xml><?xml version="1.0" encoding="utf-8"?>
-<c:chartSpace xmlns:c="http://schemas.openxmlformats.org/drawingml/2006/chart" xmlns:r="http://schemas.openxmlformats.org/officeDocument/2006/relationships">
-  <c:lang val="en-US"/>
+<file path=ppt/charts/chart1.xml><?xml version="1.0" encoding="utf-8"?>
+<c:chartSpace xmlns:c="http://schemas.openxmlformats.org/drawingml/2006/chart" xmlns:a="http://schemas.openxmlformats.org/drawingml/2006/main" xmlns:r="http://schemas.openxmlformats.org/officeDocument/2006/relationships" xmlns:c16r2="http://schemas.microsoft.com/office/drawing/2015/06/chart">
+  <c:date1904 val="1"/>
+  <c:lang val="de-DE"/>
+  <c:roundedCorners val="1"/>
+  <c:style val="2"/>
   <c:chart>
+    <c:autoTitleDeleted val="1"/>
     <c:plotArea>
+      <c:layout/>
       <c:doughnutChart>
+        <c:varyColors val="1"/>
         <c:ser>
           <c:idx val="0"/>
           <c:order val="0"/>
@@ -1628,20 +137,68 @@
           </c:tx>
           <c:dPt>
             <c:idx val="0"/>
+            <c:bubble3D val="0"/>
             <c:spPr>
-              <a:solidFill xmlns:a="http://schemas.openxmlformats.org/drawingml/2006/main">
+              <a:solidFill>
                 <a:srgbClr val="1F7A4D"/>
               </a:solidFill>
             </c:spPr>
+            <c:extLst>
+              <c:ext xmlns:c16="http://schemas.microsoft.com/office/drawing/2014/chart" uri="{C3380CC4-5D6E-409C-BE32-E72D297353CC}">
+                <c16:uniqueId val="{00000001-70AA-472E-857C-6BD8CFA3F931}"/>
+              </c:ext>
+            </c:extLst>
           </c:dPt>
           <c:dPt>
             <c:idx val="1"/>
+            <c:bubble3D val="0"/>
             <c:spPr>
-              <a:solidFill xmlns:a="http://schemas.openxmlformats.org/drawingml/2006/main">
+              <a:solidFill>
                 <a:srgbClr val="C53B3B"/>
               </a:solidFill>
             </c:spPr>
+            <c:extLst>
+              <c:ext xmlns:c16="http://schemas.microsoft.com/office/drawing/2014/chart" uri="{C3380CC4-5D6E-409C-BE32-E72D297353CC}">
+                <c16:uniqueId val="{00000003-70AA-472E-857C-6BD8CFA3F931}"/>
+              </c:ext>
+            </c:extLst>
           </c:dPt>
+          <c:dLbls>
+            <c:spPr>
+              <a:noFill/>
+              <a:ln>
+                <a:noFill/>
+              </a:ln>
+              <a:effectLst/>
+            </c:spPr>
+            <c:txPr>
+              <a:bodyPr anchorCtr="1"/>
+              <a:lstStyle/>
+              <a:p>
+                <a:pPr>
+                  <a:defRPr sz="1350" b="1">
+                    <a:solidFill>
+                      <a:srgbClr val="FFFFFF"/>
+                    </a:solidFill>
+                    <a:latin typeface="Bitstream Charter"/>
+                    <a:ea typeface="Bitstream Charter"/>
+                    <a:cs typeface="Bitstream Charter"/>
+                  </a:defRPr>
+                </a:pPr>
+                <a:endParaRPr lang="de-DE"/>
+              </a:p>
+            </c:txPr>
+            <c:showLegendKey val="0"/>
+            <c:showVal val="1"/>
+            <c:showCatName val="0"/>
+            <c:showSerName val="0"/>
+            <c:showPercent val="0"/>
+            <c:showBubbleSize val="0"/>
+            <c:showLeaderLines val="0"/>
+            <c:extLst>
+              <c:ext xmlns:c15="http://schemas.microsoft.com/office/drawing/2012/chart" uri="{CE6537A1-D6FC-4f65-9D91-7224C49458BB}"/>
+            </c:extLst>
+          </c:dLbls>
           <c:cat>
             <c:strRef>
               <c:f>'Chart Data'!$A$2:$A$3</c:f>
@@ -1671,24 +228,13 @@
               </c:numCache>
             </c:numRef>
           </c:val>
+          <c:extLst>
+            <c:ext xmlns:c16="http://schemas.microsoft.com/office/drawing/2014/chart" uri="{C3380CC4-5D6E-409C-BE32-E72D297353CC}">
+              <c16:uniqueId val="{00000004-70AA-472E-857C-6BD8CFA3F931}"/>
+            </c:ext>
+          </c:extLst>
         </c:ser>
         <c:dLbls>
-          <c:txPr>
-            <a:bodyPr xmlns:a="http://schemas.openxmlformats.org/drawingml/2006/main" anchorCtr="1"/>
-            <a:lstStyle xmlns:a="http://schemas.openxmlformats.org/drawingml/2006/main"/>
-            <a:p xmlns:a="http://schemas.openxmlformats.org/drawingml/2006/main">
-              <a:pPr>
-                <a:defRPr sz="1350" b="1">
-                  <a:solidFill>
-                    <a:srgbClr val="FFFFFF"/>
-                  </a:solidFill>
-                  <a:latin typeface="Bitstream Charter"/>
-                  <a:ea typeface="Bitstream Charter"/>
-                  <a:cs typeface="Bitstream Charter"/>
-                </a:defRPr>
-              </a:pPr>
-            </a:p>
-          </c:txPr>
           <c:showLegendKey val="0"/>
           <c:showVal val="1"/>
           <c:showCatName val="0"/>
@@ -1697,6 +243,7 @@
           <c:showBubbleSize val="0"/>
           <c:showLeaderLines val="0"/>
         </c:dLbls>
+        <c:firstSliceAng val="0"/>
         <c:holeSize val="62"/>
       </c:doughnutChart>
     </c:plotArea>
@@ -1704,9 +251,9 @@
       <c:legendPos val="b"/>
       <c:overlay val="0"/>
       <c:txPr>
-        <a:bodyPr xmlns:a="http://schemas.openxmlformats.org/drawingml/2006/main" anchorCtr="1"/>
-        <a:lstStyle xmlns:a="http://schemas.openxmlformats.org/drawingml/2006/main"/>
-        <a:p xmlns:a="http://schemas.openxmlformats.org/drawingml/2006/main">
+        <a:bodyPr anchorCtr="1"/>
+        <a:lstStyle/>
+        <a:p>
           <a:pPr>
             <a:defRPr sz="1125">
               <a:solidFill>
@@ -1717,33 +264,1221 @@
               <a:cs typeface="Bitstream Charter"/>
             </a:defRPr>
           </a:pPr>
+          <a:endParaRPr lang="de-DE"/>
         </a:p>
       </c:txPr>
     </c:legend>
     <c:plotVisOnly val="1"/>
+    <c:dispBlanksAs val="zero"/>
+    <c:showDLblsOverMax val="1"/>
   </c:chart>
   <c:spPr>
-    <a:solidFill xmlns:a="http://schemas.openxmlformats.org/drawingml/2006/main">
+    <a:solidFill>
       <a:srgbClr val="FFFFFF"/>
     </a:solidFill>
-    <a:ln xmlns:a="http://schemas.openxmlformats.org/drawingml/2006/main" w="0">
+    <a:ln w="0">
       <a:noFill/>
     </a:ln>
   </c:spPr>
-  <c:externalData r:id="rIdChartSnapshot1">
+  <c:externalData r:id="rId1">
     <c:autoUpdate val="0"/>
   </c:externalData>
 </c:chartSpace>
 </file>
 
+<file path=ppt/notesMasters/notesMaster1.xml><?xml version="1.0" encoding="utf-8"?>
+<p:notesMaster xmlns:a="http://schemas.openxmlformats.org/drawingml/2006/main" xmlns:r="http://schemas.openxmlformats.org/officeDocument/2006/relationships" xmlns:p="http://schemas.openxmlformats.org/presentationml/2006/main">
+  <p:cSld>
+    <p:bg>
+      <p:bgRef idx="1001">
+        <a:schemeClr val="bg1"/>
+      </p:bgRef>
+    </p:bg>
+    <p:spTree>
+      <p:nvGrpSpPr>
+        <p:cNvPr id="1" name=""/>
+        <p:cNvGrpSpPr/>
+        <p:nvPr/>
+      </p:nvGrpSpPr>
+      <p:grpSpPr>
+        <a:xfrm>
+          <a:off x="0" y="0"/>
+          <a:ext cx="0" cy="0"/>
+          <a:chOff x="0" y="0"/>
+          <a:chExt cx="0" cy="0"/>
+        </a:xfrm>
+      </p:grpSpPr>
+      <p:sp>
+        <p:nvSpPr>
+          <p:cNvPr id="2" name="Header Placeholder"/>
+          <p:cNvSpPr>
+            <a:spLocks noGrp="1"/>
+          </p:cNvSpPr>
+          <p:nvPr>
+            <p:ph type="hdr" sz="quarter"/>
+          </p:nvPr>
+        </p:nvSpPr>
+        <p:spPr>
+          <a:prstGeom prst="rect">
+            <a:avLst/>
+          </a:prstGeom>
+        </p:spPr>
+        <p:txBody>
+          <a:bodyPr/>
+          <a:lstStyle/>
+          <a:p>
+            <a:endParaRPr/>
+          </a:p>
+        </p:txBody>
+      </p:sp>
+      <p:sp>
+        <p:nvSpPr>
+          <p:cNvPr id="3" name="Date Placeholder"/>
+          <p:cNvSpPr>
+            <a:spLocks noGrp="1"/>
+          </p:cNvSpPr>
+          <p:nvPr>
+            <p:ph type="dt" sz="quarter" idx="1"/>
+          </p:nvPr>
+        </p:nvSpPr>
+        <p:spPr>
+          <a:prstGeom prst="rect">
+            <a:avLst/>
+          </a:prstGeom>
+        </p:spPr>
+        <p:txBody>
+          <a:bodyPr/>
+          <a:lstStyle/>
+          <a:p>
+            <a:endParaRPr/>
+          </a:p>
+        </p:txBody>
+      </p:sp>
+      <p:sp>
+        <p:nvSpPr>
+          <p:cNvPr id="4" name="Slide Image Placeholder"/>
+          <p:cNvSpPr>
+            <a:spLocks noGrp="1" noRot="1" noChangeAspect="1"/>
+          </p:cNvSpPr>
+          <p:nvPr>
+            <p:ph type="sldImg" idx="2"/>
+          </p:nvPr>
+        </p:nvSpPr>
+        <p:spPr>
+          <a:prstGeom prst="rect">
+            <a:avLst/>
+          </a:prstGeom>
+        </p:spPr>
+        <p:txBody>
+          <a:bodyPr/>
+          <a:lstStyle/>
+          <a:p>
+            <a:endParaRPr/>
+          </a:p>
+        </p:txBody>
+      </p:sp>
+      <p:sp>
+        <p:nvSpPr>
+          <p:cNvPr id="5" name="Notes Placeholder"/>
+          <p:cNvSpPr>
+            <a:spLocks noGrp="1"/>
+          </p:cNvSpPr>
+          <p:nvPr>
+            <p:ph type="body" sz="quarter" idx="3"/>
+          </p:nvPr>
+        </p:nvSpPr>
+        <p:spPr>
+          <a:prstGeom prst="rect">
+            <a:avLst/>
+          </a:prstGeom>
+        </p:spPr>
+        <p:txBody>
+          <a:bodyPr/>
+          <a:lstStyle/>
+          <a:p>
+            <a:endParaRPr/>
+          </a:p>
+        </p:txBody>
+      </p:sp>
+      <p:sp>
+        <p:nvSpPr>
+          <p:cNvPr id="6" name="Footer Placeholder"/>
+          <p:cNvSpPr>
+            <a:spLocks noGrp="1"/>
+          </p:cNvSpPr>
+          <p:nvPr>
+            <p:ph type="ftr" sz="quarter" idx="4"/>
+          </p:nvPr>
+        </p:nvSpPr>
+        <p:spPr>
+          <a:prstGeom prst="rect">
+            <a:avLst/>
+          </a:prstGeom>
+        </p:spPr>
+        <p:txBody>
+          <a:bodyPr/>
+          <a:lstStyle/>
+          <a:p>
+            <a:endParaRPr/>
+          </a:p>
+        </p:txBody>
+      </p:sp>
+      <p:sp>
+        <p:nvSpPr>
+          <p:cNvPr id="7" name="Slide Number Placeholder"/>
+          <p:cNvSpPr>
+            <a:spLocks noGrp="1"/>
+          </p:cNvSpPr>
+          <p:nvPr>
+            <p:ph type="sldNum" sz="quarter" idx="5"/>
+          </p:nvPr>
+        </p:nvSpPr>
+        <p:spPr>
+          <a:prstGeom prst="rect">
+            <a:avLst/>
+          </a:prstGeom>
+        </p:spPr>
+        <p:txBody>
+          <a:bodyPr/>
+          <a:lstStyle/>
+          <a:p>
+            <a:endParaRPr/>
+          </a:p>
+        </p:txBody>
+      </p:sp>
+    </p:spTree>
+  </p:cSld>
+  <p:clrMap bg1="lt1" tx1="dk1" bg2="lt2" tx2="dk2" accent1="accent1" accent2="accent2" accent3="accent3" accent4="accent4" accent5="accent5" accent6="accent6" hlink="hlink" folHlink="folHlink"/>
+  <p:notesStyle>
+    <a:lvl1pPr marL="0" algn="l" defTabSz="914400" rtl="0" eaLnBrk="1" latinLnBrk="0" hangingPunct="1">
+      <a:defRPr sz="1200" kern="1200"/>
+    </a:lvl1pPr>
+  </p:notesStyle>
+</p:notesMaster>
+</file>
+
+<file path=ppt/notesSlides/notesSlide1.xml><?xml version="1.0" encoding="utf-8"?>
+<p:notes xmlns:a="http://schemas.openxmlformats.org/drawingml/2006/main" xmlns:r="http://schemas.openxmlformats.org/officeDocument/2006/relationships" xmlns:p="http://schemas.openxmlformats.org/presentationml/2006/main">
+  <p:cSld>
+    <p:spTree>
+      <p:nvGrpSpPr>
+        <p:cNvPr id="1" name=""/>
+        <p:cNvGrpSpPr/>
+        <p:nvPr/>
+      </p:nvGrpSpPr>
+      <p:grpSpPr>
+        <a:xfrm>
+          <a:off x="0" y="0"/>
+          <a:ext cx="0" cy="0"/>
+          <a:chOff x="0" y="0"/>
+          <a:chExt cx="0" cy="0"/>
+        </a:xfrm>
+      </p:grpSpPr>
+      <p:sp>
+        <p:nvSpPr>
+          <p:cNvPr id="2" name="Slide Image Placeholder 1"/>
+          <p:cNvSpPr>
+            <a:spLocks noGrp="1" noRot="1" noChangeAspect="1"/>
+          </p:cNvSpPr>
+          <p:nvPr>
+            <p:ph type="sldImg"/>
+          </p:nvPr>
+        </p:nvSpPr>
+        <p:spPr/>
+      </p:sp>
+      <p:sp>
+        <p:nvSpPr>
+          <p:cNvPr id="3" name="Notes Placeholder 2"/>
+          <p:cNvSpPr>
+            <a:spLocks noGrp="1"/>
+          </p:cNvSpPr>
+          <p:nvPr>
+            <p:ph type="body" idx="1"/>
+          </p:nvPr>
+        </p:nvSpPr>
+        <p:spPr/>
+        <p:txBody>
+          <a:bodyPr/>
+          <a:lstStyle/>
+          <a:p>
+            <a:r>
+              <a:t>Zeit: ca. 25 Sekunden</a:t>
+            </a:r>
+          </a:p>
+          <a:p>
+            <a:endParaRPr/>
+          </a:p>
+          <a:p>
+            <a:r>
+              <a:t>Ich zeige heute, wie ich den Release Candidate TaskFlow geprüft habe. Im Mittelpunkt stehen die wichtigsten Risiken, die gefundenen Defects, die Korrektur von DEF-02 und meine abschliessende Release-Entscheidung.</a:t>
+            </a:r>
+          </a:p>
+        </p:txBody>
+      </p:sp>
+      <p:sp>
+        <p:nvSpPr>
+          <p:cNvPr id="4" name="Slide Number Placeholder 3"/>
+          <p:cNvSpPr>
+            <a:spLocks noGrp="1"/>
+          </p:cNvSpPr>
+          <p:nvPr>
+            <p:ph type="sldNum" idx="5"/>
+          </p:nvPr>
+        </p:nvSpPr>
+        <p:spPr/>
+        <p:txBody>
+          <a:bodyPr/>
+          <a:lstStyle/>
+          <a:p>
+            <a:endParaRPr/>
+          </a:p>
+        </p:txBody>
+      </p:sp>
+    </p:spTree>
+  </p:cSld>
+  <p:clrMapOvr>
+    <a:masterClrMapping/>
+  </p:clrMapOvr>
+</p:notes>
+</file>
+
+<file path=ppt/notesSlides/notesSlide2.xml><?xml version="1.0" encoding="utf-8"?>
+<p:notes xmlns:a="http://schemas.openxmlformats.org/drawingml/2006/main" xmlns:r="http://schemas.openxmlformats.org/officeDocument/2006/relationships" xmlns:p="http://schemas.openxmlformats.org/presentationml/2006/main">
+  <p:cSld>
+    <p:spTree>
+      <p:nvGrpSpPr>
+        <p:cNvPr id="1" name=""/>
+        <p:cNvGrpSpPr/>
+        <p:nvPr/>
+      </p:nvGrpSpPr>
+      <p:grpSpPr>
+        <a:xfrm>
+          <a:off x="0" y="0"/>
+          <a:ext cx="0" cy="0"/>
+          <a:chOff x="0" y="0"/>
+          <a:chExt cx="0" cy="0"/>
+        </a:xfrm>
+      </p:grpSpPr>
+      <p:sp>
+        <p:nvSpPr>
+          <p:cNvPr id="2" name="Slide Image Placeholder 1"/>
+          <p:cNvSpPr>
+            <a:spLocks noGrp="1" noRot="1" noChangeAspect="1"/>
+          </p:cNvSpPr>
+          <p:nvPr>
+            <p:ph type="sldImg"/>
+          </p:nvPr>
+        </p:nvSpPr>
+        <p:spPr/>
+      </p:sp>
+      <p:sp>
+        <p:nvSpPr>
+          <p:cNvPr id="3" name="Notes Placeholder 2"/>
+          <p:cNvSpPr>
+            <a:spLocks noGrp="1"/>
+          </p:cNvSpPr>
+          <p:nvPr>
+            <p:ph type="body" idx="1"/>
+          </p:nvPr>
+        </p:nvSpPr>
+        <p:spPr/>
+        <p:txBody>
+          <a:bodyPr/>
+          <a:lstStyle/>
+          <a:p>
+            <a:r>
+              <a:t>Zeit: ca. 45 Sekunden</a:t>
+            </a:r>
+          </a:p>
+          <a:p>
+            <a:endParaRPr/>
+          </a:p>
+          <a:p>
+            <a:r>
+              <a:t>Das Testobjekt ist die REST-API TaskFlow. Ich habe Login, Taskzugriff, Taskbearbeitung und Validierung geprüft. Das wichtigste Ergebnis vorweg: Der Release erhält ein NO-GO. Zwei offene Sicherheitsdefects besitzen eine hohe Severity und blockieren die Produktivsetzung.</a:t>
+            </a:r>
+          </a:p>
+        </p:txBody>
+      </p:sp>
+      <p:sp>
+        <p:nvSpPr>
+          <p:cNvPr id="4" name="Slide Number Placeholder 3"/>
+          <p:cNvSpPr>
+            <a:spLocks noGrp="1"/>
+          </p:cNvSpPr>
+          <p:nvPr>
+            <p:ph type="sldNum" idx="5"/>
+          </p:nvPr>
+        </p:nvSpPr>
+        <p:spPr/>
+        <p:txBody>
+          <a:bodyPr/>
+          <a:lstStyle/>
+          <a:p>
+            <a:endParaRPr/>
+          </a:p>
+        </p:txBody>
+      </p:sp>
+    </p:spTree>
+  </p:cSld>
+  <p:clrMapOvr>
+    <a:masterClrMapping/>
+  </p:clrMapOvr>
+</p:notes>
+</file>
+
+<file path=ppt/notesSlides/notesSlide3.xml><?xml version="1.0" encoding="utf-8"?>
+<p:notes xmlns:a="http://schemas.openxmlformats.org/drawingml/2006/main" xmlns:r="http://schemas.openxmlformats.org/officeDocument/2006/relationships" xmlns:p="http://schemas.openxmlformats.org/presentationml/2006/main">
+  <p:cSld>
+    <p:spTree>
+      <p:nvGrpSpPr>
+        <p:cNvPr id="1" name=""/>
+        <p:cNvGrpSpPr/>
+        <p:nvPr/>
+      </p:nvGrpSpPr>
+      <p:grpSpPr>
+        <a:xfrm>
+          <a:off x="0" y="0"/>
+          <a:ext cx="0" cy="0"/>
+          <a:chOff x="0" y="0"/>
+          <a:chExt cx="0" cy="0"/>
+        </a:xfrm>
+      </p:grpSpPr>
+      <p:sp>
+        <p:nvSpPr>
+          <p:cNvPr id="2" name="Slide Image Placeholder 1"/>
+          <p:cNvSpPr>
+            <a:spLocks noGrp="1" noRot="1" noChangeAspect="1"/>
+          </p:cNvSpPr>
+          <p:nvPr>
+            <p:ph type="sldImg"/>
+          </p:nvPr>
+        </p:nvSpPr>
+        <p:spPr/>
+      </p:sp>
+      <p:sp>
+        <p:nvSpPr>
+          <p:cNvPr id="3" name="Notes Placeholder 2"/>
+          <p:cNvSpPr>
+            <a:spLocks noGrp="1"/>
+          </p:cNvSpPr>
+          <p:nvPr>
+            <p:ph type="body" idx="1"/>
+          </p:nvPr>
+        </p:nvSpPr>
+        <p:spPr/>
+        <p:txBody>
+          <a:bodyPr/>
+          <a:lstStyle/>
+          <a:p>
+            <a:r>
+              <a:t>Zeit: ca. 55 Sekunden</a:t>
+            </a:r>
+          </a:p>
+          <a:p>
+            <a:endParaRPr/>
+          </a:p>
+          <a:p>
+            <a:r>
+              <a:t>Ich habe risikobasiert gearbeitet. Wahrscheinlichkeit und Auswirkung wurden jeweils von eins bis drei bewertet. Vier Risiken erreichten den Höchstwert neun. Deshalb habe ich Security und Berechtigungen zuerst geprüft. Lasttests, produktive Infrastruktur und langfristige Persistenz lagen ausserhalb des Testumfangs.</a:t>
+            </a:r>
+          </a:p>
+        </p:txBody>
+      </p:sp>
+      <p:sp>
+        <p:nvSpPr>
+          <p:cNvPr id="4" name="Slide Number Placeholder 3"/>
+          <p:cNvSpPr>
+            <a:spLocks noGrp="1"/>
+          </p:cNvSpPr>
+          <p:nvPr>
+            <p:ph type="sldNum" idx="5"/>
+          </p:nvPr>
+        </p:nvSpPr>
+        <p:spPr/>
+        <p:txBody>
+          <a:bodyPr/>
+          <a:lstStyle/>
+          <a:p>
+            <a:endParaRPr/>
+          </a:p>
+        </p:txBody>
+      </p:sp>
+    </p:spTree>
+  </p:cSld>
+  <p:clrMapOvr>
+    <a:masterClrMapping/>
+  </p:clrMapOvr>
+</p:notes>
+</file>
+
+<file path=ppt/notesSlides/notesSlide4.xml><?xml version="1.0" encoding="utf-8"?>
+<p:notes xmlns:a="http://schemas.openxmlformats.org/drawingml/2006/main" xmlns:r="http://schemas.openxmlformats.org/officeDocument/2006/relationships" xmlns:p="http://schemas.openxmlformats.org/presentationml/2006/main">
+  <p:cSld>
+    <p:spTree>
+      <p:nvGrpSpPr>
+        <p:cNvPr id="1" name=""/>
+        <p:cNvGrpSpPr/>
+        <p:nvPr/>
+      </p:nvGrpSpPr>
+      <p:grpSpPr>
+        <a:xfrm>
+          <a:off x="0" y="0"/>
+          <a:ext cx="0" cy="0"/>
+          <a:chOff x="0" y="0"/>
+          <a:chExt cx="0" cy="0"/>
+        </a:xfrm>
+      </p:grpSpPr>
+      <p:sp>
+        <p:nvSpPr>
+          <p:cNvPr id="2" name="Slide Image Placeholder 1"/>
+          <p:cNvSpPr>
+            <a:spLocks noGrp="1" noRot="1" noChangeAspect="1"/>
+          </p:cNvSpPr>
+          <p:nvPr>
+            <p:ph type="sldImg"/>
+          </p:nvPr>
+        </p:nvSpPr>
+        <p:spPr/>
+      </p:sp>
+      <p:sp>
+        <p:nvSpPr>
+          <p:cNvPr id="3" name="Notes Placeholder 2"/>
+          <p:cNvSpPr>
+            <a:spLocks noGrp="1"/>
+          </p:cNvSpPr>
+          <p:nvPr>
+            <p:ph type="body" idx="1"/>
+          </p:nvPr>
+        </p:nvSpPr>
+        <p:spPr/>
+        <p:txBody>
+          <a:bodyPr/>
+          <a:lstStyle/>
+          <a:p>
+            <a:r>
+              <a:t>Zeit: ca. 55 Sekunden</a:t>
+            </a:r>
+          </a:p>
+          <a:p>
+            <a:endParaRPr/>
+          </a:p>
+          <a:p>
+            <a:r>
+              <a:t>Ich habe 16 wiederholbare Testfälle definiert. Sieben neue Tests erweitern die vorhandene Testsuite. Dazu kommen zehn dokumentierte Postman-Szenarien. Nach dem Fix bestanden sieben von elf automatisierten Tests. Vier Tests schlagen weiterhin fehl und belegen die offenen Defects.</a:t>
+            </a:r>
+          </a:p>
+        </p:txBody>
+      </p:sp>
+      <p:sp>
+        <p:nvSpPr>
+          <p:cNvPr id="4" name="Slide Number Placeholder 3"/>
+          <p:cNvSpPr>
+            <a:spLocks noGrp="1"/>
+          </p:cNvSpPr>
+          <p:nvPr>
+            <p:ph type="sldNum" idx="5"/>
+          </p:nvPr>
+        </p:nvSpPr>
+        <p:spPr/>
+        <p:txBody>
+          <a:bodyPr/>
+          <a:lstStyle/>
+          <a:p>
+            <a:endParaRPr/>
+          </a:p>
+        </p:txBody>
+      </p:sp>
+    </p:spTree>
+  </p:cSld>
+  <p:clrMapOvr>
+    <a:masterClrMapping/>
+  </p:clrMapOvr>
+</p:notes>
+</file>
+
+<file path=ppt/notesSlides/notesSlide5.xml><?xml version="1.0" encoding="utf-8"?>
+<p:notes xmlns:a="http://schemas.openxmlformats.org/drawingml/2006/main" xmlns:r="http://schemas.openxmlformats.org/officeDocument/2006/relationships" xmlns:p="http://schemas.openxmlformats.org/presentationml/2006/main">
+  <p:cSld>
+    <p:spTree>
+      <p:nvGrpSpPr>
+        <p:cNvPr id="1" name=""/>
+        <p:cNvGrpSpPr/>
+        <p:nvPr/>
+      </p:nvGrpSpPr>
+      <p:grpSpPr>
+        <a:xfrm>
+          <a:off x="0" y="0"/>
+          <a:ext cx="0" cy="0"/>
+          <a:chOff x="0" y="0"/>
+          <a:chExt cx="0" cy="0"/>
+        </a:xfrm>
+      </p:grpSpPr>
+      <p:sp>
+        <p:nvSpPr>
+          <p:cNvPr id="2" name="Slide Image Placeholder 1"/>
+          <p:cNvSpPr>
+            <a:spLocks noGrp="1" noRot="1" noChangeAspect="1"/>
+          </p:cNvSpPr>
+          <p:nvPr>
+            <p:ph type="sldImg"/>
+          </p:nvPr>
+        </p:nvSpPr>
+        <p:spPr/>
+      </p:sp>
+      <p:sp>
+        <p:nvSpPr>
+          <p:cNvPr id="3" name="Notes Placeholder 2"/>
+          <p:cNvSpPr>
+            <a:spLocks noGrp="1"/>
+          </p:cNvSpPr>
+          <p:nvPr>
+            <p:ph type="body" idx="1"/>
+          </p:nvPr>
+        </p:nvSpPr>
+        <p:spPr/>
+        <p:txBody>
+          <a:bodyPr/>
+          <a:lstStyle/>
+          <a:p>
+            <a:r>
+              <a:t>Zeit: ca. 70 Sekunden</a:t>
+            </a:r>
+          </a:p>
+          <a:p>
+            <a:endParaRPr/>
+          </a:p>
+          <a:p>
+            <a:r>
+              <a:t>Die wichtigsten offenen Defects sind DEF-01 und DEF-05. Links sieht man, dass Alice beide Tasks erhält, obwohl t2 Bob gehört. Rechts führt ungültiges JSON zu HTTP 500. Die Antwort enthält einen Stacktrace und lokale Dateipfade. Beide Defects besitzen hohe Severity und sind release-blockierend.</a:t>
+            </a:r>
+          </a:p>
+        </p:txBody>
+      </p:sp>
+      <p:sp>
+        <p:nvSpPr>
+          <p:cNvPr id="4" name="Slide Number Placeholder 3"/>
+          <p:cNvSpPr>
+            <a:spLocks noGrp="1"/>
+          </p:cNvSpPr>
+          <p:nvPr>
+            <p:ph type="sldNum" idx="5"/>
+          </p:nvPr>
+        </p:nvSpPr>
+        <p:spPr/>
+        <p:txBody>
+          <a:bodyPr/>
+          <a:lstStyle/>
+          <a:p>
+            <a:endParaRPr/>
+          </a:p>
+        </p:txBody>
+      </p:sp>
+    </p:spTree>
+  </p:cSld>
+  <p:clrMapOvr>
+    <a:masterClrMapping/>
+  </p:clrMapOvr>
+</p:notes>
+</file>
+
+<file path=ppt/notesSlides/notesSlide6.xml><?xml version="1.0" encoding="utf-8"?>
+<p:notes xmlns:a="http://schemas.openxmlformats.org/drawingml/2006/main" xmlns:r="http://schemas.openxmlformats.org/officeDocument/2006/relationships" xmlns:p="http://schemas.openxmlformats.org/presentationml/2006/main">
+  <p:cSld>
+    <p:spTree>
+      <p:nvGrpSpPr>
+        <p:cNvPr id="1" name=""/>
+        <p:cNvGrpSpPr/>
+        <p:nvPr/>
+      </p:nvGrpSpPr>
+      <p:grpSpPr>
+        <a:xfrm>
+          <a:off x="0" y="0"/>
+          <a:ext cx="0" cy="0"/>
+          <a:chOff x="0" y="0"/>
+          <a:chExt cx="0" cy="0"/>
+        </a:xfrm>
+      </p:grpSpPr>
+      <p:sp>
+        <p:nvSpPr>
+          <p:cNvPr id="2" name="Slide Image Placeholder 1"/>
+          <p:cNvSpPr>
+            <a:spLocks noGrp="1" noRot="1" noChangeAspect="1"/>
+          </p:cNvSpPr>
+          <p:nvPr>
+            <p:ph type="sldImg"/>
+          </p:nvPr>
+        </p:nvSpPr>
+        <p:spPr/>
+      </p:sp>
+      <p:sp>
+        <p:nvSpPr>
+          <p:cNvPr id="3" name="Notes Placeholder 2"/>
+          <p:cNvSpPr>
+            <a:spLocks noGrp="1"/>
+          </p:cNvSpPr>
+          <p:nvPr>
+            <p:ph type="body" idx="1"/>
+          </p:nvPr>
+        </p:nvSpPr>
+        <p:spPr/>
+        <p:txBody>
+          <a:bodyPr/>
+          <a:lstStyle/>
+          <a:p>
+            <a:r>
+              <a:t>Zeit: ca. 60 Sekunden</a:t>
+            </a:r>
+          </a:p>
+          <a:p>
+            <a:endParaRPr/>
+          </a:p>
+          <a:p>
+            <a:r>
+              <a:t>Ich habe DEF-02 korrigiert. Vorher reichte es, dass irgendein Benutzer angemeldet war. Danach prüft die Funktion, ob der Benutzer Administrator oder Eigentümer des Tasks ist. Der Retest bestätigt HTTP 403 für Bob. Der Regressionstest bestätigt, dass Alice ihren eigenen Task weiterhin bearbeiten kann.</a:t>
+            </a:r>
+          </a:p>
+        </p:txBody>
+      </p:sp>
+      <p:sp>
+        <p:nvSpPr>
+          <p:cNvPr id="4" name="Slide Number Placeholder 3"/>
+          <p:cNvSpPr>
+            <a:spLocks noGrp="1"/>
+          </p:cNvSpPr>
+          <p:nvPr>
+            <p:ph type="sldNum" idx="5"/>
+          </p:nvPr>
+        </p:nvSpPr>
+        <p:spPr/>
+        <p:txBody>
+          <a:bodyPr/>
+          <a:lstStyle/>
+          <a:p>
+            <a:endParaRPr/>
+          </a:p>
+        </p:txBody>
+      </p:sp>
+    </p:spTree>
+  </p:cSld>
+  <p:clrMapOvr>
+    <a:masterClrMapping/>
+  </p:clrMapOvr>
+</p:notes>
+</file>
+
+<file path=ppt/notesSlides/notesSlide7.xml><?xml version="1.0" encoding="utf-8"?>
+<p:notes xmlns:a="http://schemas.openxmlformats.org/drawingml/2006/main" xmlns:r="http://schemas.openxmlformats.org/officeDocument/2006/relationships" xmlns:p="http://schemas.openxmlformats.org/presentationml/2006/main">
+  <p:cSld>
+    <p:spTree>
+      <p:nvGrpSpPr>
+        <p:cNvPr id="1" name=""/>
+        <p:cNvGrpSpPr/>
+        <p:nvPr/>
+      </p:nvGrpSpPr>
+      <p:grpSpPr>
+        <a:xfrm>
+          <a:off x="0" y="0"/>
+          <a:ext cx="0" cy="0"/>
+          <a:chOff x="0" y="0"/>
+          <a:chExt cx="0" cy="0"/>
+        </a:xfrm>
+      </p:grpSpPr>
+      <p:sp>
+        <p:nvSpPr>
+          <p:cNvPr id="2" name="Slide Image Placeholder 1"/>
+          <p:cNvSpPr>
+            <a:spLocks noGrp="1" noRot="1" noChangeAspect="1"/>
+          </p:cNvSpPr>
+          <p:nvPr>
+            <p:ph type="sldImg"/>
+          </p:nvPr>
+        </p:nvSpPr>
+        <p:spPr/>
+      </p:sp>
+      <p:sp>
+        <p:nvSpPr>
+          <p:cNvPr id="3" name="Notes Placeholder 2"/>
+          <p:cNvSpPr>
+            <a:spLocks noGrp="1"/>
+          </p:cNvSpPr>
+          <p:nvPr>
+            <p:ph type="body" idx="1"/>
+          </p:nvPr>
+        </p:nvSpPr>
+        <p:spPr/>
+        <p:txBody>
+          <a:bodyPr/>
+          <a:lstStyle/>
+          <a:p>
+            <a:r>
+              <a:t>Zeit: ca. 55 Sekunden</a:t>
+            </a:r>
+          </a:p>
+          <a:p>
+            <a:endParaRPr/>
+          </a:p>
+          <a:p>
+            <a:r>
+              <a:t>In der Live-Demo starte ich zuerst npm test. Dabei zeige ich, dass der Test für DEF-02 und der Regressionstest bestehen. Danach sende ich als Bob einen PATCH-Request auf Alices Task. Die API antwortet mit HTTP 403 und verändert den Task nicht.</a:t>
+            </a:r>
+          </a:p>
+        </p:txBody>
+      </p:sp>
+      <p:sp>
+        <p:nvSpPr>
+          <p:cNvPr id="4" name="Slide Number Placeholder 3"/>
+          <p:cNvSpPr>
+            <a:spLocks noGrp="1"/>
+          </p:cNvSpPr>
+          <p:nvPr>
+            <p:ph type="sldNum" idx="5"/>
+          </p:nvPr>
+        </p:nvSpPr>
+        <p:spPr/>
+        <p:txBody>
+          <a:bodyPr/>
+          <a:lstStyle/>
+          <a:p>
+            <a:endParaRPr/>
+          </a:p>
+        </p:txBody>
+      </p:sp>
+    </p:spTree>
+  </p:cSld>
+  <p:clrMapOvr>
+    <a:masterClrMapping/>
+  </p:clrMapOvr>
+</p:notes>
+</file>
+
+<file path=ppt/notesSlides/notesSlide8.xml><?xml version="1.0" encoding="utf-8"?>
+<p:notes xmlns:a="http://schemas.openxmlformats.org/drawingml/2006/main" xmlns:r="http://schemas.openxmlformats.org/officeDocument/2006/relationships" xmlns:p="http://schemas.openxmlformats.org/presentationml/2006/main">
+  <p:cSld>
+    <p:spTree>
+      <p:nvGrpSpPr>
+        <p:cNvPr id="1" name=""/>
+        <p:cNvGrpSpPr/>
+        <p:nvPr/>
+      </p:nvGrpSpPr>
+      <p:grpSpPr>
+        <a:xfrm>
+          <a:off x="0" y="0"/>
+          <a:ext cx="0" cy="0"/>
+          <a:chOff x="0" y="0"/>
+          <a:chExt cx="0" cy="0"/>
+        </a:xfrm>
+      </p:grpSpPr>
+      <p:sp>
+        <p:nvSpPr>
+          <p:cNvPr id="2" name="Slide Image Placeholder 1"/>
+          <p:cNvSpPr>
+            <a:spLocks noGrp="1" noRot="1" noChangeAspect="1"/>
+          </p:cNvSpPr>
+          <p:nvPr>
+            <p:ph type="sldImg"/>
+          </p:nvPr>
+        </p:nvSpPr>
+        <p:spPr/>
+      </p:sp>
+      <p:sp>
+        <p:nvSpPr>
+          <p:cNvPr id="3" name="Notes Placeholder 2"/>
+          <p:cNvSpPr>
+            <a:spLocks noGrp="1"/>
+          </p:cNvSpPr>
+          <p:nvPr>
+            <p:ph type="body" idx="1"/>
+          </p:nvPr>
+        </p:nvSpPr>
+        <p:spPr/>
+        <p:txBody>
+          <a:bodyPr/>
+          <a:lstStyle/>
+          <a:p>
+            <a:r>
+              <a:t>Zeit: ca. 45 Sekunden</a:t>
+            </a:r>
+          </a:p>
+          <a:p>
+            <a:endParaRPr/>
+          </a:p>
+          <a:p>
+            <a:r>
+              <a:t>Meine Entscheidung lautet NO-GO. DEF-01 verletzt die Vertraulichkeit und DEF-05 legt interne Informationen offen. Vor einem neuen Release-Entscheid müssen die offenen Defects korrigiert, gezielt retestet und mit einer vollständigen Regression abgesichert werden.</a:t>
+            </a:r>
+          </a:p>
+        </p:txBody>
+      </p:sp>
+      <p:sp>
+        <p:nvSpPr>
+          <p:cNvPr id="4" name="Slide Number Placeholder 3"/>
+          <p:cNvSpPr>
+            <a:spLocks noGrp="1"/>
+          </p:cNvSpPr>
+          <p:nvPr>
+            <p:ph type="sldNum" idx="5"/>
+          </p:nvPr>
+        </p:nvSpPr>
+        <p:spPr/>
+        <p:txBody>
+          <a:bodyPr/>
+          <a:lstStyle/>
+          <a:p>
+            <a:endParaRPr/>
+          </a:p>
+        </p:txBody>
+      </p:sp>
+    </p:spTree>
+  </p:cSld>
+  <p:clrMapOvr>
+    <a:masterClrMapping/>
+  </p:clrMapOvr>
+</p:notes>
+</file>
+
+<file path=ppt/slideLayouts/slideLayout1.xml><?xml version="1.0" encoding="utf-8"?>
+<p:sldLayout xmlns:a="http://schemas.openxmlformats.org/drawingml/2006/main" xmlns:r="http://schemas.openxmlformats.org/officeDocument/2006/relationships" xmlns:p="http://schemas.openxmlformats.org/presentationml/2006/main" type="title">
+  <p:cSld name="Title Slide">
+    <p:spTree>
+      <p:nvGrpSpPr>
+        <p:cNvPr id="1" name=""/>
+        <p:cNvGrpSpPr/>
+        <p:nvPr/>
+      </p:nvGrpSpPr>
+      <p:grpSpPr>
+        <a:xfrm>
+          <a:off x="0" y="0"/>
+          <a:ext cx="0" cy="0"/>
+          <a:chOff x="0" y="0"/>
+          <a:chExt cx="0" cy="0"/>
+        </a:xfrm>
+      </p:grpSpPr>
+    </p:spTree>
+  </p:cSld>
+  <p:clrMapOvr>
+    <a:masterClrMapping/>
+  </p:clrMapOvr>
+</p:sldLayout>
+</file>
+
+<file path=ppt/slideMasters/slideMaster1.xml><?xml version="1.0" encoding="utf-8"?>
+<p:sldMaster xmlns:a="http://schemas.openxmlformats.org/drawingml/2006/main" xmlns:r="http://schemas.openxmlformats.org/officeDocument/2006/relationships" xmlns:p="http://schemas.openxmlformats.org/presentationml/2006/main">
+  <p:cSld name="Master">
+    <p:bg>
+      <p:bgRef idx="1001">
+        <a:schemeClr val="bg1"/>
+      </p:bgRef>
+    </p:bg>
+    <p:spTree>
+      <p:nvGrpSpPr>
+        <p:cNvPr id="1" name=""/>
+        <p:cNvGrpSpPr/>
+        <p:nvPr/>
+      </p:nvGrpSpPr>
+      <p:grpSpPr>
+        <a:xfrm>
+          <a:off x="0" y="0"/>
+          <a:ext cx="0" cy="0"/>
+          <a:chOff x="0" y="0"/>
+          <a:chExt cx="0" cy="0"/>
+        </a:xfrm>
+      </p:grpSpPr>
+    </p:spTree>
+  </p:cSld>
+  <p:clrMap bg1="lt1" tx1="dk1" bg2="lt2" tx2="dk2" accent1="accent1" accent2="accent2" accent3="accent3" accent4="accent4" accent5="accent5" accent6="accent6" hlink="hlink" folHlink="folHlink"/>
+  <p:sldLayoutIdLst>
+    <p:sldLayoutId id="2147483649" r:id="rId1"/>
+  </p:sldLayoutIdLst>
+  <p:txStyles>
+    <p:titleStyle>
+      <a:lvl1pPr algn="l">
+        <a:lnSpc>
+          <a:spcPct val="90000"/>
+        </a:lnSpc>
+        <a:spcBef>
+          <a:spcPts val="0"/>
+        </a:spcBef>
+        <a:buNone/>
+        <a:defRPr sz="4400">
+          <a:solidFill>
+            <a:schemeClr val="tx1"/>
+          </a:solidFill>
+          <a:latin typeface="+mj-lt"/>
+          <a:ea typeface="+mj-lt"/>
+          <a:cs typeface="+mj-lt"/>
+        </a:defRPr>
+      </a:lvl1pPr>
+    </p:titleStyle>
+    <p:bodyStyle>
+      <a:lvl1pPr marL="228600" indent="-228600" algn="l">
+        <a:lnSpc>
+          <a:spcPct val="90000"/>
+        </a:lnSpc>
+        <a:spcBef>
+          <a:spcPts val="1000"/>
+        </a:spcBef>
+        <a:buChar char="•"/>
+        <a:defRPr sz="2800">
+          <a:solidFill>
+            <a:schemeClr val="tx1"/>
+          </a:solidFill>
+          <a:latin typeface="+mn-lt"/>
+          <a:ea typeface="+mn-lt"/>
+          <a:cs typeface="+mn-lt"/>
+        </a:defRPr>
+      </a:lvl1pPr>
+      <a:lvl2pPr marL="685800" indent="-228600" algn="l">
+        <a:lnSpc>
+          <a:spcPct val="90000"/>
+        </a:lnSpc>
+        <a:spcBef>
+          <a:spcPts val="500"/>
+        </a:spcBef>
+        <a:buChar char="•"/>
+        <a:defRPr sz="2400">
+          <a:solidFill>
+            <a:schemeClr val="tx1"/>
+          </a:solidFill>
+          <a:latin typeface="+mn-lt"/>
+          <a:ea typeface="+mn-lt"/>
+          <a:cs typeface="+mn-lt"/>
+        </a:defRPr>
+      </a:lvl2pPr>
+      <a:lvl3pPr marL="1143000" indent="-228600" algn="l">
+        <a:lnSpc>
+          <a:spcPct val="90000"/>
+        </a:lnSpc>
+        <a:spcBef>
+          <a:spcPts val="500"/>
+        </a:spcBef>
+        <a:buChar char="•"/>
+        <a:defRPr sz="2000">
+          <a:solidFill>
+            <a:schemeClr val="tx1"/>
+          </a:solidFill>
+          <a:latin typeface="+mn-lt"/>
+          <a:ea typeface="+mn-lt"/>
+          <a:cs typeface="+mn-lt"/>
+        </a:defRPr>
+      </a:lvl3pPr>
+      <a:lvl4pPr marL="1600200" indent="-228600" algn="l">
+        <a:lnSpc>
+          <a:spcPct val="90000"/>
+        </a:lnSpc>
+        <a:spcBef>
+          <a:spcPts val="500"/>
+        </a:spcBef>
+        <a:buChar char="•"/>
+        <a:defRPr sz="1800">
+          <a:solidFill>
+            <a:schemeClr val="tx1"/>
+          </a:solidFill>
+          <a:latin typeface="+mn-lt"/>
+          <a:ea typeface="+mn-lt"/>
+          <a:cs typeface="+mn-lt"/>
+        </a:defRPr>
+      </a:lvl4pPr>
+      <a:lvl5pPr marL="2057400" indent="-228600" algn="l">
+        <a:lnSpc>
+          <a:spcPct val="90000"/>
+        </a:lnSpc>
+        <a:spcBef>
+          <a:spcPts val="500"/>
+        </a:spcBef>
+        <a:buChar char="•"/>
+        <a:defRPr sz="1800">
+          <a:solidFill>
+            <a:schemeClr val="tx1"/>
+          </a:solidFill>
+          <a:latin typeface="+mn-lt"/>
+          <a:ea typeface="+mn-lt"/>
+          <a:cs typeface="+mn-lt"/>
+        </a:defRPr>
+      </a:lvl5pPr>
+      <a:lvl6pPr marL="2514600" indent="-228600" algn="l">
+        <a:lnSpc>
+          <a:spcPct val="90000"/>
+        </a:lnSpc>
+        <a:spcBef>
+          <a:spcPts val="500"/>
+        </a:spcBef>
+        <a:buChar char="•"/>
+        <a:defRPr sz="1800">
+          <a:solidFill>
+            <a:schemeClr val="tx1"/>
+          </a:solidFill>
+          <a:latin typeface="+mn-lt"/>
+          <a:ea typeface="+mn-lt"/>
+          <a:cs typeface="+mn-lt"/>
+        </a:defRPr>
+      </a:lvl6pPr>
+      <a:lvl7pPr marL="2971800" indent="-228600" algn="l">
+        <a:lnSpc>
+          <a:spcPct val="90000"/>
+        </a:lnSpc>
+        <a:spcBef>
+          <a:spcPts val="500"/>
+        </a:spcBef>
+        <a:buChar char="•"/>
+        <a:defRPr sz="1800">
+          <a:solidFill>
+            <a:schemeClr val="tx1"/>
+          </a:solidFill>
+          <a:latin typeface="+mn-lt"/>
+          <a:ea typeface="+mn-lt"/>
+          <a:cs typeface="+mn-lt"/>
+        </a:defRPr>
+      </a:lvl7pPr>
+      <a:lvl8pPr marL="3429000" indent="-228600" algn="l">
+        <a:lnSpc>
+          <a:spcPct val="90000"/>
+        </a:lnSpc>
+        <a:spcBef>
+          <a:spcPts val="500"/>
+        </a:spcBef>
+        <a:buChar char="•"/>
+        <a:defRPr sz="1800">
+          <a:solidFill>
+            <a:schemeClr val="tx1"/>
+          </a:solidFill>
+          <a:latin typeface="+mn-lt"/>
+          <a:ea typeface="+mn-lt"/>
+          <a:cs typeface="+mn-lt"/>
+        </a:defRPr>
+      </a:lvl8pPr>
+      <a:lvl9pPr marL="3886200" indent="-228600" algn="l">
+        <a:lnSpc>
+          <a:spcPct val="90000"/>
+        </a:lnSpc>
+        <a:spcBef>
+          <a:spcPts val="500"/>
+        </a:spcBef>
+        <a:buChar char="•"/>
+        <a:defRPr sz="1800">
+          <a:solidFill>
+            <a:schemeClr val="tx1"/>
+          </a:solidFill>
+          <a:latin typeface="+mn-lt"/>
+          <a:ea typeface="+mn-lt"/>
+          <a:cs typeface="+mn-lt"/>
+        </a:defRPr>
+      </a:lvl9pPr>
+    </p:bodyStyle>
+    <p:otherStyle>
+      <a:lvl1pPr marL="0" algn="l">
+        <a:buNone/>
+        <a:defRPr sz="1800">
+          <a:solidFill>
+            <a:schemeClr val="tx1"/>
+          </a:solidFill>
+          <a:latin typeface="+mn-lt"/>
+          <a:ea typeface="+mn-lt"/>
+          <a:cs typeface="+mn-lt"/>
+        </a:defRPr>
+      </a:lvl1pPr>
+      <a:lvl2pPr marL="457200" algn="l">
+        <a:buNone/>
+        <a:defRPr sz="1800">
+          <a:solidFill>
+            <a:schemeClr val="tx1"/>
+          </a:solidFill>
+          <a:latin typeface="+mn-lt"/>
+          <a:ea typeface="+mn-lt"/>
+          <a:cs typeface="+mn-lt"/>
+        </a:defRPr>
+      </a:lvl2pPr>
+      <a:lvl3pPr marL="914400" algn="l">
+        <a:buNone/>
+        <a:defRPr sz="1800">
+          <a:solidFill>
+            <a:schemeClr val="tx1"/>
+          </a:solidFill>
+          <a:latin typeface="+mn-lt"/>
+          <a:ea typeface="+mn-lt"/>
+          <a:cs typeface="+mn-lt"/>
+        </a:defRPr>
+      </a:lvl3pPr>
+      <a:lvl4pPr marL="1371600" algn="l">
+        <a:buNone/>
+        <a:defRPr sz="1800">
+          <a:solidFill>
+            <a:schemeClr val="tx1"/>
+          </a:solidFill>
+          <a:latin typeface="+mn-lt"/>
+          <a:ea typeface="+mn-lt"/>
+          <a:cs typeface="+mn-lt"/>
+        </a:defRPr>
+      </a:lvl4pPr>
+      <a:lvl5pPr marL="1828800" algn="l">
+        <a:buNone/>
+        <a:defRPr sz="1800">
+          <a:solidFill>
+            <a:schemeClr val="tx1"/>
+          </a:solidFill>
+          <a:latin typeface="+mn-lt"/>
+          <a:ea typeface="+mn-lt"/>
+          <a:cs typeface="+mn-lt"/>
+        </a:defRPr>
+      </a:lvl5pPr>
+      <a:lvl6pPr marL="2286000" algn="l">
+        <a:buNone/>
+        <a:defRPr sz="1800">
+          <a:solidFill>
+            <a:schemeClr val="tx1"/>
+          </a:solidFill>
+          <a:latin typeface="+mn-lt"/>
+          <a:ea typeface="+mn-lt"/>
+          <a:cs typeface="+mn-lt"/>
+        </a:defRPr>
+      </a:lvl6pPr>
+      <a:lvl7pPr marL="2743200" algn="l">
+        <a:buNone/>
+        <a:defRPr sz="1800">
+          <a:solidFill>
+            <a:schemeClr val="tx1"/>
+          </a:solidFill>
+          <a:latin typeface="+mn-lt"/>
+          <a:ea typeface="+mn-lt"/>
+          <a:cs typeface="+mn-lt"/>
+        </a:defRPr>
+      </a:lvl7pPr>
+      <a:lvl8pPr marL="3200400" algn="l">
+        <a:buNone/>
+        <a:defRPr sz="1800">
+          <a:solidFill>
+            <a:schemeClr val="tx1"/>
+          </a:solidFill>
+          <a:latin typeface="+mn-lt"/>
+          <a:ea typeface="+mn-lt"/>
+          <a:cs typeface="+mn-lt"/>
+        </a:defRPr>
+      </a:lvl8pPr>
+      <a:lvl9pPr marL="3657600" algn="l">
+        <a:buNone/>
+        <a:defRPr sz="1800">
+          <a:solidFill>
+            <a:schemeClr val="tx1"/>
+          </a:solidFill>
+          <a:latin typeface="+mn-lt"/>
+          <a:ea typeface="+mn-lt"/>
+          <a:cs typeface="+mn-lt"/>
+        </a:defRPr>
+      </a:lvl9pPr>
+    </p:otherStyle>
+  </p:txStyles>
+</p:sldMaster>
+</file>
+
 <file path=ppt/slides/slide1.xml><?xml version="1.0" encoding="utf-8"?>
-<p:sld xmlns:p="http://schemas.openxmlformats.org/presentationml/2006/main">
+<p:sld xmlns:a="http://schemas.openxmlformats.org/drawingml/2006/main" xmlns:r="http://schemas.openxmlformats.org/officeDocument/2006/relationships" xmlns:p="http://schemas.openxmlformats.org/presentationml/2006/main">
   <p:cSld>
     <p:bg>
       <p:bgPr>
-        <a:solidFill xmlns:a="http://schemas.openxmlformats.org/drawingml/2006/main">
+        <a:solidFill>
           <a:srgbClr val="102A43"/>
         </a:solidFill>
+        <a:effectLst/>
       </p:bgPr>
     </p:bg>
     <p:spTree>
@@ -1753,41 +1488,46 @@
         <p:nvPr/>
       </p:nvGrpSpPr>
       <p:grpSpPr>
-        <a:xfrm xmlns:a="http://schemas.openxmlformats.org/drawingml/2006/main"/>
+        <a:xfrm>
+          <a:off x="0" y="0"/>
+          <a:ext cx="0" cy="0"/>
+          <a:chOff x="0" y="0"/>
+          <a:chExt cx="0" cy="0"/>
+        </a:xfrm>
       </p:grpSpPr>
       <p:sp>
         <p:nvSpPr>
-          <p:cNvPr id="6" name="">
-            <a:extLst xmlns:a="http://schemas.openxmlformats.org/drawingml/2006/main">
+          <p:cNvPr id="6" name="Rechteck 5">
+            <a:extLst>
               <a:ext uri="{FF2B5EF4-FFF2-40B4-BE49-F238E27FC236}">
                 <a16:creationId xmlns:a16="http://schemas.microsoft.com/office/drawing/2014/main" id="{2139AAAA-82FF-45FA-8EAA-34DDF2058A05}"/>
               </a:ext>
             </a:extLst>
           </p:cNvPr>
           <p:cNvSpPr>
-            <a:spLocks xmlns:a="http://schemas.openxmlformats.org/drawingml/2006/main" noGrp="1"/>
+            <a:spLocks noGrp="1"/>
           </p:cNvSpPr>
           <p:nvPr/>
         </p:nvSpPr>
         <p:spPr>
-          <a:xfrm xmlns:a="http://schemas.openxmlformats.org/drawingml/2006/main">
+          <a:xfrm>
             <a:off x="800100" y="1571625"/>
             <a:ext cx="10096500" cy="819150"/>
           </a:xfrm>
-          <a:prstGeom xmlns:a="http://schemas.openxmlformats.org/drawingml/2006/main" prst="rect">
+          <a:prstGeom prst="rect">
             <a:avLst/>
           </a:prstGeom>
-          <a:noFill xmlns:a="http://schemas.openxmlformats.org/drawingml/2006/main"/>
-          <a:ln xmlns:a="http://schemas.openxmlformats.org/drawingml/2006/main" w="0">
+          <a:noFill/>
+          <a:ln w="0">
             <a:noFill/>
           </a:ln>
         </p:spPr>
         <p:txBody>
-          <a:bodyPr xmlns:a="http://schemas.openxmlformats.org/drawingml/2006/main" anchor="ctr">
+          <a:bodyPr anchor="ctr">
             <a:noAutofit/>
           </a:bodyPr>
-          <a:lstStyle xmlns:a="http://schemas.openxmlformats.org/drawingml/2006/main"/>
-          <a:p xmlns:a="http://schemas.openxmlformats.org/drawingml/2006/main">
+          <a:lstStyle/>
+          <a:p>
             <a:pPr algn="l">
               <a:defRPr sz="3900" b="1">
                 <a:solidFill>
@@ -1814,37 +1554,37 @@
       </p:sp>
       <p:sp>
         <p:nvSpPr>
-          <p:cNvPr id="2" name="">
-            <a:extLst xmlns:a="http://schemas.openxmlformats.org/drawingml/2006/main">
+          <p:cNvPr id="2" name="Rechteck 1">
+            <a:extLst>
               <a:ext uri="{FF2B5EF4-FFF2-40B4-BE49-F238E27FC236}">
                 <a16:creationId xmlns:a16="http://schemas.microsoft.com/office/drawing/2014/main" id="{ECFDCEC2-A6A0-4FA1-AE7B-E5CBF37E9682}"/>
               </a:ext>
             </a:extLst>
           </p:cNvPr>
           <p:cNvSpPr>
-            <a:spLocks xmlns:a="http://schemas.openxmlformats.org/drawingml/2006/main" noGrp="1"/>
+            <a:spLocks noGrp="1"/>
           </p:cNvSpPr>
           <p:nvPr/>
         </p:nvSpPr>
         <p:spPr>
-          <a:xfrm xmlns:a="http://schemas.openxmlformats.org/drawingml/2006/main">
+          <a:xfrm>
             <a:off x="838200" y="2457450"/>
             <a:ext cx="9525000" cy="514350"/>
           </a:xfrm>
-          <a:prstGeom xmlns:a="http://schemas.openxmlformats.org/drawingml/2006/main" prst="rect">
+          <a:prstGeom prst="rect">
             <a:avLst/>
           </a:prstGeom>
-          <a:noFill xmlns:a="http://schemas.openxmlformats.org/drawingml/2006/main"/>
-          <a:ln xmlns:a="http://schemas.openxmlformats.org/drawingml/2006/main" w="0">
+          <a:noFill/>
+          <a:ln w="0">
             <a:noFill/>
           </a:ln>
         </p:spPr>
         <p:txBody>
-          <a:bodyPr xmlns:a="http://schemas.openxmlformats.org/drawingml/2006/main" anchor="ctr">
+          <a:bodyPr anchor="ctr">
             <a:noAutofit/>
           </a:bodyPr>
-          <a:lstStyle xmlns:a="http://schemas.openxmlformats.org/drawingml/2006/main"/>
-          <a:p xmlns:a="http://schemas.openxmlformats.org/drawingml/2006/main">
+          <a:lstStyle/>
+          <a:p>
             <a:pPr algn="l">
               <a:defRPr sz="2025" b="0">
                 <a:solidFill>
@@ -1871,67 +1611,74 @@
       </p:sp>
       <p:sp>
         <p:nvSpPr>
-          <p:cNvPr id="3" name="">
-            <a:extLst xmlns:a="http://schemas.openxmlformats.org/drawingml/2006/main">
+          <p:cNvPr id="3" name="Rechteck 2">
+            <a:extLst>
               <a:ext uri="{FF2B5EF4-FFF2-40B4-BE49-F238E27FC236}">
                 <a16:creationId xmlns:a16="http://schemas.microsoft.com/office/drawing/2014/main" id="{D9C91BA8-36ED-453B-8623-59FD5FE23843}"/>
               </a:ext>
             </a:extLst>
           </p:cNvPr>
           <p:cNvSpPr>
-            <a:spLocks xmlns:a="http://schemas.openxmlformats.org/drawingml/2006/main" noGrp="1"/>
+            <a:spLocks noGrp="1"/>
           </p:cNvSpPr>
           <p:nvPr/>
         </p:nvSpPr>
         <p:spPr>
-          <a:xfrm xmlns:a="http://schemas.openxmlformats.org/drawingml/2006/main">
+          <a:xfrm>
             <a:off x="838200" y="3181350"/>
             <a:ext cx="2857500" cy="47625"/>
           </a:xfrm>
-          <a:prstGeom xmlns:a="http://schemas.openxmlformats.org/drawingml/2006/main" prst="rect">
+          <a:prstGeom prst="rect">
             <a:avLst/>
           </a:prstGeom>
-          <a:solidFill xmlns:a="http://schemas.openxmlformats.org/drawingml/2006/main">
+          <a:solidFill>
             <a:srgbClr val="2CB1BC"/>
           </a:solidFill>
-          <a:ln xmlns:a="http://schemas.openxmlformats.org/drawingml/2006/main" w="0">
+          <a:ln w="0">
             <a:noFill/>
           </a:ln>
         </p:spPr>
-      </p:sp>
-      <p:sp>
-        <p:nvSpPr>
-          <p:cNvPr id="4" name="">
-            <a:extLst xmlns:a="http://schemas.openxmlformats.org/drawingml/2006/main">
+        <p:txBody>
+          <a:bodyPr/>
+          <a:lstStyle/>
+          <a:p>
+            <a:endParaRPr lang="de-CH"/>
+          </a:p>
+        </p:txBody>
+      </p:sp>
+      <p:sp>
+        <p:nvSpPr>
+          <p:cNvPr id="4" name="Rechteck 3">
+            <a:extLst>
               <a:ext uri="{FF2B5EF4-FFF2-40B4-BE49-F238E27FC236}">
                 <a16:creationId xmlns:a16="http://schemas.microsoft.com/office/drawing/2014/main" id="{3E3CECFB-384A-48E2-AB8F-18448181FF6C}"/>
               </a:ext>
             </a:extLst>
           </p:cNvPr>
           <p:cNvSpPr>
-            <a:spLocks xmlns:a="http://schemas.openxmlformats.org/drawingml/2006/main" noGrp="1"/>
+            <a:spLocks noGrp="1"/>
           </p:cNvSpPr>
           <p:nvPr/>
         </p:nvSpPr>
         <p:spPr>
-          <a:xfrm xmlns:a="http://schemas.openxmlformats.org/drawingml/2006/main">
+          <a:xfrm>
             <a:off x="838200" y="3638550"/>
             <a:ext cx="5524500" cy="1238250"/>
           </a:xfrm>
-          <a:prstGeom xmlns:a="http://schemas.openxmlformats.org/drawingml/2006/main" prst="rect">
+          <a:prstGeom prst="rect">
             <a:avLst/>
           </a:prstGeom>
-          <a:noFill xmlns:a="http://schemas.openxmlformats.org/drawingml/2006/main"/>
-          <a:ln xmlns:a="http://schemas.openxmlformats.org/drawingml/2006/main" w="0">
+          <a:noFill/>
+          <a:ln w="0">
             <a:noFill/>
           </a:ln>
         </p:spPr>
         <p:txBody>
-          <a:bodyPr xmlns:a="http://schemas.openxmlformats.org/drawingml/2006/main" anchor="ctr">
+          <a:bodyPr anchor="ctr">
             <a:noAutofit/>
           </a:bodyPr>
-          <a:lstStyle xmlns:a="http://schemas.openxmlformats.org/drawingml/2006/main"/>
-          <a:p xmlns:a="http://schemas.openxmlformats.org/drawingml/2006/main">
+          <a:lstStyle/>
+          <a:p>
             <a:pPr algn="l">
               <a:defRPr sz="1650" b="0">
                 <a:solidFill>
@@ -1954,7 +1701,7 @@
               <a:t>Modul 450 LB-02</a:t>
             </a:r>
           </a:p>
-          <a:p xmlns:a="http://schemas.openxmlformats.org/drawingml/2006/main">
+          <a:p>
             <a:pPr algn="l">
               <a:defRPr sz="1650" b="0">
                 <a:solidFill>
@@ -1977,7 +1724,7 @@
               <a:t>Sladjan Vasic</a:t>
             </a:r>
           </a:p>
-          <a:p xmlns:a="http://schemas.openxmlformats.org/drawingml/2006/main">
+          <a:p>
             <a:pPr algn="l">
               <a:defRPr sz="1650" b="0">
                 <a:solidFill>
@@ -1998,63 +1745,6 @@
                 <a:cs typeface="Bitstream Charter"/>
               </a:rPr>
               <a:t>TaskFlow 1.4.0-rc1</a:t>
-            </a:r>
-          </a:p>
-        </p:txBody>
-      </p:sp>
-      <p:sp>
-        <p:nvSpPr>
-          <p:cNvPr id="5" name="">
-            <a:extLst xmlns:a="http://schemas.openxmlformats.org/drawingml/2006/main">
-              <a:ext uri="{FF2B5EF4-FFF2-40B4-BE49-F238E27FC236}">
-                <a16:creationId xmlns:a16="http://schemas.microsoft.com/office/drawing/2014/main" id="{7A2EDD17-9887-4E26-9F7C-B9D6EDA8BC20}"/>
-              </a:ext>
-            </a:extLst>
-          </p:cNvPr>
-          <p:cNvSpPr>
-            <a:spLocks xmlns:a="http://schemas.openxmlformats.org/drawingml/2006/main" noGrp="1"/>
-          </p:cNvSpPr>
-          <p:nvPr/>
-        </p:nvSpPr>
-        <p:spPr>
-          <a:xfrm xmlns:a="http://schemas.openxmlformats.org/drawingml/2006/main">
-            <a:off x="9048750" y="5619750"/>
-            <a:ext cx="2190750" cy="428625"/>
-          </a:xfrm>
-          <a:prstGeom xmlns:a="http://schemas.openxmlformats.org/drawingml/2006/main" prst="rect">
-            <a:avLst/>
-          </a:prstGeom>
-          <a:noFill xmlns:a="http://schemas.openxmlformats.org/drawingml/2006/main"/>
-          <a:ln xmlns:a="http://schemas.openxmlformats.org/drawingml/2006/main" w="0">
-            <a:noFill/>
-          </a:ln>
-        </p:spPr>
-        <p:txBody>
-          <a:bodyPr xmlns:a="http://schemas.openxmlformats.org/drawingml/2006/main" anchor="ctr">
-            <a:noAutofit/>
-          </a:bodyPr>
-          <a:lstStyle xmlns:a="http://schemas.openxmlformats.org/drawingml/2006/main"/>
-          <a:p xmlns:a="http://schemas.openxmlformats.org/drawingml/2006/main">
-            <a:pPr algn="r">
-              <a:defRPr sz="1500" b="1">
-                <a:solidFill>
-                  <a:srgbClr val="CFE8FF"/>
-                </a:solidFill>
-                <a:latin typeface="Bitstream Charter"/>
-                <a:ea typeface="Bitstream Charter"/>
-                <a:cs typeface="Bitstream Charter"/>
-              </a:defRPr>
-            </a:pPr>
-            <a:r>
-              <a:rPr sz="1500" b="1">
-                <a:solidFill>
-                  <a:srgbClr val="CFE8FF"/>
-                </a:solidFill>
-                <a:latin typeface="Bitstream Charter"/>
-                <a:ea typeface="Bitstream Charter"/>
-                <a:cs typeface="Bitstream Charter"/>
-              </a:rPr>
-              <a:t>7 Minuten</a:t>
             </a:r>
           </a:p>
         </p:txBody>
@@ -2066,17 +1756,21 @@
       </p:ext>
     </p:extLst>
   </p:cSld>
+  <p:clrMapOvr>
+    <a:masterClrMapping/>
+  </p:clrMapOvr>
 </p:sld>
 </file>
 
 <file path=ppt/slides/slide2.xml><?xml version="1.0" encoding="utf-8"?>
-<p:sld xmlns:p="http://schemas.openxmlformats.org/presentationml/2006/main">
+<p:sld xmlns:a="http://schemas.openxmlformats.org/drawingml/2006/main" xmlns:r="http://schemas.openxmlformats.org/officeDocument/2006/relationships" xmlns:p="http://schemas.openxmlformats.org/presentationml/2006/main">
   <p:cSld>
     <p:bg>
       <p:bgPr>
-        <a:solidFill xmlns:a="http://schemas.openxmlformats.org/drawingml/2006/main">
+        <a:solidFill>
           <a:srgbClr val="FFFFFF"/>
         </a:solidFill>
+        <a:effectLst/>
       </p:bgPr>
     </p:bg>
     <p:spTree>
@@ -2086,41 +1780,46 @@
         <p:nvPr/>
       </p:nvGrpSpPr>
       <p:grpSpPr>
-        <a:xfrm xmlns:a="http://schemas.openxmlformats.org/drawingml/2006/main"/>
+        <a:xfrm>
+          <a:off x="0" y="0"/>
+          <a:ext cx="0" cy="0"/>
+          <a:chOff x="0" y="0"/>
+          <a:chExt cx="0" cy="0"/>
+        </a:xfrm>
       </p:grpSpPr>
       <p:sp>
         <p:nvSpPr>
-          <p:cNvPr id="12" name="">
-            <a:extLst xmlns:a="http://schemas.openxmlformats.org/drawingml/2006/main">
+          <p:cNvPr id="12" name="Rechteck 11">
+            <a:extLst>
               <a:ext uri="{FF2B5EF4-FFF2-40B4-BE49-F238E27FC236}">
                 <a16:creationId xmlns:a16="http://schemas.microsoft.com/office/drawing/2014/main" id="{6D91110D-90E8-4C85-B4CF-C3F6F641B36A}"/>
               </a:ext>
             </a:extLst>
           </p:cNvPr>
           <p:cNvSpPr>
-            <a:spLocks xmlns:a="http://schemas.openxmlformats.org/drawingml/2006/main" noGrp="1"/>
+            <a:spLocks noGrp="1"/>
           </p:cNvSpPr>
           <p:nvPr/>
         </p:nvSpPr>
         <p:spPr>
-          <a:xfrm xmlns:a="http://schemas.openxmlformats.org/drawingml/2006/main">
+          <a:xfrm>
             <a:off x="666750" y="400050"/>
             <a:ext cx="10858500" cy="552450"/>
           </a:xfrm>
-          <a:prstGeom xmlns:a="http://schemas.openxmlformats.org/drawingml/2006/main" prst="rect">
+          <a:prstGeom prst="rect">
             <a:avLst/>
           </a:prstGeom>
-          <a:noFill xmlns:a="http://schemas.openxmlformats.org/drawingml/2006/main"/>
-          <a:ln xmlns:a="http://schemas.openxmlformats.org/drawingml/2006/main" w="0">
+          <a:noFill/>
+          <a:ln w="0">
             <a:noFill/>
           </a:ln>
         </p:spPr>
         <p:txBody>
-          <a:bodyPr xmlns:a="http://schemas.openxmlformats.org/drawingml/2006/main" anchor="ctr">
+          <a:bodyPr anchor="ctr">
             <a:noAutofit/>
           </a:bodyPr>
-          <a:lstStyle xmlns:a="http://schemas.openxmlformats.org/drawingml/2006/main"/>
-          <a:p xmlns:a="http://schemas.openxmlformats.org/drawingml/2006/main">
+          <a:lstStyle/>
+          <a:p>
             <a:pPr algn="l">
               <a:defRPr sz="2700" b="1">
                 <a:solidFill>
@@ -2147,37 +1846,37 @@
       </p:sp>
       <p:sp>
         <p:nvSpPr>
-          <p:cNvPr id="2" name="">
-            <a:extLst xmlns:a="http://schemas.openxmlformats.org/drawingml/2006/main">
+          <p:cNvPr id="2" name="Rechteck 1">
+            <a:extLst>
               <a:ext uri="{FF2B5EF4-FFF2-40B4-BE49-F238E27FC236}">
                 <a16:creationId xmlns:a16="http://schemas.microsoft.com/office/drawing/2014/main" id="{7C377DD8-567A-4819-9D5A-BEF885E5C39D}"/>
               </a:ext>
             </a:extLst>
           </p:cNvPr>
           <p:cNvSpPr>
-            <a:spLocks xmlns:a="http://schemas.openxmlformats.org/drawingml/2006/main" noGrp="1"/>
+            <a:spLocks noGrp="1"/>
           </p:cNvSpPr>
           <p:nvPr/>
         </p:nvSpPr>
         <p:spPr>
-          <a:xfrm xmlns:a="http://schemas.openxmlformats.org/drawingml/2006/main">
+          <a:xfrm>
             <a:off x="685800" y="962025"/>
             <a:ext cx="10668000" cy="323850"/>
           </a:xfrm>
-          <a:prstGeom xmlns:a="http://schemas.openxmlformats.org/drawingml/2006/main" prst="rect">
+          <a:prstGeom prst="rect">
             <a:avLst/>
           </a:prstGeom>
-          <a:noFill xmlns:a="http://schemas.openxmlformats.org/drawingml/2006/main"/>
-          <a:ln xmlns:a="http://schemas.openxmlformats.org/drawingml/2006/main" w="0">
+          <a:noFill/>
+          <a:ln w="0">
             <a:noFill/>
           </a:ln>
         </p:spPr>
         <p:txBody>
-          <a:bodyPr xmlns:a="http://schemas.openxmlformats.org/drawingml/2006/main" anchor="ctr">
+          <a:bodyPr anchor="ctr">
             <a:noAutofit/>
           </a:bodyPr>
-          <a:lstStyle xmlns:a="http://schemas.openxmlformats.org/drawingml/2006/main"/>
-          <a:p xmlns:a="http://schemas.openxmlformats.org/drawingml/2006/main">
+          <a:lstStyle/>
+          <a:p>
             <a:pPr algn="l">
               <a:defRPr sz="1350" b="0">
                 <a:solidFill>
@@ -2204,67 +1903,74 @@
       </p:sp>
       <p:sp>
         <p:nvSpPr>
-          <p:cNvPr id="3" name="">
-            <a:extLst xmlns:a="http://schemas.openxmlformats.org/drawingml/2006/main">
+          <p:cNvPr id="3" name="Rechteck 2">
+            <a:extLst>
               <a:ext uri="{FF2B5EF4-FFF2-40B4-BE49-F238E27FC236}">
                 <a16:creationId xmlns:a16="http://schemas.microsoft.com/office/drawing/2014/main" id="{96BACF05-8381-4893-8893-8E761BAFCD51}"/>
               </a:ext>
             </a:extLst>
           </p:cNvPr>
           <p:cNvSpPr>
-            <a:spLocks xmlns:a="http://schemas.openxmlformats.org/drawingml/2006/main" noGrp="1"/>
+            <a:spLocks noGrp="1"/>
           </p:cNvSpPr>
           <p:nvPr/>
         </p:nvSpPr>
         <p:spPr>
-          <a:xfrm xmlns:a="http://schemas.openxmlformats.org/drawingml/2006/main">
+          <a:xfrm>
             <a:off x="685800" y="1381125"/>
             <a:ext cx="1809750" cy="47625"/>
           </a:xfrm>
-          <a:prstGeom xmlns:a="http://schemas.openxmlformats.org/drawingml/2006/main" prst="rect">
+          <a:prstGeom prst="rect">
             <a:avLst/>
           </a:prstGeom>
-          <a:solidFill xmlns:a="http://schemas.openxmlformats.org/drawingml/2006/main">
+          <a:solidFill>
             <a:srgbClr val="2364AA"/>
           </a:solidFill>
-          <a:ln xmlns:a="http://schemas.openxmlformats.org/drawingml/2006/main" w="0">
+          <a:ln w="0">
             <a:noFill/>
           </a:ln>
         </p:spPr>
-      </p:sp>
-      <p:sp>
-        <p:nvSpPr>
-          <p:cNvPr id="4" name="">
-            <a:extLst xmlns:a="http://schemas.openxmlformats.org/drawingml/2006/main">
+        <p:txBody>
+          <a:bodyPr/>
+          <a:lstStyle/>
+          <a:p>
+            <a:endParaRPr lang="de-CH"/>
+          </a:p>
+        </p:txBody>
+      </p:sp>
+      <p:sp>
+        <p:nvSpPr>
+          <p:cNvPr id="4" name="Rechteck 3">
+            <a:extLst>
               <a:ext uri="{FF2B5EF4-FFF2-40B4-BE49-F238E27FC236}">
                 <a16:creationId xmlns:a16="http://schemas.microsoft.com/office/drawing/2014/main" id="{DC8D1F34-BD5D-4774-9C10-051DD0A53D6E}"/>
               </a:ext>
             </a:extLst>
           </p:cNvPr>
           <p:cNvSpPr>
-            <a:spLocks xmlns:a="http://schemas.openxmlformats.org/drawingml/2006/main" noGrp="1"/>
+            <a:spLocks noGrp="1"/>
           </p:cNvSpPr>
           <p:nvPr/>
         </p:nvSpPr>
         <p:spPr>
-          <a:xfrm xmlns:a="http://schemas.openxmlformats.org/drawingml/2006/main">
+          <a:xfrm>
             <a:off x="857250" y="1790700"/>
             <a:ext cx="2667000" cy="381000"/>
           </a:xfrm>
-          <a:prstGeom xmlns:a="http://schemas.openxmlformats.org/drawingml/2006/main" prst="rect">
+          <a:prstGeom prst="rect">
             <a:avLst/>
           </a:prstGeom>
-          <a:noFill xmlns:a="http://schemas.openxmlformats.org/drawingml/2006/main"/>
-          <a:ln xmlns:a="http://schemas.openxmlformats.org/drawingml/2006/main" w="0">
+          <a:noFill/>
+          <a:ln w="0">
             <a:noFill/>
           </a:ln>
         </p:spPr>
         <p:txBody>
-          <a:bodyPr xmlns:a="http://schemas.openxmlformats.org/drawingml/2006/main" anchor="ctr">
+          <a:bodyPr anchor="ctr">
             <a:noAutofit/>
           </a:bodyPr>
-          <a:lstStyle xmlns:a="http://schemas.openxmlformats.org/drawingml/2006/main"/>
-          <a:p xmlns:a="http://schemas.openxmlformats.org/drawingml/2006/main">
+          <a:lstStyle/>
+          <a:p>
             <a:pPr algn="l">
               <a:defRPr sz="1725" b="1">
                 <a:solidFill>
@@ -2291,37 +1997,37 @@
       </p:sp>
       <p:sp>
         <p:nvSpPr>
-          <p:cNvPr id="5" name="">
-            <a:extLst xmlns:a="http://schemas.openxmlformats.org/drawingml/2006/main">
+          <p:cNvPr id="5" name="Rechteck 4">
+            <a:extLst>
               <a:ext uri="{FF2B5EF4-FFF2-40B4-BE49-F238E27FC236}">
                 <a16:creationId xmlns:a16="http://schemas.microsoft.com/office/drawing/2014/main" id="{918E9F82-C92D-42BD-9CAB-4B6EED909BBC}"/>
               </a:ext>
             </a:extLst>
           </p:cNvPr>
           <p:cNvSpPr>
-            <a:spLocks xmlns:a="http://schemas.openxmlformats.org/drawingml/2006/main" noGrp="1"/>
+            <a:spLocks noGrp="1"/>
           </p:cNvSpPr>
           <p:nvPr/>
         </p:nvSpPr>
         <p:spPr>
-          <a:xfrm xmlns:a="http://schemas.openxmlformats.org/drawingml/2006/main">
+          <a:xfrm>
             <a:off x="857250" y="2209800"/>
             <a:ext cx="4476750" cy="876300"/>
           </a:xfrm>
-          <a:prstGeom xmlns:a="http://schemas.openxmlformats.org/drawingml/2006/main" prst="rect">
+          <a:prstGeom prst="rect">
             <a:avLst/>
           </a:prstGeom>
-          <a:noFill xmlns:a="http://schemas.openxmlformats.org/drawingml/2006/main"/>
-          <a:ln xmlns:a="http://schemas.openxmlformats.org/drawingml/2006/main" w="0">
+          <a:noFill/>
+          <a:ln w="0">
             <a:noFill/>
           </a:ln>
         </p:spPr>
         <p:txBody>
-          <a:bodyPr xmlns:a="http://schemas.openxmlformats.org/drawingml/2006/main" anchor="ctr">
+          <a:bodyPr anchor="ctr">
             <a:noAutofit/>
           </a:bodyPr>
-          <a:lstStyle xmlns:a="http://schemas.openxmlformats.org/drawingml/2006/main"/>
-          <a:p xmlns:a="http://schemas.openxmlformats.org/drawingml/2006/main">
+          <a:lstStyle/>
+          <a:p>
             <a:pPr algn="l">
               <a:defRPr sz="1800" b="0">
                 <a:solidFill>
@@ -2348,37 +2054,37 @@
       </p:sp>
       <p:sp>
         <p:nvSpPr>
-          <p:cNvPr id="6" name="">
-            <a:extLst xmlns:a="http://schemas.openxmlformats.org/drawingml/2006/main">
+          <p:cNvPr id="6" name="Rechteck 5">
+            <a:extLst>
               <a:ext uri="{FF2B5EF4-FFF2-40B4-BE49-F238E27FC236}">
                 <a16:creationId xmlns:a16="http://schemas.microsoft.com/office/drawing/2014/main" id="{FC047039-7020-4BD8-ACBF-2050910B85EE}"/>
               </a:ext>
             </a:extLst>
           </p:cNvPr>
           <p:cNvSpPr>
-            <a:spLocks xmlns:a="http://schemas.openxmlformats.org/drawingml/2006/main" noGrp="1"/>
+            <a:spLocks noGrp="1"/>
           </p:cNvSpPr>
           <p:nvPr/>
         </p:nvSpPr>
         <p:spPr>
-          <a:xfrm xmlns:a="http://schemas.openxmlformats.org/drawingml/2006/main">
+          <a:xfrm>
             <a:off x="857250" y="3476625"/>
             <a:ext cx="2857500" cy="381000"/>
           </a:xfrm>
-          <a:prstGeom xmlns:a="http://schemas.openxmlformats.org/drawingml/2006/main" prst="rect">
+          <a:prstGeom prst="rect">
             <a:avLst/>
           </a:prstGeom>
-          <a:noFill xmlns:a="http://schemas.openxmlformats.org/drawingml/2006/main"/>
-          <a:ln xmlns:a="http://schemas.openxmlformats.org/drawingml/2006/main" w="0">
+          <a:noFill/>
+          <a:ln w="0">
             <a:noFill/>
           </a:ln>
         </p:spPr>
         <p:txBody>
-          <a:bodyPr xmlns:a="http://schemas.openxmlformats.org/drawingml/2006/main" anchor="ctr">
+          <a:bodyPr anchor="ctr">
             <a:noAutofit/>
           </a:bodyPr>
-          <a:lstStyle xmlns:a="http://schemas.openxmlformats.org/drawingml/2006/main"/>
-          <a:p xmlns:a="http://schemas.openxmlformats.org/drawingml/2006/main">
+          <a:lstStyle/>
+          <a:p>
             <a:pPr algn="l">
               <a:defRPr sz="1725" b="1">
                 <a:solidFill>
@@ -2405,37 +2111,37 @@
       </p:sp>
       <p:sp>
         <p:nvSpPr>
-          <p:cNvPr id="7" name="">
-            <a:extLst xmlns:a="http://schemas.openxmlformats.org/drawingml/2006/main">
+          <p:cNvPr id="7" name="Rechteck 6">
+            <a:extLst>
               <a:ext uri="{FF2B5EF4-FFF2-40B4-BE49-F238E27FC236}">
                 <a16:creationId xmlns:a16="http://schemas.microsoft.com/office/drawing/2014/main" id="{20B902D2-9281-46C8-B42B-7B264574714E}"/>
               </a:ext>
             </a:extLst>
           </p:cNvPr>
           <p:cNvSpPr>
-            <a:spLocks xmlns:a="http://schemas.openxmlformats.org/drawingml/2006/main" noGrp="1"/>
+            <a:spLocks noGrp="1"/>
           </p:cNvSpPr>
           <p:nvPr/>
         </p:nvSpPr>
         <p:spPr>
-          <a:xfrm xmlns:a="http://schemas.openxmlformats.org/drawingml/2006/main">
+          <a:xfrm>
             <a:off x="857250" y="3905250"/>
             <a:ext cx="4476750" cy="1428750"/>
           </a:xfrm>
-          <a:prstGeom xmlns:a="http://schemas.openxmlformats.org/drawingml/2006/main" prst="rect">
+          <a:prstGeom prst="rect">
             <a:avLst/>
           </a:prstGeom>
-          <a:noFill xmlns:a="http://schemas.openxmlformats.org/drawingml/2006/main"/>
-          <a:ln xmlns:a="http://schemas.openxmlformats.org/drawingml/2006/main" w="0">
+          <a:noFill/>
+          <a:ln w="0">
             <a:noFill/>
           </a:ln>
         </p:spPr>
         <p:txBody>
-          <a:bodyPr xmlns:a="http://schemas.openxmlformats.org/drawingml/2006/main" anchor="ctr">
+          <a:bodyPr anchor="ctr">
             <a:noAutofit/>
           </a:bodyPr>
-          <a:lstStyle xmlns:a="http://schemas.openxmlformats.org/drawingml/2006/main"/>
-          <a:p xmlns:a="http://schemas.openxmlformats.org/drawingml/2006/main">
+          <a:lstStyle/>
+          <a:p>
             <a:pPr algn="l">
               <a:defRPr sz="1725" b="0">
                 <a:solidFill>
@@ -2458,7 +2164,7 @@
               <a:t>Authentifizierung</a:t>
             </a:r>
           </a:p>
-          <a:p xmlns:a="http://schemas.openxmlformats.org/drawingml/2006/main">
+          <a:p>
             <a:pPr algn="l">
               <a:defRPr sz="1725" b="0">
                 <a:solidFill>
@@ -2481,7 +2187,7 @@
               <a:t>Autorisierung</a:t>
             </a:r>
           </a:p>
-          <a:p xmlns:a="http://schemas.openxmlformats.org/drawingml/2006/main">
+          <a:p>
             <a:pPr algn="l">
               <a:defRPr sz="1725" b="0">
                 <a:solidFill>
@@ -2508,37 +2214,37 @@
       </p:sp>
       <p:sp>
         <p:nvSpPr>
-          <p:cNvPr id="8" name="">
-            <a:extLst xmlns:a="http://schemas.openxmlformats.org/drawingml/2006/main">
+          <p:cNvPr id="8" name="Rechteck 7">
+            <a:extLst>
               <a:ext uri="{FF2B5EF4-FFF2-40B4-BE49-F238E27FC236}">
                 <a16:creationId xmlns:a16="http://schemas.microsoft.com/office/drawing/2014/main" id="{CAE68AAF-D0D7-4121-A8CB-43E40FB4DBF9}"/>
               </a:ext>
             </a:extLst>
           </p:cNvPr>
           <p:cNvSpPr>
-            <a:spLocks xmlns:a="http://schemas.openxmlformats.org/drawingml/2006/main" noGrp="1"/>
+            <a:spLocks noGrp="1"/>
           </p:cNvSpPr>
           <p:nvPr/>
         </p:nvSpPr>
         <p:spPr>
-          <a:xfrm xmlns:a="http://schemas.openxmlformats.org/drawingml/2006/main">
+          <a:xfrm>
             <a:off x="6858000" y="2095500"/>
             <a:ext cx="4095750" cy="952500"/>
           </a:xfrm>
-          <a:prstGeom xmlns:a="http://schemas.openxmlformats.org/drawingml/2006/main" prst="rect">
+          <a:prstGeom prst="rect">
             <a:avLst/>
           </a:prstGeom>
-          <a:noFill xmlns:a="http://schemas.openxmlformats.org/drawingml/2006/main"/>
-          <a:ln xmlns:a="http://schemas.openxmlformats.org/drawingml/2006/main" w="0">
+          <a:noFill/>
+          <a:ln w="0">
             <a:noFill/>
           </a:ln>
         </p:spPr>
         <p:txBody>
-          <a:bodyPr xmlns:a="http://schemas.openxmlformats.org/drawingml/2006/main" anchor="ctr">
+          <a:bodyPr anchor="ctr">
             <a:noAutofit/>
           </a:bodyPr>
-          <a:lstStyle xmlns:a="http://schemas.openxmlformats.org/drawingml/2006/main"/>
-          <a:p xmlns:a="http://schemas.openxmlformats.org/drawingml/2006/main">
+          <a:lstStyle/>
+          <a:p>
             <a:pPr algn="ctr">
               <a:defRPr sz="4800" b="1">
                 <a:solidFill>
@@ -2565,37 +2271,37 @@
       </p:sp>
       <p:sp>
         <p:nvSpPr>
-          <p:cNvPr id="9" name="">
-            <a:extLst xmlns:a="http://schemas.openxmlformats.org/drawingml/2006/main">
+          <p:cNvPr id="9" name="Rechteck 8">
+            <a:extLst>
               <a:ext uri="{FF2B5EF4-FFF2-40B4-BE49-F238E27FC236}">
                 <a16:creationId xmlns:a16="http://schemas.microsoft.com/office/drawing/2014/main" id="{A45E7783-88DC-4921-AA5B-FE014E48B3FB}"/>
               </a:ext>
             </a:extLst>
           </p:cNvPr>
           <p:cNvSpPr>
-            <a:spLocks xmlns:a="http://schemas.openxmlformats.org/drawingml/2006/main" noGrp="1"/>
+            <a:spLocks noGrp="1"/>
           </p:cNvSpPr>
           <p:nvPr/>
         </p:nvSpPr>
         <p:spPr>
-          <a:xfrm xmlns:a="http://schemas.openxmlformats.org/drawingml/2006/main">
+          <a:xfrm>
             <a:off x="6810375" y="3143250"/>
             <a:ext cx="4191000" cy="1047750"/>
           </a:xfrm>
-          <a:prstGeom xmlns:a="http://schemas.openxmlformats.org/drawingml/2006/main" prst="rect">
+          <a:prstGeom prst="rect">
             <a:avLst/>
           </a:prstGeom>
-          <a:noFill xmlns:a="http://schemas.openxmlformats.org/drawingml/2006/main"/>
-          <a:ln xmlns:a="http://schemas.openxmlformats.org/drawingml/2006/main" w="0">
+          <a:noFill/>
+          <a:ln w="0">
             <a:noFill/>
           </a:ln>
         </p:spPr>
         <p:txBody>
-          <a:bodyPr xmlns:a="http://schemas.openxmlformats.org/drawingml/2006/main" anchor="ctr">
+          <a:bodyPr anchor="ctr">
             <a:noAutofit/>
           </a:bodyPr>
-          <a:lstStyle xmlns:a="http://schemas.openxmlformats.org/drawingml/2006/main"/>
-          <a:p xmlns:a="http://schemas.openxmlformats.org/drawingml/2006/main">
+          <a:lstStyle/>
+          <a:p>
             <a:pPr algn="ctr">
               <a:defRPr sz="1950" b="1">
                 <a:solidFill>
@@ -2607,7 +2313,7 @@
               </a:defRPr>
             </a:pPr>
             <a:r>
-              <a:rPr sz="1950" b="1">
+              <a:rPr lang="de-CH" sz="1950" b="1" dirty="0">
                 <a:solidFill>
                   <a:srgbClr val="102A43"/>
                 </a:solidFill>
@@ -2615,44 +2321,143 @@
                 <a:ea typeface="Bitstream Charter"/>
                 <a:cs typeface="Bitstream Charter"/>
               </a:rPr>
-              <a:t>Zwei offene Defects mit hoher Severity blockieren den Release</a:t>
-            </a:r>
-          </a:p>
-        </p:txBody>
-      </p:sp>
-      <p:sp>
-        <p:nvSpPr>
-          <p:cNvPr id="10" name="">
-            <a:extLst xmlns:a="http://schemas.openxmlformats.org/drawingml/2006/main">
+              <a:t>Vier</a:t>
+            </a:r>
+            <a:r>
+              <a:rPr sz="1950" b="1" dirty="0">
+                <a:solidFill>
+                  <a:srgbClr val="102A43"/>
+                </a:solidFill>
+                <a:latin typeface="Bitstream Charter"/>
+                <a:ea typeface="Bitstream Charter"/>
+                <a:cs typeface="Bitstream Charter"/>
+              </a:rPr>
+              <a:t> </a:t>
+            </a:r>
+            <a:r>
+              <a:rPr sz="1950" b="1" dirty="0" err="1">
+                <a:solidFill>
+                  <a:srgbClr val="102A43"/>
+                </a:solidFill>
+                <a:latin typeface="Bitstream Charter"/>
+                <a:ea typeface="Bitstream Charter"/>
+                <a:cs typeface="Bitstream Charter"/>
+              </a:rPr>
+              <a:t>offene</a:t>
+            </a:r>
+            <a:r>
+              <a:rPr sz="1950" b="1" dirty="0">
+                <a:solidFill>
+                  <a:srgbClr val="102A43"/>
+                </a:solidFill>
+                <a:latin typeface="Bitstream Charter"/>
+                <a:ea typeface="Bitstream Charter"/>
+                <a:cs typeface="Bitstream Charter"/>
+              </a:rPr>
+              <a:t> Defects </a:t>
+            </a:r>
+            <a:r>
+              <a:rPr sz="1950" b="1" dirty="0" err="1">
+                <a:solidFill>
+                  <a:srgbClr val="102A43"/>
+                </a:solidFill>
+                <a:latin typeface="Bitstream Charter"/>
+                <a:ea typeface="Bitstream Charter"/>
+                <a:cs typeface="Bitstream Charter"/>
+              </a:rPr>
+              <a:t>mit</a:t>
+            </a:r>
+            <a:r>
+              <a:rPr sz="1950" b="1" dirty="0">
+                <a:solidFill>
+                  <a:srgbClr val="102A43"/>
+                </a:solidFill>
+                <a:latin typeface="Bitstream Charter"/>
+                <a:ea typeface="Bitstream Charter"/>
+                <a:cs typeface="Bitstream Charter"/>
+              </a:rPr>
+              <a:t> </a:t>
+            </a:r>
+            <a:r>
+              <a:rPr sz="1950" b="1" dirty="0" err="1">
+                <a:solidFill>
+                  <a:srgbClr val="102A43"/>
+                </a:solidFill>
+                <a:latin typeface="Bitstream Charter"/>
+                <a:ea typeface="Bitstream Charter"/>
+                <a:cs typeface="Bitstream Charter"/>
+              </a:rPr>
+              <a:t>hoher</a:t>
+            </a:r>
+            <a:r>
+              <a:rPr sz="1950" b="1" dirty="0">
+                <a:solidFill>
+                  <a:srgbClr val="102A43"/>
+                </a:solidFill>
+                <a:latin typeface="Bitstream Charter"/>
+                <a:ea typeface="Bitstream Charter"/>
+                <a:cs typeface="Bitstream Charter"/>
+              </a:rPr>
+              <a:t> Severity </a:t>
+            </a:r>
+            <a:r>
+              <a:rPr sz="1950" b="1" dirty="0" err="1">
+                <a:solidFill>
+                  <a:srgbClr val="102A43"/>
+                </a:solidFill>
+                <a:latin typeface="Bitstream Charter"/>
+                <a:ea typeface="Bitstream Charter"/>
+                <a:cs typeface="Bitstream Charter"/>
+              </a:rPr>
+              <a:t>blockieren</a:t>
+            </a:r>
+            <a:r>
+              <a:rPr sz="1950" b="1" dirty="0">
+                <a:solidFill>
+                  <a:srgbClr val="102A43"/>
+                </a:solidFill>
+                <a:latin typeface="Bitstream Charter"/>
+                <a:ea typeface="Bitstream Charter"/>
+                <a:cs typeface="Bitstream Charter"/>
+              </a:rPr>
+              <a:t> den Release</a:t>
+            </a:r>
+          </a:p>
+        </p:txBody>
+      </p:sp>
+      <p:sp>
+        <p:nvSpPr>
+          <p:cNvPr id="10" name="Rechteck 9">
+            <a:extLst>
               <a:ext uri="{FF2B5EF4-FFF2-40B4-BE49-F238E27FC236}">
                 <a16:creationId xmlns:a16="http://schemas.microsoft.com/office/drawing/2014/main" id="{01A15D06-7DA1-480E-B1FC-0D99A93C863E}"/>
               </a:ext>
             </a:extLst>
           </p:cNvPr>
           <p:cNvSpPr>
-            <a:spLocks xmlns:a="http://schemas.openxmlformats.org/drawingml/2006/main" noGrp="1"/>
+            <a:spLocks noGrp="1"/>
           </p:cNvSpPr>
           <p:nvPr/>
         </p:nvSpPr>
         <p:spPr>
-          <a:xfrm xmlns:a="http://schemas.openxmlformats.org/drawingml/2006/main">
+          <a:xfrm>
             <a:off x="7000875" y="4429125"/>
             <a:ext cx="3810000" cy="952500"/>
           </a:xfrm>
-          <a:prstGeom xmlns:a="http://schemas.openxmlformats.org/drawingml/2006/main" prst="rect">
+          <a:prstGeom prst="rect">
             <a:avLst/>
           </a:prstGeom>
-          <a:noFill xmlns:a="http://schemas.openxmlformats.org/drawingml/2006/main"/>
-          <a:ln xmlns:a="http://schemas.openxmlformats.org/drawingml/2006/main" w="0">
+          <a:noFill/>
+          <a:ln w="0">
             <a:noFill/>
           </a:ln>
         </p:spPr>
         <p:txBody>
-          <a:bodyPr xmlns:a="http://schemas.openxmlformats.org/drawingml/2006/main" anchor="ctr">
+          <a:bodyPr anchor="ctr">
             <a:noAutofit/>
           </a:bodyPr>
-          <a:lstStyle xmlns:a="http://schemas.openxmlformats.org/drawingml/2006/main"/>
-          <a:p xmlns:a="http://schemas.openxmlformats.org/drawingml/2006/main">
+          <a:lstStyle/>
+          <a:p>
             <a:pPr algn="ctr">
               <a:defRPr sz="1575" b="0">
                 <a:solidFill>
@@ -2664,7 +2469,7 @@
               </a:defRPr>
             </a:pPr>
             <a:r>
-              <a:rPr sz="1575" b="0">
+              <a:rPr sz="1575" b="0" dirty="0">
                 <a:solidFill>
                   <a:srgbClr val="52667A"/>
                 </a:solidFill>
@@ -2672,10 +2477,51 @@
                 <a:ea typeface="Bitstream Charter"/>
                 <a:cs typeface="Bitstream Charter"/>
               </a:rPr>
-              <a:t>DEF-01  Fremde Tasks sichtbar</a:t>
-            </a:r>
-          </a:p>
-          <a:p xmlns:a="http://schemas.openxmlformats.org/drawingml/2006/main">
+              <a:t>DEF-01  </a:t>
+            </a:r>
+            <a:r>
+              <a:rPr sz="1575" b="0" dirty="0" err="1">
+                <a:solidFill>
+                  <a:srgbClr val="52667A"/>
+                </a:solidFill>
+                <a:latin typeface="Bitstream Charter"/>
+                <a:ea typeface="Bitstream Charter"/>
+                <a:cs typeface="Bitstream Charter"/>
+              </a:rPr>
+              <a:t>Fremde</a:t>
+            </a:r>
+            <a:r>
+              <a:rPr sz="1575" b="0" dirty="0">
+                <a:solidFill>
+                  <a:srgbClr val="52667A"/>
+                </a:solidFill>
+                <a:latin typeface="Bitstream Charter"/>
+                <a:ea typeface="Bitstream Charter"/>
+                <a:cs typeface="Bitstream Charter"/>
+              </a:rPr>
+              <a:t> Tasks </a:t>
+            </a:r>
+            <a:r>
+              <a:rPr sz="1575" b="0" dirty="0" err="1">
+                <a:solidFill>
+                  <a:srgbClr val="52667A"/>
+                </a:solidFill>
+                <a:latin typeface="Bitstream Charter"/>
+                <a:ea typeface="Bitstream Charter"/>
+                <a:cs typeface="Bitstream Charter"/>
+              </a:rPr>
+              <a:t>sichtbar</a:t>
+            </a:r>
+            <a:endParaRPr sz="1575" b="0" dirty="0">
+              <a:solidFill>
+                <a:srgbClr val="52667A"/>
+              </a:solidFill>
+              <a:latin typeface="Bitstream Charter"/>
+              <a:ea typeface="Bitstream Charter"/>
+              <a:cs typeface="Bitstream Charter"/>
+            </a:endParaRPr>
+          </a:p>
+          <a:p>
             <a:pPr algn="ctr">
               <a:defRPr sz="1575" b="0">
                 <a:solidFill>
@@ -2687,7 +2533,7 @@
               </a:defRPr>
             </a:pPr>
             <a:r>
-              <a:rPr sz="1575" b="0">
+              <a:rPr sz="1575" b="0" dirty="0">
                 <a:solidFill>
                   <a:srgbClr val="52667A"/>
                 </a:solidFill>
@@ -2695,44 +2541,139 @@
                 <a:ea typeface="Bitstream Charter"/>
                 <a:cs typeface="Bitstream Charter"/>
               </a:rPr>
-              <a:t>DEF-05  Interne Fehlerdetails offengelegt</a:t>
-            </a:r>
-          </a:p>
-        </p:txBody>
-      </p:sp>
-      <p:sp>
-        <p:nvSpPr>
-          <p:cNvPr id="11" name="">
-            <a:extLst xmlns:a="http://schemas.openxmlformats.org/drawingml/2006/main">
+              <a:t>DEF-05  Interne </a:t>
+            </a:r>
+            <a:r>
+              <a:rPr sz="1575" b="0" dirty="0" err="1">
+                <a:solidFill>
+                  <a:srgbClr val="52667A"/>
+                </a:solidFill>
+                <a:latin typeface="Bitstream Charter"/>
+                <a:ea typeface="Bitstream Charter"/>
+                <a:cs typeface="Bitstream Charter"/>
+              </a:rPr>
+              <a:t>Fehlerdetails</a:t>
+            </a:r>
+            <a:r>
+              <a:rPr sz="1575" b="0" dirty="0">
+                <a:solidFill>
+                  <a:srgbClr val="52667A"/>
+                </a:solidFill>
+                <a:latin typeface="Bitstream Charter"/>
+                <a:ea typeface="Bitstream Charter"/>
+                <a:cs typeface="Bitstream Charter"/>
+              </a:rPr>
+              <a:t> </a:t>
+            </a:r>
+            <a:r>
+              <a:rPr sz="1575" b="0" dirty="0" err="1">
+                <a:solidFill>
+                  <a:srgbClr val="52667A"/>
+                </a:solidFill>
+                <a:latin typeface="Bitstream Charter"/>
+                <a:ea typeface="Bitstream Charter"/>
+                <a:cs typeface="Bitstream Charter"/>
+              </a:rPr>
+              <a:t>offengelegt</a:t>
+            </a:r>
+            <a:endParaRPr lang="de-CH" sz="1575" b="0" dirty="0">
+              <a:solidFill>
+                <a:srgbClr val="52667A"/>
+              </a:solidFill>
+              <a:latin typeface="Bitstream Charter"/>
+              <a:ea typeface="Bitstream Charter"/>
+              <a:cs typeface="Bitstream Charter"/>
+            </a:endParaRPr>
+          </a:p>
+          <a:p>
+            <a:pPr algn="ctr">
+              <a:defRPr sz="1575" b="0">
+                <a:solidFill>
+                  <a:srgbClr val="52667A"/>
+                </a:solidFill>
+                <a:latin typeface="Bitstream Charter"/>
+                <a:ea typeface="Bitstream Charter"/>
+                <a:cs typeface="Bitstream Charter"/>
+              </a:defRPr>
+            </a:pPr>
+            <a:r>
+              <a:rPr lang="de-DE" sz="1575" dirty="0">
+                <a:solidFill>
+                  <a:srgbClr val="52667A"/>
+                </a:solidFill>
+                <a:latin typeface="Bitstream Charter"/>
+                <a:ea typeface="Bitstream Charter"/>
+                <a:cs typeface="Bitstream Charter"/>
+              </a:rPr>
+              <a:t>DEF-06  Sperrung erst nach sechs Fehlversuchen</a:t>
+            </a:r>
+          </a:p>
+          <a:p>
+            <a:pPr algn="ctr">
+              <a:defRPr sz="1575" b="0">
+                <a:solidFill>
+                  <a:srgbClr val="52667A"/>
+                </a:solidFill>
+                <a:latin typeface="Bitstream Charter"/>
+                <a:ea typeface="Bitstream Charter"/>
+                <a:cs typeface="Bitstream Charter"/>
+              </a:defRPr>
+            </a:pPr>
+            <a:r>
+              <a:rPr lang="de-DE" sz="1575" dirty="0">
+                <a:solidFill>
+                  <a:srgbClr val="52667A"/>
+                </a:solidFill>
+                <a:latin typeface="Bitstream Charter"/>
+                <a:ea typeface="Bitstream Charter"/>
+                <a:cs typeface="Bitstream Charter"/>
+              </a:rPr>
+              <a:t>DEF-07  Fehlversuchszähler bleibt nach Login bestehen</a:t>
+            </a:r>
+            <a:endParaRPr sz="1575" b="0" dirty="0">
+              <a:solidFill>
+                <a:srgbClr val="52667A"/>
+              </a:solidFill>
+              <a:latin typeface="Bitstream Charter"/>
+              <a:ea typeface="Bitstream Charter"/>
+              <a:cs typeface="Bitstream Charter"/>
+            </a:endParaRPr>
+          </a:p>
+        </p:txBody>
+      </p:sp>
+      <p:sp>
+        <p:nvSpPr>
+          <p:cNvPr id="11" name="Rechteck 10">
+            <a:extLst>
               <a:ext uri="{FF2B5EF4-FFF2-40B4-BE49-F238E27FC236}">
                 <a16:creationId xmlns:a16="http://schemas.microsoft.com/office/drawing/2014/main" id="{CBD8B9C2-DE5D-4CA3-A432-B5A4138FCBDA}"/>
               </a:ext>
             </a:extLst>
           </p:cNvPr>
           <p:cNvSpPr>
-            <a:spLocks xmlns:a="http://schemas.openxmlformats.org/drawingml/2006/main" noGrp="1"/>
+            <a:spLocks noGrp="1"/>
           </p:cNvSpPr>
           <p:nvPr/>
         </p:nvSpPr>
         <p:spPr>
-          <a:xfrm xmlns:a="http://schemas.openxmlformats.org/drawingml/2006/main">
+          <a:xfrm>
             <a:off x="685800" y="6496050"/>
             <a:ext cx="10820400" cy="209550"/>
           </a:xfrm>
-          <a:prstGeom xmlns:a="http://schemas.openxmlformats.org/drawingml/2006/main" prst="rect">
+          <a:prstGeom prst="rect">
             <a:avLst/>
           </a:prstGeom>
-          <a:noFill xmlns:a="http://schemas.openxmlformats.org/drawingml/2006/main"/>
-          <a:ln xmlns:a="http://schemas.openxmlformats.org/drawingml/2006/main" w="0">
+          <a:noFill/>
+          <a:ln w="0">
             <a:noFill/>
           </a:ln>
         </p:spPr>
         <p:txBody>
-          <a:bodyPr xmlns:a="http://schemas.openxmlformats.org/drawingml/2006/main" anchor="ctr">
+          <a:bodyPr anchor="ctr">
             <a:noAutofit/>
           </a:bodyPr>
-          <a:lstStyle xmlns:a="http://schemas.openxmlformats.org/drawingml/2006/main"/>
-          <a:p xmlns:a="http://schemas.openxmlformats.org/drawingml/2006/main">
+          <a:lstStyle/>
+          <a:p>
             <a:pPr algn="r">
               <a:defRPr sz="900" b="0">
                 <a:solidFill>
@@ -2764,17 +2705,21 @@
       </p:ext>
     </p:extLst>
   </p:cSld>
+  <p:clrMapOvr>
+    <a:masterClrMapping/>
+  </p:clrMapOvr>
 </p:sld>
 </file>
 
 <file path=ppt/slides/slide3.xml><?xml version="1.0" encoding="utf-8"?>
-<p:sld xmlns:p="http://schemas.openxmlformats.org/presentationml/2006/main">
+<p:sld xmlns:a="http://schemas.openxmlformats.org/drawingml/2006/main" xmlns:r="http://schemas.openxmlformats.org/officeDocument/2006/relationships" xmlns:p="http://schemas.openxmlformats.org/presentationml/2006/main">
   <p:cSld>
     <p:bg>
       <p:bgPr>
-        <a:solidFill xmlns:a="http://schemas.openxmlformats.org/drawingml/2006/main">
+        <a:solidFill>
           <a:srgbClr val="FFFFFF"/>
         </a:solidFill>
+        <a:effectLst/>
       </p:bgPr>
     </p:bg>
     <p:spTree>
@@ -2784,41 +2729,46 @@
         <p:nvPr/>
       </p:nvGrpSpPr>
       <p:grpSpPr>
-        <a:xfrm xmlns:a="http://schemas.openxmlformats.org/drawingml/2006/main"/>
+        <a:xfrm>
+          <a:off x="0" y="0"/>
+          <a:ext cx="0" cy="0"/>
+          <a:chOff x="0" y="0"/>
+          <a:chExt cx="0" cy="0"/>
+        </a:xfrm>
       </p:grpSpPr>
       <p:sp>
         <p:nvSpPr>
-          <p:cNvPr id="7" name="">
-            <a:extLst xmlns:a="http://schemas.openxmlformats.org/drawingml/2006/main">
+          <p:cNvPr id="7" name="Rechteck 6">
+            <a:extLst>
               <a:ext uri="{FF2B5EF4-FFF2-40B4-BE49-F238E27FC236}">
                 <a16:creationId xmlns:a16="http://schemas.microsoft.com/office/drawing/2014/main" id="{1D5B7424-9017-4577-8530-DEBC6D9AE6E9}"/>
               </a:ext>
             </a:extLst>
           </p:cNvPr>
           <p:cNvSpPr>
-            <a:spLocks xmlns:a="http://schemas.openxmlformats.org/drawingml/2006/main" noGrp="1"/>
+            <a:spLocks noGrp="1"/>
           </p:cNvSpPr>
           <p:nvPr/>
         </p:nvSpPr>
         <p:spPr>
-          <a:xfrm xmlns:a="http://schemas.openxmlformats.org/drawingml/2006/main">
+          <a:xfrm>
             <a:off x="666750" y="400050"/>
             <a:ext cx="10858500" cy="552450"/>
           </a:xfrm>
-          <a:prstGeom xmlns:a="http://schemas.openxmlformats.org/drawingml/2006/main" prst="rect">
+          <a:prstGeom prst="rect">
             <a:avLst/>
           </a:prstGeom>
-          <a:noFill xmlns:a="http://schemas.openxmlformats.org/drawingml/2006/main"/>
-          <a:ln xmlns:a="http://schemas.openxmlformats.org/drawingml/2006/main" w="0">
+          <a:noFill/>
+          <a:ln w="0">
             <a:noFill/>
           </a:ln>
         </p:spPr>
         <p:txBody>
-          <a:bodyPr xmlns:a="http://schemas.openxmlformats.org/drawingml/2006/main" anchor="ctr">
+          <a:bodyPr anchor="ctr">
             <a:noAutofit/>
           </a:bodyPr>
-          <a:lstStyle xmlns:a="http://schemas.openxmlformats.org/drawingml/2006/main"/>
-          <a:p xmlns:a="http://schemas.openxmlformats.org/drawingml/2006/main">
+          <a:lstStyle/>
+          <a:p>
             <a:pPr algn="l">
               <a:defRPr sz="2700" b="1">
                 <a:solidFill>
@@ -2845,37 +2795,37 @@
       </p:sp>
       <p:sp>
         <p:nvSpPr>
-          <p:cNvPr id="2" name="">
-            <a:extLst xmlns:a="http://schemas.openxmlformats.org/drawingml/2006/main">
+          <p:cNvPr id="2" name="Rechteck 1">
+            <a:extLst>
               <a:ext uri="{FF2B5EF4-FFF2-40B4-BE49-F238E27FC236}">
                 <a16:creationId xmlns:a16="http://schemas.microsoft.com/office/drawing/2014/main" id="{0E1852BC-84F6-42D2-8273-CCB73A34068E}"/>
               </a:ext>
             </a:extLst>
           </p:cNvPr>
           <p:cNvSpPr>
-            <a:spLocks xmlns:a="http://schemas.openxmlformats.org/drawingml/2006/main" noGrp="1"/>
+            <a:spLocks noGrp="1"/>
           </p:cNvSpPr>
           <p:nvPr/>
         </p:nvSpPr>
         <p:spPr>
-          <a:xfrm xmlns:a="http://schemas.openxmlformats.org/drawingml/2006/main">
+          <a:xfrm>
             <a:off x="685800" y="962025"/>
             <a:ext cx="10668000" cy="323850"/>
           </a:xfrm>
-          <a:prstGeom xmlns:a="http://schemas.openxmlformats.org/drawingml/2006/main" prst="rect">
+          <a:prstGeom prst="rect">
             <a:avLst/>
           </a:prstGeom>
-          <a:noFill xmlns:a="http://schemas.openxmlformats.org/drawingml/2006/main"/>
-          <a:ln xmlns:a="http://schemas.openxmlformats.org/drawingml/2006/main" w="0">
+          <a:noFill/>
+          <a:ln w="0">
             <a:noFill/>
           </a:ln>
         </p:spPr>
         <p:txBody>
-          <a:bodyPr xmlns:a="http://schemas.openxmlformats.org/drawingml/2006/main" anchor="ctr">
+          <a:bodyPr anchor="ctr">
             <a:noAutofit/>
           </a:bodyPr>
-          <a:lstStyle xmlns:a="http://schemas.openxmlformats.org/drawingml/2006/main"/>
-          <a:p xmlns:a="http://schemas.openxmlformats.org/drawingml/2006/main">
+          <a:lstStyle/>
+          <a:p>
             <a:pPr algn="l">
               <a:defRPr sz="1350" b="0">
                 <a:solidFill>
@@ -2902,24 +2852,54 @@
       </p:sp>
       <p:graphicFrame>
         <p:nvGraphicFramePr>
-          <p:cNvPr id="9" name=""/>
+          <p:cNvPr id="9" name="Tabelle 8"/>
           <p:cNvGraphicFramePr/>
           <p:nvPr/>
         </p:nvGraphicFramePr>
         <p:xfrm>
-          <a:off xmlns:a="http://schemas.openxmlformats.org/drawingml/2006/main" x="685800" y="1619250"/>
-          <a:ext xmlns:a="http://schemas.openxmlformats.org/drawingml/2006/main" cx="10810875" cy="3429000"/>
+          <a:off x="685800" y="1619250"/>
+          <a:ext cx="10810875" cy="3429000"/>
         </p:xfrm>
-        <a:graphic xmlns:a="http://schemas.openxmlformats.org/drawingml/2006/main">
+        <a:graphic>
           <a:graphicData uri="http://schemas.openxmlformats.org/drawingml/2006/table">
             <a:tbl>
               <a:tblPr firstRow="1" bandRow="1"/>
               <a:tblGrid>
-                <a:gridCol w="3714750"/>
-                <a:gridCol w="762000"/>
-                <a:gridCol w="762000"/>
-                <a:gridCol w="952500"/>
-                <a:gridCol w="4619625"/>
+                <a:gridCol w="3714750">
+                  <a:extLst>
+                    <a:ext uri="{9D8B030D-6E8A-4147-A177-3AD203B41FA5}">
+                      <a16:colId xmlns:a16="http://schemas.microsoft.com/office/drawing/2014/main" val="20000"/>
+                    </a:ext>
+                  </a:extLst>
+                </a:gridCol>
+                <a:gridCol w="762000">
+                  <a:extLst>
+                    <a:ext uri="{9D8B030D-6E8A-4147-A177-3AD203B41FA5}">
+                      <a16:colId xmlns:a16="http://schemas.microsoft.com/office/drawing/2014/main" val="20001"/>
+                    </a:ext>
+                  </a:extLst>
+                </a:gridCol>
+                <a:gridCol w="762000">
+                  <a:extLst>
+                    <a:ext uri="{9D8B030D-6E8A-4147-A177-3AD203B41FA5}">
+                      <a16:colId xmlns:a16="http://schemas.microsoft.com/office/drawing/2014/main" val="20002"/>
+                    </a:ext>
+                  </a:extLst>
+                </a:gridCol>
+                <a:gridCol w="952500">
+                  <a:extLst>
+                    <a:ext uri="{9D8B030D-6E8A-4147-A177-3AD203B41FA5}">
+                      <a16:colId xmlns:a16="http://schemas.microsoft.com/office/drawing/2014/main" val="20003"/>
+                    </a:ext>
+                  </a:extLst>
+                </a:gridCol>
+                <a:gridCol w="4619625">
+                  <a:extLst>
+                    <a:ext uri="{9D8B030D-6E8A-4147-A177-3AD203B41FA5}">
+                      <a16:colId xmlns:a16="http://schemas.microsoft.com/office/drawing/2014/main" val="20004"/>
+                    </a:ext>
+                  </a:extLst>
+                </a:gridCol>
               </a:tblGrid>
               <a:tr h="571500">
                 <a:tc>
@@ -2940,7 +2920,7 @@
                       </a:r>
                     </a:p>
                   </a:txBody>
-                  <a:tcPr marL="91440" marR="91440" marT="45720" marB="45720">
+                  <a:tcPr>
                     <a:solidFill>
                       <a:srgbClr val="102A43"/>
                     </a:solidFill>
@@ -2964,7 +2944,7 @@
                       </a:r>
                     </a:p>
                   </a:txBody>
-                  <a:tcPr marL="91440" marR="91440" marT="45720" marB="45720">
+                  <a:tcPr>
                     <a:solidFill>
                       <a:srgbClr val="102A43"/>
                     </a:solidFill>
@@ -2988,7 +2968,7 @@
                       </a:r>
                     </a:p>
                   </a:txBody>
-                  <a:tcPr marL="91440" marR="91440" marT="45720" marB="45720">
+                  <a:tcPr>
                     <a:solidFill>
                       <a:srgbClr val="102A43"/>
                     </a:solidFill>
@@ -3012,7 +2992,7 @@
                       </a:r>
                     </a:p>
                   </a:txBody>
-                  <a:tcPr marL="91440" marR="91440" marT="45720" marB="45720">
+                  <a:tcPr>
                     <a:solidFill>
                       <a:srgbClr val="102A43"/>
                     </a:solidFill>
@@ -3036,12 +3016,17 @@
                       </a:r>
                     </a:p>
                   </a:txBody>
-                  <a:tcPr marL="91440" marR="91440" marT="45720" marB="45720">
+                  <a:tcPr>
                     <a:solidFill>
                       <a:srgbClr val="102A43"/>
                     </a:solidFill>
                   </a:tcPr>
                 </a:tc>
+                <a:extLst>
+                  <a:ext uri="{0D108BD9-81ED-4DB2-BD59-A6C34878D82A}">
+                    <a16:rowId xmlns:a16="http://schemas.microsoft.com/office/drawing/2014/main" val="10000"/>
+                  </a:ext>
+                </a:extLst>
               </a:tr>
               <a:tr h="571500">
                 <a:tc>
@@ -3062,7 +3047,7 @@
                       </a:r>
                     </a:p>
                   </a:txBody>
-                  <a:tcPr marL="91440" marR="91440" marT="45720" marB="45720"/>
+                  <a:tcPr/>
                 </a:tc>
                 <a:tc>
                   <a:txBody>
@@ -3082,7 +3067,7 @@
                       </a:r>
                     </a:p>
                   </a:txBody>
-                  <a:tcPr marL="91440" marR="91440" marT="45720" marB="45720"/>
+                  <a:tcPr/>
                 </a:tc>
                 <a:tc>
                   <a:txBody>
@@ -3102,7 +3087,7 @@
                       </a:r>
                     </a:p>
                   </a:txBody>
-                  <a:tcPr marL="91440" marR="91440" marT="45720" marB="45720"/>
+                  <a:tcPr/>
                 </a:tc>
                 <a:tc>
                   <a:txBody>
@@ -3122,7 +3107,7 @@
                       </a:r>
                     </a:p>
                   </a:txBody>
-                  <a:tcPr marL="91440" marR="91440" marT="45720" marB="45720">
+                  <a:tcPr>
                     <a:solidFill>
                       <a:srgbClr val="FDECEC"/>
                     </a:solidFill>
@@ -3146,8 +3131,13 @@
                       </a:r>
                     </a:p>
                   </a:txBody>
-                  <a:tcPr marL="91440" marR="91440" marT="45720" marB="45720"/>
+                  <a:tcPr/>
                 </a:tc>
+                <a:extLst>
+                  <a:ext uri="{0D108BD9-81ED-4DB2-BD59-A6C34878D82A}">
+                    <a16:rowId xmlns:a16="http://schemas.microsoft.com/office/drawing/2014/main" val="10001"/>
+                  </a:ext>
+                </a:extLst>
               </a:tr>
               <a:tr h="571500">
                 <a:tc>
@@ -3168,7 +3158,7 @@
                       </a:r>
                     </a:p>
                   </a:txBody>
-                  <a:tcPr marL="91440" marR="91440" marT="45720" marB="45720"/>
+                  <a:tcPr/>
                 </a:tc>
                 <a:tc>
                   <a:txBody>
@@ -3188,7 +3178,7 @@
                       </a:r>
                     </a:p>
                   </a:txBody>
-                  <a:tcPr marL="91440" marR="91440" marT="45720" marB="45720"/>
+                  <a:tcPr/>
                 </a:tc>
                 <a:tc>
                   <a:txBody>
@@ -3208,7 +3198,7 @@
                       </a:r>
                     </a:p>
                   </a:txBody>
-                  <a:tcPr marL="91440" marR="91440" marT="45720" marB="45720"/>
+                  <a:tcPr/>
                 </a:tc>
                 <a:tc>
                   <a:txBody>
@@ -3228,7 +3218,7 @@
                       </a:r>
                     </a:p>
                   </a:txBody>
-                  <a:tcPr marL="91440" marR="91440" marT="45720" marB="45720">
+                  <a:tcPr>
                     <a:solidFill>
                       <a:srgbClr val="FDECEC"/>
                     </a:solidFill>
@@ -3252,8 +3242,13 @@
                       </a:r>
                     </a:p>
                   </a:txBody>
-                  <a:tcPr marL="91440" marR="91440" marT="45720" marB="45720"/>
+                  <a:tcPr/>
                 </a:tc>
+                <a:extLst>
+                  <a:ext uri="{0D108BD9-81ED-4DB2-BD59-A6C34878D82A}">
+                    <a16:rowId xmlns:a16="http://schemas.microsoft.com/office/drawing/2014/main" val="10002"/>
+                  </a:ext>
+                </a:extLst>
               </a:tr>
               <a:tr h="571500">
                 <a:tc>
@@ -3274,7 +3269,7 @@
                       </a:r>
                     </a:p>
                   </a:txBody>
-                  <a:tcPr marL="91440" marR="91440" marT="45720" marB="45720"/>
+                  <a:tcPr/>
                 </a:tc>
                 <a:tc>
                   <a:txBody>
@@ -3294,7 +3289,7 @@
                       </a:r>
                     </a:p>
                   </a:txBody>
-                  <a:tcPr marL="91440" marR="91440" marT="45720" marB="45720"/>
+                  <a:tcPr/>
                 </a:tc>
                 <a:tc>
                   <a:txBody>
@@ -3314,7 +3309,7 @@
                       </a:r>
                     </a:p>
                   </a:txBody>
-                  <a:tcPr marL="91440" marR="91440" marT="45720" marB="45720"/>
+                  <a:tcPr/>
                 </a:tc>
                 <a:tc>
                   <a:txBody>
@@ -3334,7 +3329,7 @@
                       </a:r>
                     </a:p>
                   </a:txBody>
-                  <a:tcPr marL="91440" marR="91440" marT="45720" marB="45720">
+                  <a:tcPr>
                     <a:solidFill>
                       <a:srgbClr val="FDECEC"/>
                     </a:solidFill>
@@ -3358,8 +3353,13 @@
                       </a:r>
                     </a:p>
                   </a:txBody>
-                  <a:tcPr marL="91440" marR="91440" marT="45720" marB="45720"/>
+                  <a:tcPr/>
                 </a:tc>
+                <a:extLst>
+                  <a:ext uri="{0D108BD9-81ED-4DB2-BD59-A6C34878D82A}">
+                    <a16:rowId xmlns:a16="http://schemas.microsoft.com/office/drawing/2014/main" val="10003"/>
+                  </a:ext>
+                </a:extLst>
               </a:tr>
               <a:tr h="571500">
                 <a:tc>
@@ -3380,7 +3380,7 @@
                       </a:r>
                     </a:p>
                   </a:txBody>
-                  <a:tcPr marL="91440" marR="91440" marT="45720" marB="45720"/>
+                  <a:tcPr/>
                 </a:tc>
                 <a:tc>
                   <a:txBody>
@@ -3400,7 +3400,7 @@
                       </a:r>
                     </a:p>
                   </a:txBody>
-                  <a:tcPr marL="91440" marR="91440" marT="45720" marB="45720"/>
+                  <a:tcPr/>
                 </a:tc>
                 <a:tc>
                   <a:txBody>
@@ -3420,7 +3420,7 @@
                       </a:r>
                     </a:p>
                   </a:txBody>
-                  <a:tcPr marL="91440" marR="91440" marT="45720" marB="45720"/>
+                  <a:tcPr/>
                 </a:tc>
                 <a:tc>
                   <a:txBody>
@@ -3440,7 +3440,7 @@
                       </a:r>
                     </a:p>
                   </a:txBody>
-                  <a:tcPr marL="91440" marR="91440" marT="45720" marB="45720">
+                  <a:tcPr>
                     <a:solidFill>
                       <a:srgbClr val="FFF5E5"/>
                     </a:solidFill>
@@ -3464,8 +3464,13 @@
                       </a:r>
                     </a:p>
                   </a:txBody>
-                  <a:tcPr marL="91440" marR="91440" marT="45720" marB="45720"/>
+                  <a:tcPr/>
                 </a:tc>
+                <a:extLst>
+                  <a:ext uri="{0D108BD9-81ED-4DB2-BD59-A6C34878D82A}">
+                    <a16:rowId xmlns:a16="http://schemas.microsoft.com/office/drawing/2014/main" val="10004"/>
+                  </a:ext>
+                </a:extLst>
               </a:tr>
               <a:tr h="571500">
                 <a:tc>
@@ -3486,7 +3491,7 @@
                       </a:r>
                     </a:p>
                   </a:txBody>
-                  <a:tcPr marL="91440" marR="91440" marT="45720" marB="45720"/>
+                  <a:tcPr/>
                 </a:tc>
                 <a:tc>
                   <a:txBody>
@@ -3506,7 +3511,7 @@
                       </a:r>
                     </a:p>
                   </a:txBody>
-                  <a:tcPr marL="91440" marR="91440" marT="45720" marB="45720"/>
+                  <a:tcPr/>
                 </a:tc>
                 <a:tc>
                   <a:txBody>
@@ -3526,7 +3531,7 @@
                       </a:r>
                     </a:p>
                   </a:txBody>
-                  <a:tcPr marL="91440" marR="91440" marT="45720" marB="45720"/>
+                  <a:tcPr/>
                 </a:tc>
                 <a:tc>
                   <a:txBody>
@@ -3546,7 +3551,7 @@
                       </a:r>
                     </a:p>
                   </a:txBody>
-                  <a:tcPr marL="91440" marR="91440" marT="45720" marB="45720">
+                  <a:tcPr>
                     <a:solidFill>
                       <a:srgbClr val="FDECEC"/>
                     </a:solidFill>
@@ -3570,8 +3575,13 @@
                       </a:r>
                     </a:p>
                   </a:txBody>
-                  <a:tcPr marL="91440" marR="91440" marT="45720" marB="45720"/>
+                  <a:tcPr/>
                 </a:tc>
+                <a:extLst>
+                  <a:ext uri="{0D108BD9-81ED-4DB2-BD59-A6C34878D82A}">
+                    <a16:rowId xmlns:a16="http://schemas.microsoft.com/office/drawing/2014/main" val="10005"/>
+                  </a:ext>
+                </a:extLst>
               </a:tr>
             </a:tbl>
           </a:graphicData>
@@ -3579,37 +3589,37 @@
       </p:graphicFrame>
       <p:sp>
         <p:nvSpPr>
-          <p:cNvPr id="4" name="">
-            <a:extLst xmlns:a="http://schemas.openxmlformats.org/drawingml/2006/main">
+          <p:cNvPr id="4" name="Rechteck 3">
+            <a:extLst>
               <a:ext uri="{FF2B5EF4-FFF2-40B4-BE49-F238E27FC236}">
                 <a16:creationId xmlns:a16="http://schemas.microsoft.com/office/drawing/2014/main" id="{B3B86432-E855-4910-BA67-BB07F940A3DD}"/>
               </a:ext>
             </a:extLst>
           </p:cNvPr>
           <p:cNvSpPr>
-            <a:spLocks xmlns:a="http://schemas.openxmlformats.org/drawingml/2006/main" noGrp="1"/>
+            <a:spLocks noGrp="1"/>
           </p:cNvSpPr>
           <p:nvPr/>
         </p:nvSpPr>
         <p:spPr>
-          <a:xfrm xmlns:a="http://schemas.openxmlformats.org/drawingml/2006/main">
+          <a:xfrm>
             <a:off x="704850" y="5334000"/>
             <a:ext cx="6667500" cy="285750"/>
           </a:xfrm>
-          <a:prstGeom xmlns:a="http://schemas.openxmlformats.org/drawingml/2006/main" prst="rect">
+          <a:prstGeom prst="rect">
             <a:avLst/>
           </a:prstGeom>
-          <a:noFill xmlns:a="http://schemas.openxmlformats.org/drawingml/2006/main"/>
-          <a:ln xmlns:a="http://schemas.openxmlformats.org/drawingml/2006/main" w="0">
+          <a:noFill/>
+          <a:ln w="0">
             <a:noFill/>
           </a:ln>
         </p:spPr>
         <p:txBody>
-          <a:bodyPr xmlns:a="http://schemas.openxmlformats.org/drawingml/2006/main" anchor="ctr">
+          <a:bodyPr anchor="ctr">
             <a:noAutofit/>
           </a:bodyPr>
-          <a:lstStyle xmlns:a="http://schemas.openxmlformats.org/drawingml/2006/main"/>
-          <a:p xmlns:a="http://schemas.openxmlformats.org/drawingml/2006/main">
+          <a:lstStyle/>
+          <a:p>
             <a:pPr algn="l">
               <a:defRPr sz="1200" b="0">
                 <a:solidFill>
@@ -3636,37 +3646,37 @@
       </p:sp>
       <p:sp>
         <p:nvSpPr>
-          <p:cNvPr id="5" name="">
-            <a:extLst xmlns:a="http://schemas.openxmlformats.org/drawingml/2006/main">
+          <p:cNvPr id="5" name="Rechteck 4">
+            <a:extLst>
               <a:ext uri="{FF2B5EF4-FFF2-40B4-BE49-F238E27FC236}">
                 <a16:creationId xmlns:a16="http://schemas.microsoft.com/office/drawing/2014/main" id="{919ADE99-C22E-4622-ACBC-AD002AC5D242}"/>
               </a:ext>
             </a:extLst>
           </p:cNvPr>
           <p:cNvSpPr>
-            <a:spLocks xmlns:a="http://schemas.openxmlformats.org/drawingml/2006/main" noGrp="1"/>
+            <a:spLocks noGrp="1"/>
           </p:cNvSpPr>
           <p:nvPr/>
         </p:nvSpPr>
         <p:spPr>
-          <a:xfrm xmlns:a="http://schemas.openxmlformats.org/drawingml/2006/main">
+          <a:xfrm>
             <a:off x="704850" y="5810250"/>
             <a:ext cx="10668000" cy="323850"/>
           </a:xfrm>
-          <a:prstGeom xmlns:a="http://schemas.openxmlformats.org/drawingml/2006/main" prst="rect">
+          <a:prstGeom prst="rect">
             <a:avLst/>
           </a:prstGeom>
-          <a:noFill xmlns:a="http://schemas.openxmlformats.org/drawingml/2006/main"/>
-          <a:ln xmlns:a="http://schemas.openxmlformats.org/drawingml/2006/main" w="0">
+          <a:noFill/>
+          <a:ln w="0">
             <a:noFill/>
           </a:ln>
         </p:spPr>
         <p:txBody>
-          <a:bodyPr xmlns:a="http://schemas.openxmlformats.org/drawingml/2006/main" anchor="ctr">
+          <a:bodyPr anchor="ctr">
             <a:noAutofit/>
           </a:bodyPr>
-          <a:lstStyle xmlns:a="http://schemas.openxmlformats.org/drawingml/2006/main"/>
-          <a:p xmlns:a="http://schemas.openxmlformats.org/drawingml/2006/main">
+          <a:lstStyle/>
+          <a:p>
             <a:pPr algn="l">
               <a:defRPr sz="1350" b="1">
                 <a:solidFill>
@@ -3693,37 +3703,37 @@
       </p:sp>
       <p:sp>
         <p:nvSpPr>
-          <p:cNvPr id="6" name="">
-            <a:extLst xmlns:a="http://schemas.openxmlformats.org/drawingml/2006/main">
+          <p:cNvPr id="6" name="Rechteck 5">
+            <a:extLst>
               <a:ext uri="{FF2B5EF4-FFF2-40B4-BE49-F238E27FC236}">
                 <a16:creationId xmlns:a16="http://schemas.microsoft.com/office/drawing/2014/main" id="{5913166E-6DAE-4E9D-834D-92DC61B6581A}"/>
               </a:ext>
             </a:extLst>
           </p:cNvPr>
           <p:cNvSpPr>
-            <a:spLocks xmlns:a="http://schemas.openxmlformats.org/drawingml/2006/main" noGrp="1"/>
+            <a:spLocks noGrp="1"/>
           </p:cNvSpPr>
           <p:nvPr/>
         </p:nvSpPr>
         <p:spPr>
-          <a:xfrm xmlns:a="http://schemas.openxmlformats.org/drawingml/2006/main">
+          <a:xfrm>
             <a:off x="685800" y="6496050"/>
             <a:ext cx="10820400" cy="209550"/>
           </a:xfrm>
-          <a:prstGeom xmlns:a="http://schemas.openxmlformats.org/drawingml/2006/main" prst="rect">
+          <a:prstGeom prst="rect">
             <a:avLst/>
           </a:prstGeom>
-          <a:noFill xmlns:a="http://schemas.openxmlformats.org/drawingml/2006/main"/>
-          <a:ln xmlns:a="http://schemas.openxmlformats.org/drawingml/2006/main" w="0">
+          <a:noFill/>
+          <a:ln w="0">
             <a:noFill/>
           </a:ln>
         </p:spPr>
         <p:txBody>
-          <a:bodyPr xmlns:a="http://schemas.openxmlformats.org/drawingml/2006/main" anchor="ctr">
+          <a:bodyPr anchor="ctr">
             <a:noAutofit/>
           </a:bodyPr>
-          <a:lstStyle xmlns:a="http://schemas.openxmlformats.org/drawingml/2006/main"/>
-          <a:p xmlns:a="http://schemas.openxmlformats.org/drawingml/2006/main">
+          <a:lstStyle/>
+          <a:p>
             <a:pPr algn="r">
               <a:defRPr sz="900" b="0">
                 <a:solidFill>
@@ -3755,17 +3765,21 @@
       </p:ext>
     </p:extLst>
   </p:cSld>
+  <p:clrMapOvr>
+    <a:masterClrMapping/>
+  </p:clrMapOvr>
 </p:sld>
 </file>
 
 <file path=ppt/slides/slide4.xml><?xml version="1.0" encoding="utf-8"?>
-<p:sld xmlns:p="http://schemas.openxmlformats.org/presentationml/2006/main">
+<p:sld xmlns:a="http://schemas.openxmlformats.org/drawingml/2006/main" xmlns:r="http://schemas.openxmlformats.org/officeDocument/2006/relationships" xmlns:p="http://schemas.openxmlformats.org/presentationml/2006/main">
   <p:cSld>
     <p:bg>
       <p:bgPr>
-        <a:solidFill xmlns:a="http://schemas.openxmlformats.org/drawingml/2006/main">
+        <a:solidFill>
           <a:srgbClr val="FFFFFF"/>
         </a:solidFill>
+        <a:effectLst/>
       </p:bgPr>
     </p:bg>
     <p:spTree>
@@ -3775,41 +3789,46 @@
         <p:nvPr/>
       </p:nvGrpSpPr>
       <p:grpSpPr>
-        <a:xfrm xmlns:a="http://schemas.openxmlformats.org/drawingml/2006/main"/>
+        <a:xfrm>
+          <a:off x="0" y="0"/>
+          <a:ext cx="0" cy="0"/>
+          <a:chOff x="0" y="0"/>
+          <a:chExt cx="0" cy="0"/>
+        </a:xfrm>
       </p:grpSpPr>
       <p:sp>
         <p:nvSpPr>
-          <p:cNvPr id="13" name="">
-            <a:extLst xmlns:a="http://schemas.openxmlformats.org/drawingml/2006/main">
+          <p:cNvPr id="13" name="Rechteck 12">
+            <a:extLst>
               <a:ext uri="{FF2B5EF4-FFF2-40B4-BE49-F238E27FC236}">
                 <a16:creationId xmlns:a16="http://schemas.microsoft.com/office/drawing/2014/main" id="{4F4A3994-0083-4314-8E6B-D729BEC81F6E}"/>
               </a:ext>
             </a:extLst>
           </p:cNvPr>
           <p:cNvSpPr>
-            <a:spLocks xmlns:a="http://schemas.openxmlformats.org/drawingml/2006/main" noGrp="1"/>
+            <a:spLocks noGrp="1"/>
           </p:cNvSpPr>
           <p:nvPr/>
         </p:nvSpPr>
         <p:spPr>
-          <a:xfrm xmlns:a="http://schemas.openxmlformats.org/drawingml/2006/main">
+          <a:xfrm>
             <a:off x="666750" y="400050"/>
             <a:ext cx="10858500" cy="552450"/>
           </a:xfrm>
-          <a:prstGeom xmlns:a="http://schemas.openxmlformats.org/drawingml/2006/main" prst="rect">
+          <a:prstGeom prst="rect">
             <a:avLst/>
           </a:prstGeom>
-          <a:noFill xmlns:a="http://schemas.openxmlformats.org/drawingml/2006/main"/>
-          <a:ln xmlns:a="http://schemas.openxmlformats.org/drawingml/2006/main" w="0">
+          <a:noFill/>
+          <a:ln w="0">
             <a:noFill/>
           </a:ln>
         </p:spPr>
         <p:txBody>
-          <a:bodyPr xmlns:a="http://schemas.openxmlformats.org/drawingml/2006/main" anchor="ctr">
+          <a:bodyPr anchor="ctr">
             <a:noAutofit/>
           </a:bodyPr>
-          <a:lstStyle xmlns:a="http://schemas.openxmlformats.org/drawingml/2006/main"/>
-          <a:p xmlns:a="http://schemas.openxmlformats.org/drawingml/2006/main">
+          <a:lstStyle/>
+          <a:p>
             <a:pPr algn="l">
               <a:defRPr sz="2700" b="1">
                 <a:solidFill>
@@ -3836,37 +3855,37 @@
       </p:sp>
       <p:sp>
         <p:nvSpPr>
-          <p:cNvPr id="2" name="">
-            <a:extLst xmlns:a="http://schemas.openxmlformats.org/drawingml/2006/main">
+          <p:cNvPr id="2" name="Rechteck 1">
+            <a:extLst>
               <a:ext uri="{FF2B5EF4-FFF2-40B4-BE49-F238E27FC236}">
                 <a16:creationId xmlns:a16="http://schemas.microsoft.com/office/drawing/2014/main" id="{B41899CD-8853-4BB7-A79D-F384E36340F4}"/>
               </a:ext>
             </a:extLst>
           </p:cNvPr>
           <p:cNvSpPr>
-            <a:spLocks xmlns:a="http://schemas.openxmlformats.org/drawingml/2006/main" noGrp="1"/>
+            <a:spLocks noGrp="1"/>
           </p:cNvSpPr>
           <p:nvPr/>
         </p:nvSpPr>
         <p:spPr>
-          <a:xfrm xmlns:a="http://schemas.openxmlformats.org/drawingml/2006/main">
+          <a:xfrm>
             <a:off x="685800" y="962025"/>
             <a:ext cx="10668000" cy="323850"/>
           </a:xfrm>
-          <a:prstGeom xmlns:a="http://schemas.openxmlformats.org/drawingml/2006/main" prst="rect">
+          <a:prstGeom prst="rect">
             <a:avLst/>
           </a:prstGeom>
-          <a:noFill xmlns:a="http://schemas.openxmlformats.org/drawingml/2006/main"/>
-          <a:ln xmlns:a="http://schemas.openxmlformats.org/drawingml/2006/main" w="0">
+          <a:noFill/>
+          <a:ln w="0">
             <a:noFill/>
           </a:ln>
         </p:spPr>
         <p:txBody>
-          <a:bodyPr xmlns:a="http://schemas.openxmlformats.org/drawingml/2006/main" anchor="ctr">
+          <a:bodyPr anchor="ctr">
             <a:noAutofit/>
           </a:bodyPr>
-          <a:lstStyle xmlns:a="http://schemas.openxmlformats.org/drawingml/2006/main"/>
-          <a:p xmlns:a="http://schemas.openxmlformats.org/drawingml/2006/main">
+          <a:lstStyle/>
+          <a:p>
             <a:pPr algn="l">
               <a:defRPr sz="1350" b="0">
                 <a:solidFill>
@@ -3893,37 +3912,37 @@
       </p:sp>
       <p:sp>
         <p:nvSpPr>
-          <p:cNvPr id="3" name="">
-            <a:extLst xmlns:a="http://schemas.openxmlformats.org/drawingml/2006/main">
+          <p:cNvPr id="3" name="Rechteck 2">
+            <a:extLst>
               <a:ext uri="{FF2B5EF4-FFF2-40B4-BE49-F238E27FC236}">
                 <a16:creationId xmlns:a16="http://schemas.microsoft.com/office/drawing/2014/main" id="{80F4DB3F-8EA7-476E-B491-42A28D05CFC5}"/>
               </a:ext>
             </a:extLst>
           </p:cNvPr>
           <p:cNvSpPr>
-            <a:spLocks xmlns:a="http://schemas.openxmlformats.org/drawingml/2006/main" noGrp="1"/>
+            <a:spLocks noGrp="1"/>
           </p:cNvSpPr>
           <p:nvPr/>
         </p:nvSpPr>
         <p:spPr>
-          <a:xfrm xmlns:a="http://schemas.openxmlformats.org/drawingml/2006/main">
+          <a:xfrm>
             <a:off x="857250" y="1809750"/>
             <a:ext cx="2095500" cy="809625"/>
           </a:xfrm>
-          <a:prstGeom xmlns:a="http://schemas.openxmlformats.org/drawingml/2006/main" prst="rect">
+          <a:prstGeom prst="rect">
             <a:avLst/>
           </a:prstGeom>
-          <a:noFill xmlns:a="http://schemas.openxmlformats.org/drawingml/2006/main"/>
-          <a:ln xmlns:a="http://schemas.openxmlformats.org/drawingml/2006/main" w="0">
+          <a:noFill/>
+          <a:ln w="0">
             <a:noFill/>
           </a:ln>
         </p:spPr>
         <p:txBody>
-          <a:bodyPr xmlns:a="http://schemas.openxmlformats.org/drawingml/2006/main" anchor="ctr">
+          <a:bodyPr anchor="ctr">
             <a:noAutofit/>
           </a:bodyPr>
-          <a:lstStyle xmlns:a="http://schemas.openxmlformats.org/drawingml/2006/main"/>
-          <a:p xmlns:a="http://schemas.openxmlformats.org/drawingml/2006/main">
+          <a:lstStyle/>
+          <a:p>
             <a:pPr algn="ctr">
               <a:defRPr sz="4650" b="1">
                 <a:solidFill>
@@ -3950,37 +3969,37 @@
       </p:sp>
       <p:sp>
         <p:nvSpPr>
-          <p:cNvPr id="4" name="">
-            <a:extLst xmlns:a="http://schemas.openxmlformats.org/drawingml/2006/main">
+          <p:cNvPr id="4" name="Rechteck 3">
+            <a:extLst>
               <a:ext uri="{FF2B5EF4-FFF2-40B4-BE49-F238E27FC236}">
                 <a16:creationId xmlns:a16="http://schemas.microsoft.com/office/drawing/2014/main" id="{1631B9D7-E0EE-4FC3-B239-847BDF176AE1}"/>
               </a:ext>
             </a:extLst>
           </p:cNvPr>
           <p:cNvSpPr>
-            <a:spLocks xmlns:a="http://schemas.openxmlformats.org/drawingml/2006/main" noGrp="1"/>
+            <a:spLocks noGrp="1"/>
           </p:cNvSpPr>
           <p:nvPr/>
         </p:nvSpPr>
         <p:spPr>
-          <a:xfrm xmlns:a="http://schemas.openxmlformats.org/drawingml/2006/main">
+          <a:xfrm>
             <a:off x="857250" y="2619375"/>
             <a:ext cx="2095500" cy="381000"/>
           </a:xfrm>
-          <a:prstGeom xmlns:a="http://schemas.openxmlformats.org/drawingml/2006/main" prst="rect">
+          <a:prstGeom prst="rect">
             <a:avLst/>
           </a:prstGeom>
-          <a:noFill xmlns:a="http://schemas.openxmlformats.org/drawingml/2006/main"/>
-          <a:ln xmlns:a="http://schemas.openxmlformats.org/drawingml/2006/main" w="0">
+          <a:noFill/>
+          <a:ln w="0">
             <a:noFill/>
           </a:ln>
         </p:spPr>
         <p:txBody>
-          <a:bodyPr xmlns:a="http://schemas.openxmlformats.org/drawingml/2006/main" anchor="ctr">
+          <a:bodyPr anchor="ctr">
             <a:noAutofit/>
           </a:bodyPr>
-          <a:lstStyle xmlns:a="http://schemas.openxmlformats.org/drawingml/2006/main"/>
-          <a:p xmlns:a="http://schemas.openxmlformats.org/drawingml/2006/main">
+          <a:lstStyle/>
+          <a:p>
             <a:pPr algn="ctr">
               <a:defRPr sz="1650" b="1">
                 <a:solidFill>
@@ -4007,37 +4026,37 @@
       </p:sp>
       <p:sp>
         <p:nvSpPr>
-          <p:cNvPr id="5" name="">
-            <a:extLst xmlns:a="http://schemas.openxmlformats.org/drawingml/2006/main">
+          <p:cNvPr id="5" name="Rechteck 4">
+            <a:extLst>
               <a:ext uri="{FF2B5EF4-FFF2-40B4-BE49-F238E27FC236}">
                 <a16:creationId xmlns:a16="http://schemas.microsoft.com/office/drawing/2014/main" id="{B534545E-F013-4E0C-BA22-570B0E0A6D46}"/>
               </a:ext>
             </a:extLst>
           </p:cNvPr>
           <p:cNvSpPr>
-            <a:spLocks xmlns:a="http://schemas.openxmlformats.org/drawingml/2006/main" noGrp="1"/>
+            <a:spLocks noGrp="1"/>
           </p:cNvSpPr>
           <p:nvPr/>
         </p:nvSpPr>
         <p:spPr>
-          <a:xfrm xmlns:a="http://schemas.openxmlformats.org/drawingml/2006/main">
+          <a:xfrm>
             <a:off x="3238500" y="1809750"/>
             <a:ext cx="2095500" cy="809625"/>
           </a:xfrm>
-          <a:prstGeom xmlns:a="http://schemas.openxmlformats.org/drawingml/2006/main" prst="rect">
+          <a:prstGeom prst="rect">
             <a:avLst/>
           </a:prstGeom>
-          <a:noFill xmlns:a="http://schemas.openxmlformats.org/drawingml/2006/main"/>
-          <a:ln xmlns:a="http://schemas.openxmlformats.org/drawingml/2006/main" w="0">
+          <a:noFill/>
+          <a:ln w="0">
             <a:noFill/>
           </a:ln>
         </p:spPr>
         <p:txBody>
-          <a:bodyPr xmlns:a="http://schemas.openxmlformats.org/drawingml/2006/main" anchor="ctr">
+          <a:bodyPr anchor="ctr">
             <a:noAutofit/>
           </a:bodyPr>
-          <a:lstStyle xmlns:a="http://schemas.openxmlformats.org/drawingml/2006/main"/>
-          <a:p xmlns:a="http://schemas.openxmlformats.org/drawingml/2006/main">
+          <a:lstStyle/>
+          <a:p>
             <a:pPr algn="ctr">
               <a:defRPr sz="4650" b="1">
                 <a:solidFill>
@@ -4064,37 +4083,37 @@
       </p:sp>
       <p:sp>
         <p:nvSpPr>
-          <p:cNvPr id="6" name="">
-            <a:extLst xmlns:a="http://schemas.openxmlformats.org/drawingml/2006/main">
+          <p:cNvPr id="6" name="Rechteck 5">
+            <a:extLst>
               <a:ext uri="{FF2B5EF4-FFF2-40B4-BE49-F238E27FC236}">
                 <a16:creationId xmlns:a16="http://schemas.microsoft.com/office/drawing/2014/main" id="{F10D61C7-1A09-46A6-8021-1DD114E1E9AA}"/>
               </a:ext>
             </a:extLst>
           </p:cNvPr>
           <p:cNvSpPr>
-            <a:spLocks xmlns:a="http://schemas.openxmlformats.org/drawingml/2006/main" noGrp="1"/>
+            <a:spLocks noGrp="1"/>
           </p:cNvSpPr>
           <p:nvPr/>
         </p:nvSpPr>
         <p:spPr>
-          <a:xfrm xmlns:a="http://schemas.openxmlformats.org/drawingml/2006/main">
+          <a:xfrm>
             <a:off x="3238500" y="2619375"/>
             <a:ext cx="2095500" cy="571500"/>
           </a:xfrm>
-          <a:prstGeom xmlns:a="http://schemas.openxmlformats.org/drawingml/2006/main" prst="rect">
+          <a:prstGeom prst="rect">
             <a:avLst/>
           </a:prstGeom>
-          <a:noFill xmlns:a="http://schemas.openxmlformats.org/drawingml/2006/main"/>
-          <a:ln xmlns:a="http://schemas.openxmlformats.org/drawingml/2006/main" w="0">
+          <a:noFill/>
+          <a:ln w="0">
             <a:noFill/>
           </a:ln>
         </p:spPr>
         <p:txBody>
-          <a:bodyPr xmlns:a="http://schemas.openxmlformats.org/drawingml/2006/main" anchor="ctr">
+          <a:bodyPr anchor="ctr">
             <a:noAutofit/>
           </a:bodyPr>
-          <a:lstStyle xmlns:a="http://schemas.openxmlformats.org/drawingml/2006/main"/>
-          <a:p xmlns:a="http://schemas.openxmlformats.org/drawingml/2006/main">
+          <a:lstStyle/>
+          <a:p>
             <a:pPr algn="ctr">
               <a:defRPr sz="1650" b="1">
                 <a:solidFill>
@@ -4121,37 +4140,37 @@
       </p:sp>
       <p:sp>
         <p:nvSpPr>
-          <p:cNvPr id="7" name="">
-            <a:extLst xmlns:a="http://schemas.openxmlformats.org/drawingml/2006/main">
+          <p:cNvPr id="7" name="Rechteck 6">
+            <a:extLst>
               <a:ext uri="{FF2B5EF4-FFF2-40B4-BE49-F238E27FC236}">
                 <a16:creationId xmlns:a16="http://schemas.microsoft.com/office/drawing/2014/main" id="{04ABE6C4-984A-4752-AF22-352901475200}"/>
               </a:ext>
             </a:extLst>
           </p:cNvPr>
           <p:cNvSpPr>
-            <a:spLocks xmlns:a="http://schemas.openxmlformats.org/drawingml/2006/main" noGrp="1"/>
+            <a:spLocks noGrp="1"/>
           </p:cNvSpPr>
           <p:nvPr/>
         </p:nvSpPr>
         <p:spPr>
-          <a:xfrm xmlns:a="http://schemas.openxmlformats.org/drawingml/2006/main">
+          <a:xfrm>
             <a:off x="5619750" y="1809750"/>
             <a:ext cx="2095500" cy="809625"/>
           </a:xfrm>
-          <a:prstGeom xmlns:a="http://schemas.openxmlformats.org/drawingml/2006/main" prst="rect">
+          <a:prstGeom prst="rect">
             <a:avLst/>
           </a:prstGeom>
-          <a:noFill xmlns:a="http://schemas.openxmlformats.org/drawingml/2006/main"/>
-          <a:ln xmlns:a="http://schemas.openxmlformats.org/drawingml/2006/main" w="0">
+          <a:noFill/>
+          <a:ln w="0">
             <a:noFill/>
           </a:ln>
         </p:spPr>
         <p:txBody>
-          <a:bodyPr xmlns:a="http://schemas.openxmlformats.org/drawingml/2006/main" anchor="ctr">
+          <a:bodyPr anchor="ctr">
             <a:noAutofit/>
           </a:bodyPr>
-          <a:lstStyle xmlns:a="http://schemas.openxmlformats.org/drawingml/2006/main"/>
-          <a:p xmlns:a="http://schemas.openxmlformats.org/drawingml/2006/main">
+          <a:lstStyle/>
+          <a:p>
             <a:pPr algn="ctr">
               <a:defRPr sz="4650" b="1">
                 <a:solidFill>
@@ -4163,7 +4182,7 @@
               </a:defRPr>
             </a:pPr>
             <a:r>
-              <a:rPr sz="4650" b="1">
+              <a:rPr sz="4650" b="1" dirty="0">
                 <a:solidFill>
                   <a:srgbClr val="D97706"/>
                 </a:solidFill>
@@ -4171,44 +4190,63 @@
                 <a:ea typeface="Bitstream Charter"/>
                 <a:cs typeface="Bitstream Charter"/>
               </a:rPr>
-              <a:t>10</a:t>
-            </a:r>
-          </a:p>
-        </p:txBody>
-      </p:sp>
-      <p:sp>
-        <p:nvSpPr>
-          <p:cNvPr id="8" name="">
-            <a:extLst xmlns:a="http://schemas.openxmlformats.org/drawingml/2006/main">
+              <a:t>1</a:t>
+            </a:r>
+            <a:r>
+              <a:rPr lang="de-CH" sz="4650" b="1" dirty="0">
+                <a:solidFill>
+                  <a:srgbClr val="D97706"/>
+                </a:solidFill>
+                <a:latin typeface="Bitstream Charter"/>
+                <a:ea typeface="Bitstream Charter"/>
+                <a:cs typeface="Bitstream Charter"/>
+              </a:rPr>
+              <a:t>3</a:t>
+            </a:r>
+            <a:endParaRPr sz="4650" b="1" dirty="0">
+              <a:solidFill>
+                <a:srgbClr val="D97706"/>
+              </a:solidFill>
+              <a:latin typeface="Bitstream Charter"/>
+              <a:ea typeface="Bitstream Charter"/>
+              <a:cs typeface="Bitstream Charter"/>
+            </a:endParaRPr>
+          </a:p>
+        </p:txBody>
+      </p:sp>
+      <p:sp>
+        <p:nvSpPr>
+          <p:cNvPr id="8" name="Rechteck 7">
+            <a:extLst>
               <a:ext uri="{FF2B5EF4-FFF2-40B4-BE49-F238E27FC236}">
                 <a16:creationId xmlns:a16="http://schemas.microsoft.com/office/drawing/2014/main" id="{F5759731-74FF-4742-826C-1FD1147F2F8C}"/>
               </a:ext>
             </a:extLst>
           </p:cNvPr>
           <p:cNvSpPr>
-            <a:spLocks xmlns:a="http://schemas.openxmlformats.org/drawingml/2006/main" noGrp="1"/>
+            <a:spLocks noGrp="1"/>
           </p:cNvSpPr>
           <p:nvPr/>
         </p:nvSpPr>
         <p:spPr>
-          <a:xfrm xmlns:a="http://schemas.openxmlformats.org/drawingml/2006/main">
+          <a:xfrm>
             <a:off x="5619750" y="2619375"/>
             <a:ext cx="2095500" cy="381000"/>
           </a:xfrm>
-          <a:prstGeom xmlns:a="http://schemas.openxmlformats.org/drawingml/2006/main" prst="rect">
+          <a:prstGeom prst="rect">
             <a:avLst/>
           </a:prstGeom>
-          <a:noFill xmlns:a="http://schemas.openxmlformats.org/drawingml/2006/main"/>
-          <a:ln xmlns:a="http://schemas.openxmlformats.org/drawingml/2006/main" w="0">
+          <a:noFill/>
+          <a:ln w="0">
             <a:noFill/>
           </a:ln>
         </p:spPr>
         <p:txBody>
-          <a:bodyPr xmlns:a="http://schemas.openxmlformats.org/drawingml/2006/main" anchor="ctr">
+          <a:bodyPr anchor="ctr">
             <a:noAutofit/>
           </a:bodyPr>
-          <a:lstStyle xmlns:a="http://schemas.openxmlformats.org/drawingml/2006/main"/>
-          <a:p xmlns:a="http://schemas.openxmlformats.org/drawingml/2006/main">
+          <a:lstStyle/>
+          <a:p>
             <a:pPr algn="ctr">
               <a:defRPr sz="1650" b="1">
                 <a:solidFill>
@@ -4240,48 +4278,48 @@
           <p:nvPr/>
         </p:nvGraphicFramePr>
         <p:xfrm>
-          <a:off xmlns:a="http://schemas.openxmlformats.org/drawingml/2006/main" x="8096250" y="1571625"/>
-          <a:ext xmlns:a="http://schemas.openxmlformats.org/drawingml/2006/main" cx="3333750" cy="3238500"/>
+          <a:off x="8096250" y="1571625"/>
+          <a:ext cx="3333750" cy="3238500"/>
         </p:xfrm>
-        <a:graphic xmlns:a="http://schemas.openxmlformats.org/drawingml/2006/main">
+        <a:graphic>
           <a:graphicData uri="http://schemas.openxmlformats.org/drawingml/2006/chart">
-            <c:chart xmlns:r="http://schemas.openxmlformats.org/officeDocument/2006/relationships" xmlns:c="http://schemas.openxmlformats.org/drawingml/2006/chart" r:id="Rcd0c4612021745d2"/>
+            <c:chart xmlns:c="http://schemas.openxmlformats.org/drawingml/2006/chart" xmlns:r="http://schemas.openxmlformats.org/officeDocument/2006/relationships" r:id="rId3"/>
           </a:graphicData>
         </a:graphic>
       </p:graphicFrame>
       <p:sp>
         <p:nvSpPr>
-          <p:cNvPr id="10" name="">
-            <a:extLst xmlns:a="http://schemas.openxmlformats.org/drawingml/2006/main">
+          <p:cNvPr id="10" name="Rechteck 9">
+            <a:extLst>
               <a:ext uri="{FF2B5EF4-FFF2-40B4-BE49-F238E27FC236}">
                 <a16:creationId xmlns:a16="http://schemas.microsoft.com/office/drawing/2014/main" id="{BC383323-7A91-4195-B807-9798DD61F249}"/>
               </a:ext>
             </a:extLst>
           </p:cNvPr>
           <p:cNvSpPr>
-            <a:spLocks xmlns:a="http://schemas.openxmlformats.org/drawingml/2006/main" noGrp="1"/>
+            <a:spLocks noGrp="1"/>
           </p:cNvSpPr>
           <p:nvPr/>
         </p:nvSpPr>
         <p:spPr>
-          <a:xfrm xmlns:a="http://schemas.openxmlformats.org/drawingml/2006/main">
+          <a:xfrm>
             <a:off x="8334375" y="4810125"/>
             <a:ext cx="2857500" cy="523875"/>
           </a:xfrm>
-          <a:prstGeom xmlns:a="http://schemas.openxmlformats.org/drawingml/2006/main" prst="rect">
+          <a:prstGeom prst="rect">
             <a:avLst/>
           </a:prstGeom>
-          <a:noFill xmlns:a="http://schemas.openxmlformats.org/drawingml/2006/main"/>
-          <a:ln xmlns:a="http://schemas.openxmlformats.org/drawingml/2006/main" w="0">
+          <a:noFill/>
+          <a:ln w="0">
             <a:noFill/>
           </a:ln>
         </p:spPr>
         <p:txBody>
-          <a:bodyPr xmlns:a="http://schemas.openxmlformats.org/drawingml/2006/main" anchor="ctr">
+          <a:bodyPr anchor="ctr">
             <a:noAutofit/>
           </a:bodyPr>
-          <a:lstStyle xmlns:a="http://schemas.openxmlformats.org/drawingml/2006/main"/>
-          <a:p xmlns:a="http://schemas.openxmlformats.org/drawingml/2006/main">
+          <a:lstStyle/>
+          <a:p>
             <a:pPr algn="ctr">
               <a:defRPr sz="1350" b="1">
                 <a:solidFill>
@@ -4308,37 +4346,37 @@
       </p:sp>
       <p:sp>
         <p:nvSpPr>
-          <p:cNvPr id="11" name="">
-            <a:extLst xmlns:a="http://schemas.openxmlformats.org/drawingml/2006/main">
+          <p:cNvPr id="11" name="Rechteck 10">
+            <a:extLst>
               <a:ext uri="{FF2B5EF4-FFF2-40B4-BE49-F238E27FC236}">
                 <a16:creationId xmlns:a16="http://schemas.microsoft.com/office/drawing/2014/main" id="{666CD2F4-3403-4BCD-A743-D116421ABD60}"/>
               </a:ext>
             </a:extLst>
           </p:cNvPr>
           <p:cNvSpPr>
-            <a:spLocks xmlns:a="http://schemas.openxmlformats.org/drawingml/2006/main" noGrp="1"/>
+            <a:spLocks noGrp="1"/>
           </p:cNvSpPr>
           <p:nvPr/>
         </p:nvSpPr>
         <p:spPr>
-          <a:xfrm xmlns:a="http://schemas.openxmlformats.org/drawingml/2006/main">
+          <a:xfrm>
             <a:off x="952500" y="4762500"/>
             <a:ext cx="6477000" cy="857250"/>
           </a:xfrm>
-          <a:prstGeom xmlns:a="http://schemas.openxmlformats.org/drawingml/2006/main" prst="rect">
+          <a:prstGeom prst="rect">
             <a:avLst/>
           </a:prstGeom>
-          <a:noFill xmlns:a="http://schemas.openxmlformats.org/drawingml/2006/main"/>
-          <a:ln xmlns:a="http://schemas.openxmlformats.org/drawingml/2006/main" w="0">
+          <a:noFill/>
+          <a:ln w="0">
             <a:noFill/>
           </a:ln>
         </p:spPr>
         <p:txBody>
-          <a:bodyPr xmlns:a="http://schemas.openxmlformats.org/drawingml/2006/main" anchor="ctr">
+          <a:bodyPr anchor="ctr">
             <a:noAutofit/>
           </a:bodyPr>
-          <a:lstStyle xmlns:a="http://schemas.openxmlformats.org/drawingml/2006/main"/>
-          <a:p xmlns:a="http://schemas.openxmlformats.org/drawingml/2006/main">
+          <a:lstStyle/>
+          <a:p>
             <a:pPr algn="l">
               <a:defRPr sz="1725" b="0">
                 <a:solidFill>
@@ -4365,37 +4403,37 @@
       </p:sp>
       <p:sp>
         <p:nvSpPr>
-          <p:cNvPr id="12" name="">
-            <a:extLst xmlns:a="http://schemas.openxmlformats.org/drawingml/2006/main">
+          <p:cNvPr id="12" name="Rechteck 11">
+            <a:extLst>
               <a:ext uri="{FF2B5EF4-FFF2-40B4-BE49-F238E27FC236}">
                 <a16:creationId xmlns:a16="http://schemas.microsoft.com/office/drawing/2014/main" id="{E51952CE-6DED-4599-8544-46A86720BA38}"/>
               </a:ext>
             </a:extLst>
           </p:cNvPr>
           <p:cNvSpPr>
-            <a:spLocks xmlns:a="http://schemas.openxmlformats.org/drawingml/2006/main" noGrp="1"/>
+            <a:spLocks noGrp="1"/>
           </p:cNvSpPr>
           <p:nvPr/>
         </p:nvSpPr>
         <p:spPr>
-          <a:xfrm xmlns:a="http://schemas.openxmlformats.org/drawingml/2006/main">
+          <a:xfrm>
             <a:off x="685800" y="6496050"/>
             <a:ext cx="10820400" cy="209550"/>
           </a:xfrm>
-          <a:prstGeom xmlns:a="http://schemas.openxmlformats.org/drawingml/2006/main" prst="rect">
+          <a:prstGeom prst="rect">
             <a:avLst/>
           </a:prstGeom>
-          <a:noFill xmlns:a="http://schemas.openxmlformats.org/drawingml/2006/main"/>
-          <a:ln xmlns:a="http://schemas.openxmlformats.org/drawingml/2006/main" w="0">
+          <a:noFill/>
+          <a:ln w="0">
             <a:noFill/>
           </a:ln>
         </p:spPr>
         <p:txBody>
-          <a:bodyPr xmlns:a="http://schemas.openxmlformats.org/drawingml/2006/main" anchor="ctr">
+          <a:bodyPr anchor="ctr">
             <a:noAutofit/>
           </a:bodyPr>
-          <a:lstStyle xmlns:a="http://schemas.openxmlformats.org/drawingml/2006/main"/>
-          <a:p xmlns:a="http://schemas.openxmlformats.org/drawingml/2006/main">
+          <a:lstStyle/>
+          <a:p>
             <a:pPr algn="r">
               <a:defRPr sz="900" b="0">
                 <a:solidFill>
@@ -4427,17 +4465,21 @@
       </p:ext>
     </p:extLst>
   </p:cSld>
+  <p:clrMapOvr>
+    <a:masterClrMapping/>
+  </p:clrMapOvr>
 </p:sld>
 </file>
 
 <file path=ppt/slides/slide5.xml><?xml version="1.0" encoding="utf-8"?>
-<p:sld xmlns:p="http://schemas.openxmlformats.org/presentationml/2006/main">
+<p:sld xmlns:a="http://schemas.openxmlformats.org/drawingml/2006/main" xmlns:r="http://schemas.openxmlformats.org/officeDocument/2006/relationships" xmlns:p="http://schemas.openxmlformats.org/presentationml/2006/main">
   <p:cSld>
     <p:bg>
       <p:bgPr>
-        <a:solidFill xmlns:a="http://schemas.openxmlformats.org/drawingml/2006/main">
+        <a:solidFill>
           <a:srgbClr val="FFFFFF"/>
         </a:solidFill>
+        <a:effectLst/>
       </p:bgPr>
     </p:bg>
     <p:spTree>
@@ -4447,41 +4489,46 @@
         <p:nvPr/>
       </p:nvGrpSpPr>
       <p:grpSpPr>
-        <a:xfrm xmlns:a="http://schemas.openxmlformats.org/drawingml/2006/main"/>
+        <a:xfrm>
+          <a:off x="0" y="0"/>
+          <a:ext cx="0" cy="0"/>
+          <a:chOff x="0" y="0"/>
+          <a:chExt cx="0" cy="0"/>
+        </a:xfrm>
       </p:grpSpPr>
       <p:sp>
         <p:nvSpPr>
-          <p:cNvPr id="10" name="">
-            <a:extLst xmlns:a="http://schemas.openxmlformats.org/drawingml/2006/main">
+          <p:cNvPr id="10" name="Rechteck 9">
+            <a:extLst>
               <a:ext uri="{FF2B5EF4-FFF2-40B4-BE49-F238E27FC236}">
                 <a16:creationId xmlns:a16="http://schemas.microsoft.com/office/drawing/2014/main" id="{782AD8BD-8E44-4F57-9A72-74B9F2B7F724}"/>
               </a:ext>
             </a:extLst>
           </p:cNvPr>
           <p:cNvSpPr>
-            <a:spLocks xmlns:a="http://schemas.openxmlformats.org/drawingml/2006/main" noGrp="1"/>
+            <a:spLocks noGrp="1"/>
           </p:cNvSpPr>
           <p:nvPr/>
         </p:nvSpPr>
         <p:spPr>
-          <a:xfrm xmlns:a="http://schemas.openxmlformats.org/drawingml/2006/main">
+          <a:xfrm>
             <a:off x="666750" y="400050"/>
             <a:ext cx="10858500" cy="552450"/>
           </a:xfrm>
-          <a:prstGeom xmlns:a="http://schemas.openxmlformats.org/drawingml/2006/main" prst="rect">
+          <a:prstGeom prst="rect">
             <a:avLst/>
           </a:prstGeom>
-          <a:noFill xmlns:a="http://schemas.openxmlformats.org/drawingml/2006/main"/>
-          <a:ln xmlns:a="http://schemas.openxmlformats.org/drawingml/2006/main" w="0">
+          <a:noFill/>
+          <a:ln w="0">
             <a:noFill/>
           </a:ln>
         </p:spPr>
         <p:txBody>
-          <a:bodyPr xmlns:a="http://schemas.openxmlformats.org/drawingml/2006/main" anchor="ctr">
+          <a:bodyPr anchor="ctr">
             <a:noAutofit/>
           </a:bodyPr>
-          <a:lstStyle xmlns:a="http://schemas.openxmlformats.org/drawingml/2006/main"/>
-          <a:p xmlns:a="http://schemas.openxmlformats.org/drawingml/2006/main">
+          <a:lstStyle/>
+          <a:p>
             <a:pPr algn="l">
               <a:defRPr sz="2700" b="1">
                 <a:solidFill>
@@ -4508,37 +4555,37 @@
       </p:sp>
       <p:sp>
         <p:nvSpPr>
-          <p:cNvPr id="2" name="">
-            <a:extLst xmlns:a="http://schemas.openxmlformats.org/drawingml/2006/main">
+          <p:cNvPr id="2" name="Rechteck 1">
+            <a:extLst>
               <a:ext uri="{FF2B5EF4-FFF2-40B4-BE49-F238E27FC236}">
                 <a16:creationId xmlns:a16="http://schemas.microsoft.com/office/drawing/2014/main" id="{4D1EB21F-D49F-4F00-91F4-E5507C6AB890}"/>
               </a:ext>
             </a:extLst>
           </p:cNvPr>
           <p:cNvSpPr>
-            <a:spLocks xmlns:a="http://schemas.openxmlformats.org/drawingml/2006/main" noGrp="1"/>
+            <a:spLocks noGrp="1"/>
           </p:cNvSpPr>
           <p:nvPr/>
         </p:nvSpPr>
         <p:spPr>
-          <a:xfrm xmlns:a="http://schemas.openxmlformats.org/drawingml/2006/main">
+          <a:xfrm>
             <a:off x="685800" y="962025"/>
             <a:ext cx="10668000" cy="323850"/>
           </a:xfrm>
-          <a:prstGeom xmlns:a="http://schemas.openxmlformats.org/drawingml/2006/main" prst="rect">
+          <a:prstGeom prst="rect">
             <a:avLst/>
           </a:prstGeom>
-          <a:noFill xmlns:a="http://schemas.openxmlformats.org/drawingml/2006/main"/>
-          <a:ln xmlns:a="http://schemas.openxmlformats.org/drawingml/2006/main" w="0">
+          <a:noFill/>
+          <a:ln w="0">
             <a:noFill/>
           </a:ln>
         </p:spPr>
         <p:txBody>
-          <a:bodyPr xmlns:a="http://schemas.openxmlformats.org/drawingml/2006/main" anchor="ctr">
+          <a:bodyPr anchor="ctr">
             <a:noAutofit/>
           </a:bodyPr>
-          <a:lstStyle xmlns:a="http://schemas.openxmlformats.org/drawingml/2006/main"/>
-          <a:p xmlns:a="http://schemas.openxmlformats.org/drawingml/2006/main">
+          <a:lstStyle/>
+          <a:p>
             <a:pPr algn="l">
               <a:defRPr sz="1350" b="0">
                 <a:solidFill>
@@ -4550,7 +4597,7 @@
               </a:defRPr>
             </a:pPr>
             <a:r>
-              <a:rPr sz="1350" b="0">
+              <a:rPr lang="de-CH" sz="1350" b="0" dirty="0">
                 <a:solidFill>
                   <a:srgbClr val="52667A"/>
                 </a:solidFill>
@@ -4558,88 +4605,195 @@
                 <a:ea typeface="Bitstream Charter"/>
                 <a:cs typeface="Bitstream Charter"/>
               </a:rPr>
-              <a:t>Echte API-Evidenz aus Postman</a:t>
-            </a:r>
+              <a:t>Zwei </a:t>
+            </a:r>
+            <a:r>
+              <a:rPr lang="de-CH" sz="1350" dirty="0">
+                <a:solidFill>
+                  <a:srgbClr val="52667A"/>
+                </a:solidFill>
+                <a:latin typeface="Bitstream Charter"/>
+                <a:ea typeface="Bitstream Charter"/>
+                <a:cs typeface="Bitstream Charter"/>
+              </a:rPr>
+              <a:t>e</a:t>
+            </a:r>
+            <a:r>
+              <a:rPr sz="1350" b="0" dirty="0" err="1">
+                <a:solidFill>
+                  <a:srgbClr val="52667A"/>
+                </a:solidFill>
+                <a:latin typeface="Bitstream Charter"/>
+                <a:ea typeface="Bitstream Charter"/>
+                <a:cs typeface="Bitstream Charter"/>
+              </a:rPr>
+              <a:t>chte</a:t>
+            </a:r>
+            <a:r>
+              <a:rPr sz="1350" b="0" dirty="0">
+                <a:solidFill>
+                  <a:srgbClr val="52667A"/>
+                </a:solidFill>
+                <a:latin typeface="Bitstream Charter"/>
+                <a:ea typeface="Bitstream Charter"/>
+                <a:cs typeface="Bitstream Charter"/>
+              </a:rPr>
+              <a:t> API-</a:t>
+            </a:r>
+            <a:r>
+              <a:rPr sz="1350" b="0" dirty="0" err="1">
+                <a:solidFill>
+                  <a:srgbClr val="52667A"/>
+                </a:solidFill>
+                <a:latin typeface="Bitstream Charter"/>
+                <a:ea typeface="Bitstream Charter"/>
+                <a:cs typeface="Bitstream Charter"/>
+              </a:rPr>
+              <a:t>Evidenz</a:t>
+            </a:r>
+            <a:r>
+              <a:rPr lang="de-CH" sz="1350" b="0" dirty="0">
+                <a:solidFill>
+                  <a:srgbClr val="52667A"/>
+                </a:solidFill>
+                <a:latin typeface="Bitstream Charter"/>
+                <a:ea typeface="Bitstream Charter"/>
+                <a:cs typeface="Bitstream Charter"/>
+              </a:rPr>
+              <a:t>en</a:t>
+            </a:r>
+            <a:r>
+              <a:rPr sz="1350" b="0" dirty="0">
+                <a:solidFill>
+                  <a:srgbClr val="52667A"/>
+                </a:solidFill>
+                <a:latin typeface="Bitstream Charter"/>
+                <a:ea typeface="Bitstream Charter"/>
+                <a:cs typeface="Bitstream Charter"/>
+              </a:rPr>
+              <a:t> </a:t>
+            </a:r>
+            <a:r>
+              <a:rPr sz="1350" b="0" dirty="0" err="1">
+                <a:solidFill>
+                  <a:srgbClr val="52667A"/>
+                </a:solidFill>
+                <a:latin typeface="Bitstream Charter"/>
+                <a:ea typeface="Bitstream Charter"/>
+                <a:cs typeface="Bitstream Charter"/>
+              </a:rPr>
+              <a:t>aus</a:t>
+            </a:r>
+            <a:r>
+              <a:rPr sz="1350" b="0" dirty="0">
+                <a:solidFill>
+                  <a:srgbClr val="52667A"/>
+                </a:solidFill>
+                <a:latin typeface="Bitstream Charter"/>
+                <a:ea typeface="Bitstream Charter"/>
+                <a:cs typeface="Bitstream Charter"/>
+              </a:rPr>
+              <a:t> Postman</a:t>
+            </a:r>
+            <a:r>
+              <a:rPr lang="de-CH" sz="1350" b="0" dirty="0">
+                <a:solidFill>
+                  <a:srgbClr val="52667A"/>
+                </a:solidFill>
+                <a:latin typeface="Bitstream Charter"/>
+                <a:ea typeface="Bitstream Charter"/>
+                <a:cs typeface="Bitstream Charter"/>
+              </a:rPr>
+              <a:t> (2 von 4)</a:t>
+            </a:r>
+            <a:endParaRPr sz="1350" b="0" dirty="0">
+              <a:solidFill>
+                <a:srgbClr val="52667A"/>
+              </a:solidFill>
+              <a:latin typeface="Bitstream Charter"/>
+              <a:ea typeface="Bitstream Charter"/>
+              <a:cs typeface="Bitstream Charter"/>
+            </a:endParaRPr>
           </a:p>
         </p:txBody>
       </p:sp>
       <p:pic>
         <p:nvPicPr>
-          <p:cNvPr id="12" name=""/>
+          <p:cNvPr id="12" name="Grafik 11"/>
           <p:cNvPicPr>
-            <a:picLocks xmlns:a="http://schemas.openxmlformats.org/drawingml/2006/main" noChangeAspect="1"/>
+            <a:picLocks noChangeAspect="1"/>
           </p:cNvPicPr>
           <p:nvPr/>
         </p:nvPicPr>
         <p:blipFill>
-          <a:blip xmlns:r="http://schemas.openxmlformats.org/officeDocument/2006/relationships" xmlns:a="http://schemas.openxmlformats.org/drawingml/2006/main" r:embed="R7690ff25160a4859"/>
-          <a:stretch xmlns:a="http://schemas.openxmlformats.org/drawingml/2006/main"/>
+          <a:blip r:embed="rId3"/>
+          <a:stretch/>
         </p:blipFill>
         <p:spPr>
-          <a:xfrm xmlns:a="http://schemas.openxmlformats.org/drawingml/2006/main">
+          <a:xfrm>
             <a:off x="523875" y="1880635"/>
             <a:ext cx="5429250" cy="2715731"/>
           </a:xfrm>
-          <a:prstGeom xmlns:a="http://schemas.openxmlformats.org/drawingml/2006/main" prst="rect">
+          <a:prstGeom prst="rect">
             <a:avLst/>
           </a:prstGeom>
         </p:spPr>
       </p:pic>
       <p:pic>
         <p:nvPicPr>
-          <p:cNvPr id="13" name=""/>
+          <p:cNvPr id="13" name="Grafik 12"/>
           <p:cNvPicPr>
-            <a:picLocks xmlns:a="http://schemas.openxmlformats.org/drawingml/2006/main" noChangeAspect="1"/>
+            <a:picLocks noChangeAspect="1"/>
           </p:cNvPicPr>
           <p:nvPr/>
         </p:nvPicPr>
         <p:blipFill>
-          <a:blip xmlns:r="http://schemas.openxmlformats.org/officeDocument/2006/relationships" xmlns:a="http://schemas.openxmlformats.org/drawingml/2006/main" r:embed="Rfaf128700baa41b0"/>
-          <a:stretch xmlns:a="http://schemas.openxmlformats.org/drawingml/2006/main"/>
+          <a:blip r:embed="rId4"/>
+          <a:stretch/>
         </p:blipFill>
         <p:spPr>
-          <a:xfrm xmlns:a="http://schemas.openxmlformats.org/drawingml/2006/main">
+          <a:xfrm>
             <a:off x="6238875" y="2175744"/>
             <a:ext cx="5429250" cy="2125512"/>
           </a:xfrm>
-          <a:prstGeom xmlns:a="http://schemas.openxmlformats.org/drawingml/2006/main" prst="rect">
+          <a:prstGeom prst="rect">
             <a:avLst/>
           </a:prstGeom>
         </p:spPr>
       </p:pic>
       <p:sp>
         <p:nvSpPr>
-          <p:cNvPr id="5" name="">
-            <a:extLst xmlns:a="http://schemas.openxmlformats.org/drawingml/2006/main">
+          <p:cNvPr id="5" name="Rechteck 4">
+            <a:extLst>
               <a:ext uri="{FF2B5EF4-FFF2-40B4-BE49-F238E27FC236}">
                 <a16:creationId xmlns:a16="http://schemas.microsoft.com/office/drawing/2014/main" id="{35BF831F-E350-4EC1-8C16-683218BDF60E}"/>
               </a:ext>
             </a:extLst>
           </p:cNvPr>
           <p:cNvSpPr>
-            <a:spLocks xmlns:a="http://schemas.openxmlformats.org/drawingml/2006/main" noGrp="1"/>
+            <a:spLocks noGrp="1"/>
           </p:cNvSpPr>
           <p:nvPr/>
         </p:nvSpPr>
         <p:spPr>
-          <a:xfrm xmlns:a="http://schemas.openxmlformats.org/drawingml/2006/main">
+          <a:xfrm>
             <a:off x="714375" y="5095875"/>
             <a:ext cx="4953000" cy="361950"/>
           </a:xfrm>
-          <a:prstGeom xmlns:a="http://schemas.openxmlformats.org/drawingml/2006/main" prst="rect">
+          <a:prstGeom prst="rect">
             <a:avLst/>
           </a:prstGeom>
-          <a:noFill xmlns:a="http://schemas.openxmlformats.org/drawingml/2006/main"/>
-          <a:ln xmlns:a="http://schemas.openxmlformats.org/drawingml/2006/main" w="0">
+          <a:noFill/>
+          <a:ln w="0">
             <a:noFill/>
           </a:ln>
         </p:spPr>
         <p:txBody>
-          <a:bodyPr xmlns:a="http://schemas.openxmlformats.org/drawingml/2006/main" anchor="ctr">
+          <a:bodyPr anchor="ctr">
             <a:noAutofit/>
           </a:bodyPr>
-          <a:lstStyle xmlns:a="http://schemas.openxmlformats.org/drawingml/2006/main"/>
-          <a:p xmlns:a="http://schemas.openxmlformats.org/drawingml/2006/main">
+          <a:lstStyle/>
+          <a:p>
             <a:pPr algn="l">
               <a:defRPr sz="1650" b="1">
                 <a:solidFill>
@@ -4666,37 +4820,37 @@
       </p:sp>
       <p:sp>
         <p:nvSpPr>
-          <p:cNvPr id="6" name="">
-            <a:extLst xmlns:a="http://schemas.openxmlformats.org/drawingml/2006/main">
+          <p:cNvPr id="6" name="Rechteck 5">
+            <a:extLst>
               <a:ext uri="{FF2B5EF4-FFF2-40B4-BE49-F238E27FC236}">
                 <a16:creationId xmlns:a16="http://schemas.microsoft.com/office/drawing/2014/main" id="{7C915B20-679B-45AA-BCAC-079539626C66}"/>
               </a:ext>
             </a:extLst>
           </p:cNvPr>
           <p:cNvSpPr>
-            <a:spLocks xmlns:a="http://schemas.openxmlformats.org/drawingml/2006/main" noGrp="1"/>
+            <a:spLocks noGrp="1"/>
           </p:cNvSpPr>
           <p:nvPr/>
         </p:nvSpPr>
         <p:spPr>
-          <a:xfrm xmlns:a="http://schemas.openxmlformats.org/drawingml/2006/main">
+          <a:xfrm>
             <a:off x="714375" y="5495925"/>
             <a:ext cx="4953000" cy="495300"/>
           </a:xfrm>
-          <a:prstGeom xmlns:a="http://schemas.openxmlformats.org/drawingml/2006/main" prst="rect">
+          <a:prstGeom prst="rect">
             <a:avLst/>
           </a:prstGeom>
-          <a:noFill xmlns:a="http://schemas.openxmlformats.org/drawingml/2006/main"/>
-          <a:ln xmlns:a="http://schemas.openxmlformats.org/drawingml/2006/main" w="0">
+          <a:noFill/>
+          <a:ln w="0">
             <a:noFill/>
           </a:ln>
         </p:spPr>
         <p:txBody>
-          <a:bodyPr xmlns:a="http://schemas.openxmlformats.org/drawingml/2006/main" anchor="ctr">
+          <a:bodyPr anchor="ctr">
             <a:noAutofit/>
           </a:bodyPr>
-          <a:lstStyle xmlns:a="http://schemas.openxmlformats.org/drawingml/2006/main"/>
-          <a:p xmlns:a="http://schemas.openxmlformats.org/drawingml/2006/main">
+          <a:lstStyle/>
+          <a:p>
             <a:pPr algn="l">
               <a:defRPr sz="1425" b="0">
                 <a:solidFill>
@@ -4723,37 +4877,37 @@
       </p:sp>
       <p:sp>
         <p:nvSpPr>
-          <p:cNvPr id="7" name="">
-            <a:extLst xmlns:a="http://schemas.openxmlformats.org/drawingml/2006/main">
+          <p:cNvPr id="7" name="Rechteck 6">
+            <a:extLst>
               <a:ext uri="{FF2B5EF4-FFF2-40B4-BE49-F238E27FC236}">
                 <a16:creationId xmlns:a16="http://schemas.microsoft.com/office/drawing/2014/main" id="{D6B73A71-8D3F-44B7-80F2-76E13C07E1C4}"/>
               </a:ext>
             </a:extLst>
           </p:cNvPr>
           <p:cNvSpPr>
-            <a:spLocks xmlns:a="http://schemas.openxmlformats.org/drawingml/2006/main" noGrp="1"/>
+            <a:spLocks noGrp="1"/>
           </p:cNvSpPr>
           <p:nvPr/>
         </p:nvSpPr>
         <p:spPr>
-          <a:xfrm xmlns:a="http://schemas.openxmlformats.org/drawingml/2006/main">
+          <a:xfrm>
             <a:off x="6429375" y="5095875"/>
             <a:ext cx="4953000" cy="361950"/>
           </a:xfrm>
-          <a:prstGeom xmlns:a="http://schemas.openxmlformats.org/drawingml/2006/main" prst="rect">
+          <a:prstGeom prst="rect">
             <a:avLst/>
           </a:prstGeom>
-          <a:noFill xmlns:a="http://schemas.openxmlformats.org/drawingml/2006/main"/>
-          <a:ln xmlns:a="http://schemas.openxmlformats.org/drawingml/2006/main" w="0">
+          <a:noFill/>
+          <a:ln w="0">
             <a:noFill/>
           </a:ln>
         </p:spPr>
         <p:txBody>
-          <a:bodyPr xmlns:a="http://schemas.openxmlformats.org/drawingml/2006/main" anchor="ctr">
+          <a:bodyPr anchor="ctr">
             <a:noAutofit/>
           </a:bodyPr>
-          <a:lstStyle xmlns:a="http://schemas.openxmlformats.org/drawingml/2006/main"/>
-          <a:p xmlns:a="http://schemas.openxmlformats.org/drawingml/2006/main">
+          <a:lstStyle/>
+          <a:p>
             <a:pPr algn="l">
               <a:defRPr sz="1650" b="1">
                 <a:solidFill>
@@ -4780,37 +4934,37 @@
       </p:sp>
       <p:sp>
         <p:nvSpPr>
-          <p:cNvPr id="8" name="">
-            <a:extLst xmlns:a="http://schemas.openxmlformats.org/drawingml/2006/main">
+          <p:cNvPr id="8" name="Rechteck 7">
+            <a:extLst>
               <a:ext uri="{FF2B5EF4-FFF2-40B4-BE49-F238E27FC236}">
                 <a16:creationId xmlns:a16="http://schemas.microsoft.com/office/drawing/2014/main" id="{868952C6-48F2-4833-B5B9-721FB5C0EAC8}"/>
               </a:ext>
             </a:extLst>
           </p:cNvPr>
           <p:cNvSpPr>
-            <a:spLocks xmlns:a="http://schemas.openxmlformats.org/drawingml/2006/main" noGrp="1"/>
+            <a:spLocks noGrp="1"/>
           </p:cNvSpPr>
           <p:nvPr/>
         </p:nvSpPr>
         <p:spPr>
-          <a:xfrm xmlns:a="http://schemas.openxmlformats.org/drawingml/2006/main">
+          <a:xfrm>
             <a:off x="6429375" y="5495925"/>
             <a:ext cx="4953000" cy="495300"/>
           </a:xfrm>
-          <a:prstGeom xmlns:a="http://schemas.openxmlformats.org/drawingml/2006/main" prst="rect">
+          <a:prstGeom prst="rect">
             <a:avLst/>
           </a:prstGeom>
-          <a:noFill xmlns:a="http://schemas.openxmlformats.org/drawingml/2006/main"/>
-          <a:ln xmlns:a="http://schemas.openxmlformats.org/drawingml/2006/main" w="0">
+          <a:noFill/>
+          <a:ln w="0">
             <a:noFill/>
           </a:ln>
         </p:spPr>
         <p:txBody>
-          <a:bodyPr xmlns:a="http://schemas.openxmlformats.org/drawingml/2006/main" anchor="ctr">
+          <a:bodyPr anchor="ctr">
             <a:noAutofit/>
           </a:bodyPr>
-          <a:lstStyle xmlns:a="http://schemas.openxmlformats.org/drawingml/2006/main"/>
-          <a:p xmlns:a="http://schemas.openxmlformats.org/drawingml/2006/main">
+          <a:lstStyle/>
+          <a:p>
             <a:pPr algn="l">
               <a:defRPr sz="1425" b="0">
                 <a:solidFill>
@@ -4837,37 +4991,37 @@
       </p:sp>
       <p:sp>
         <p:nvSpPr>
-          <p:cNvPr id="9" name="">
-            <a:extLst xmlns:a="http://schemas.openxmlformats.org/drawingml/2006/main">
+          <p:cNvPr id="9" name="Rechteck 8">
+            <a:extLst>
               <a:ext uri="{FF2B5EF4-FFF2-40B4-BE49-F238E27FC236}">
                 <a16:creationId xmlns:a16="http://schemas.microsoft.com/office/drawing/2014/main" id="{9FD86489-40D2-4BD2-9B22-6CC62879A6F1}"/>
               </a:ext>
             </a:extLst>
           </p:cNvPr>
           <p:cNvSpPr>
-            <a:spLocks xmlns:a="http://schemas.openxmlformats.org/drawingml/2006/main" noGrp="1"/>
+            <a:spLocks noGrp="1"/>
           </p:cNvSpPr>
           <p:nvPr/>
         </p:nvSpPr>
         <p:spPr>
-          <a:xfrm xmlns:a="http://schemas.openxmlformats.org/drawingml/2006/main">
+          <a:xfrm>
             <a:off x="685800" y="6496050"/>
             <a:ext cx="10820400" cy="209550"/>
           </a:xfrm>
-          <a:prstGeom xmlns:a="http://schemas.openxmlformats.org/drawingml/2006/main" prst="rect">
+          <a:prstGeom prst="rect">
             <a:avLst/>
           </a:prstGeom>
-          <a:noFill xmlns:a="http://schemas.openxmlformats.org/drawingml/2006/main"/>
-          <a:ln xmlns:a="http://schemas.openxmlformats.org/drawingml/2006/main" w="0">
+          <a:noFill/>
+          <a:ln w="0">
             <a:noFill/>
           </a:ln>
         </p:spPr>
         <p:txBody>
-          <a:bodyPr xmlns:a="http://schemas.openxmlformats.org/drawingml/2006/main" anchor="ctr">
+          <a:bodyPr anchor="ctr">
             <a:noAutofit/>
           </a:bodyPr>
-          <a:lstStyle xmlns:a="http://schemas.openxmlformats.org/drawingml/2006/main"/>
-          <a:p xmlns:a="http://schemas.openxmlformats.org/drawingml/2006/main">
+          <a:lstStyle/>
+          <a:p>
             <a:pPr algn="r">
               <a:defRPr sz="900" b="0">
                 <a:solidFill>
@@ -4899,17 +5053,21 @@
       </p:ext>
     </p:extLst>
   </p:cSld>
+  <p:clrMapOvr>
+    <a:masterClrMapping/>
+  </p:clrMapOvr>
 </p:sld>
 </file>
 
 <file path=ppt/slides/slide6.xml><?xml version="1.0" encoding="utf-8"?>
-<p:sld xmlns:p="http://schemas.openxmlformats.org/presentationml/2006/main">
+<p:sld xmlns:a="http://schemas.openxmlformats.org/drawingml/2006/main" xmlns:r="http://schemas.openxmlformats.org/officeDocument/2006/relationships" xmlns:p="http://schemas.openxmlformats.org/presentationml/2006/main">
   <p:cSld>
     <p:bg>
       <p:bgPr>
-        <a:solidFill xmlns:a="http://schemas.openxmlformats.org/drawingml/2006/main">
+        <a:solidFill>
           <a:srgbClr val="FFFFFF"/>
         </a:solidFill>
+        <a:effectLst/>
       </p:bgPr>
     </p:bg>
     <p:spTree>
@@ -4919,41 +5077,46 @@
         <p:nvPr/>
       </p:nvGrpSpPr>
       <p:grpSpPr>
-        <a:xfrm xmlns:a="http://schemas.openxmlformats.org/drawingml/2006/main"/>
+        <a:xfrm>
+          <a:off x="0" y="0"/>
+          <a:ext cx="0" cy="0"/>
+          <a:chOff x="0" y="0"/>
+          <a:chExt cx="0" cy="0"/>
+        </a:xfrm>
       </p:grpSpPr>
       <p:sp>
         <p:nvSpPr>
-          <p:cNvPr id="12" name="">
-            <a:extLst xmlns:a="http://schemas.openxmlformats.org/drawingml/2006/main">
+          <p:cNvPr id="12" name="Rechteck 11">
+            <a:extLst>
               <a:ext uri="{FF2B5EF4-FFF2-40B4-BE49-F238E27FC236}">
                 <a16:creationId xmlns:a16="http://schemas.microsoft.com/office/drawing/2014/main" id="{B5BFCFA6-4BEC-4651-A1E9-6E3F7AD3017E}"/>
               </a:ext>
             </a:extLst>
           </p:cNvPr>
           <p:cNvSpPr>
-            <a:spLocks xmlns:a="http://schemas.openxmlformats.org/drawingml/2006/main" noGrp="1"/>
+            <a:spLocks noGrp="1"/>
           </p:cNvSpPr>
           <p:nvPr/>
         </p:nvSpPr>
         <p:spPr>
-          <a:xfrm xmlns:a="http://schemas.openxmlformats.org/drawingml/2006/main">
+          <a:xfrm>
             <a:off x="666750" y="400050"/>
             <a:ext cx="10858500" cy="552450"/>
           </a:xfrm>
-          <a:prstGeom xmlns:a="http://schemas.openxmlformats.org/drawingml/2006/main" prst="rect">
+          <a:prstGeom prst="rect">
             <a:avLst/>
           </a:prstGeom>
-          <a:noFill xmlns:a="http://schemas.openxmlformats.org/drawingml/2006/main"/>
-          <a:ln xmlns:a="http://schemas.openxmlformats.org/drawingml/2006/main" w="0">
+          <a:noFill/>
+          <a:ln w="0">
             <a:noFill/>
           </a:ln>
         </p:spPr>
         <p:txBody>
-          <a:bodyPr xmlns:a="http://schemas.openxmlformats.org/drawingml/2006/main" anchor="ctr">
+          <a:bodyPr anchor="ctr">
             <a:noAutofit/>
           </a:bodyPr>
-          <a:lstStyle xmlns:a="http://schemas.openxmlformats.org/drawingml/2006/main"/>
-          <a:p xmlns:a="http://schemas.openxmlformats.org/drawingml/2006/main">
+          <a:lstStyle/>
+          <a:p>
             <a:pPr algn="l">
               <a:defRPr sz="2700" b="1">
                 <a:solidFill>
@@ -4980,37 +5143,37 @@
       </p:sp>
       <p:sp>
         <p:nvSpPr>
-          <p:cNvPr id="2" name="">
-            <a:extLst xmlns:a="http://schemas.openxmlformats.org/drawingml/2006/main">
+          <p:cNvPr id="2" name="Rechteck 1">
+            <a:extLst>
               <a:ext uri="{FF2B5EF4-FFF2-40B4-BE49-F238E27FC236}">
                 <a16:creationId xmlns:a16="http://schemas.microsoft.com/office/drawing/2014/main" id="{71F7B55D-8D97-4B2E-82D6-D7A9FA256326}"/>
               </a:ext>
             </a:extLst>
           </p:cNvPr>
           <p:cNvSpPr>
-            <a:spLocks xmlns:a="http://schemas.openxmlformats.org/drawingml/2006/main" noGrp="1"/>
+            <a:spLocks noGrp="1"/>
           </p:cNvSpPr>
           <p:nvPr/>
         </p:nvSpPr>
         <p:spPr>
-          <a:xfrm xmlns:a="http://schemas.openxmlformats.org/drawingml/2006/main">
+          <a:xfrm>
             <a:off x="685800" y="962025"/>
             <a:ext cx="10668000" cy="323850"/>
           </a:xfrm>
-          <a:prstGeom xmlns:a="http://schemas.openxmlformats.org/drawingml/2006/main" prst="rect">
+          <a:prstGeom prst="rect">
             <a:avLst/>
           </a:prstGeom>
-          <a:noFill xmlns:a="http://schemas.openxmlformats.org/drawingml/2006/main"/>
-          <a:ln xmlns:a="http://schemas.openxmlformats.org/drawingml/2006/main" w="0">
+          <a:noFill/>
+          <a:ln w="0">
             <a:noFill/>
           </a:ln>
         </p:spPr>
         <p:txBody>
-          <a:bodyPr xmlns:a="http://schemas.openxmlformats.org/drawingml/2006/main" anchor="ctr">
+          <a:bodyPr anchor="ctr">
             <a:noAutofit/>
           </a:bodyPr>
-          <a:lstStyle xmlns:a="http://schemas.openxmlformats.org/drawingml/2006/main"/>
-          <a:p xmlns:a="http://schemas.openxmlformats.org/drawingml/2006/main">
+          <a:lstStyle/>
+          <a:p>
             <a:pPr algn="l">
               <a:defRPr sz="1350" b="0">
                 <a:solidFill>
@@ -5037,37 +5200,37 @@
       </p:sp>
       <p:sp>
         <p:nvSpPr>
-          <p:cNvPr id="3" name="">
-            <a:extLst xmlns:a="http://schemas.openxmlformats.org/drawingml/2006/main">
+          <p:cNvPr id="3" name="Rechteck 2">
+            <a:extLst>
               <a:ext uri="{FF2B5EF4-FFF2-40B4-BE49-F238E27FC236}">
                 <a16:creationId xmlns:a16="http://schemas.microsoft.com/office/drawing/2014/main" id="{582FCFD7-78F1-4C76-85D8-099843E3D073}"/>
               </a:ext>
             </a:extLst>
           </p:cNvPr>
           <p:cNvSpPr>
-            <a:spLocks xmlns:a="http://schemas.openxmlformats.org/drawingml/2006/main" noGrp="1"/>
+            <a:spLocks noGrp="1"/>
           </p:cNvSpPr>
           <p:nvPr/>
         </p:nvSpPr>
         <p:spPr>
-          <a:xfrm xmlns:a="http://schemas.openxmlformats.org/drawingml/2006/main">
+          <a:xfrm>
             <a:off x="904875" y="1619250"/>
             <a:ext cx="4476750" cy="381000"/>
           </a:xfrm>
-          <a:prstGeom xmlns:a="http://schemas.openxmlformats.org/drawingml/2006/main" prst="rect">
+          <a:prstGeom prst="rect">
             <a:avLst/>
           </a:prstGeom>
-          <a:noFill xmlns:a="http://schemas.openxmlformats.org/drawingml/2006/main"/>
-          <a:ln xmlns:a="http://schemas.openxmlformats.org/drawingml/2006/main" w="0">
+          <a:noFill/>
+          <a:ln w="0">
             <a:noFill/>
           </a:ln>
         </p:spPr>
         <p:txBody>
-          <a:bodyPr xmlns:a="http://schemas.openxmlformats.org/drawingml/2006/main" anchor="ctr">
+          <a:bodyPr anchor="ctr">
             <a:noAutofit/>
           </a:bodyPr>
-          <a:lstStyle xmlns:a="http://schemas.openxmlformats.org/drawingml/2006/main"/>
-          <a:p xmlns:a="http://schemas.openxmlformats.org/drawingml/2006/main">
+          <a:lstStyle/>
+          <a:p>
             <a:pPr algn="l">
               <a:defRPr sz="1800" b="1">
                 <a:solidFill>
@@ -5094,39 +5257,39 @@
       </p:sp>
       <p:sp>
         <p:nvSpPr>
-          <p:cNvPr id="4" name="">
-            <a:extLst xmlns:a="http://schemas.openxmlformats.org/drawingml/2006/main">
+          <p:cNvPr id="4" name="Rechteck 3">
+            <a:extLst>
               <a:ext uri="{FF2B5EF4-FFF2-40B4-BE49-F238E27FC236}">
                 <a16:creationId xmlns:a16="http://schemas.microsoft.com/office/drawing/2014/main" id="{622E99E0-4078-4B0C-8EDF-E4A9F3B26615}"/>
               </a:ext>
             </a:extLst>
           </p:cNvPr>
           <p:cNvSpPr>
-            <a:spLocks xmlns:a="http://schemas.openxmlformats.org/drawingml/2006/main" noGrp="1"/>
+            <a:spLocks noGrp="1"/>
           </p:cNvSpPr>
           <p:nvPr/>
         </p:nvSpPr>
         <p:spPr>
-          <a:xfrm xmlns:a="http://schemas.openxmlformats.org/drawingml/2006/main">
+          <a:xfrm>
             <a:off x="904875" y="2095500"/>
             <a:ext cx="4762500" cy="1381125"/>
           </a:xfrm>
-          <a:prstGeom xmlns:a="http://schemas.openxmlformats.org/drawingml/2006/main" prst="rect">
+          <a:prstGeom prst="rect">
             <a:avLst/>
           </a:prstGeom>
-          <a:solidFill xmlns:a="http://schemas.openxmlformats.org/drawingml/2006/main">
+          <a:solidFill>
             <a:srgbClr val="FFF2F2"/>
           </a:solidFill>
-          <a:ln xmlns:a="http://schemas.openxmlformats.org/drawingml/2006/main" w="0">
+          <a:ln w="0">
             <a:noFill/>
           </a:ln>
         </p:spPr>
         <p:txBody>
-          <a:bodyPr xmlns:a="http://schemas.openxmlformats.org/drawingml/2006/main" anchor="ctr">
+          <a:bodyPr anchor="ctr">
             <a:noAutofit/>
           </a:bodyPr>
-          <a:lstStyle xmlns:a="http://schemas.openxmlformats.org/drawingml/2006/main"/>
-          <a:p xmlns:a="http://schemas.openxmlformats.org/drawingml/2006/main">
+          <a:lstStyle/>
+          <a:p>
             <a:pPr algn="l">
               <a:defRPr sz="1425" b="0">
                 <a:solidFill>
@@ -5149,7 +5312,7 @@
               <a:t>function canEditTask(user, task) {</a:t>
             </a:r>
           </a:p>
-          <a:p xmlns:a="http://schemas.openxmlformats.org/drawingml/2006/main">
+          <a:p>
             <a:pPr algn="l">
               <a:defRPr sz="1425" b="0">
                 <a:solidFill>
@@ -5172,7 +5335,7 @@
               <a:t>  return user.role === 'admin' || Boolean(user);</a:t>
             </a:r>
           </a:p>
-          <a:p xmlns:a="http://schemas.openxmlformats.org/drawingml/2006/main">
+          <a:p>
             <a:pPr algn="l">
               <a:defRPr sz="1425" b="0">
                 <a:solidFill>
@@ -5199,37 +5362,37 @@
       </p:sp>
       <p:sp>
         <p:nvSpPr>
-          <p:cNvPr id="5" name="">
-            <a:extLst xmlns:a="http://schemas.openxmlformats.org/drawingml/2006/main">
+          <p:cNvPr id="5" name="Rechteck 4">
+            <a:extLst>
               <a:ext uri="{FF2B5EF4-FFF2-40B4-BE49-F238E27FC236}">
                 <a16:creationId xmlns:a16="http://schemas.microsoft.com/office/drawing/2014/main" id="{542DD016-C9EA-48D1-9DFD-4DA3DA6498F6}"/>
               </a:ext>
             </a:extLst>
           </p:cNvPr>
           <p:cNvSpPr>
-            <a:spLocks xmlns:a="http://schemas.openxmlformats.org/drawingml/2006/main" noGrp="1"/>
+            <a:spLocks noGrp="1"/>
           </p:cNvSpPr>
           <p:nvPr/>
         </p:nvSpPr>
         <p:spPr>
-          <a:xfrm xmlns:a="http://schemas.openxmlformats.org/drawingml/2006/main">
+          <a:xfrm>
             <a:off x="904875" y="3667125"/>
             <a:ext cx="4762500" cy="685800"/>
           </a:xfrm>
-          <a:prstGeom xmlns:a="http://schemas.openxmlformats.org/drawingml/2006/main" prst="rect">
+          <a:prstGeom prst="rect">
             <a:avLst/>
           </a:prstGeom>
-          <a:noFill xmlns:a="http://schemas.openxmlformats.org/drawingml/2006/main"/>
-          <a:ln xmlns:a="http://schemas.openxmlformats.org/drawingml/2006/main" w="0">
+          <a:noFill/>
+          <a:ln w="0">
             <a:noFill/>
           </a:ln>
         </p:spPr>
         <p:txBody>
-          <a:bodyPr xmlns:a="http://schemas.openxmlformats.org/drawingml/2006/main" anchor="ctr">
+          <a:bodyPr anchor="ctr">
             <a:noAutofit/>
           </a:bodyPr>
-          <a:lstStyle xmlns:a="http://schemas.openxmlformats.org/drawingml/2006/main"/>
-          <a:p xmlns:a="http://schemas.openxmlformats.org/drawingml/2006/main">
+          <a:lstStyle/>
+          <a:p>
             <a:pPr algn="l">
               <a:defRPr sz="1575" b="1">
                 <a:solidFill>
@@ -5256,37 +5419,37 @@
       </p:sp>
       <p:sp>
         <p:nvSpPr>
-          <p:cNvPr id="6" name="">
-            <a:extLst xmlns:a="http://schemas.openxmlformats.org/drawingml/2006/main">
+          <p:cNvPr id="6" name="Rechteck 5">
+            <a:extLst>
               <a:ext uri="{FF2B5EF4-FFF2-40B4-BE49-F238E27FC236}">
                 <a16:creationId xmlns:a16="http://schemas.microsoft.com/office/drawing/2014/main" id="{9024F68E-D614-4F2E-B151-6D5A9153A565}"/>
               </a:ext>
             </a:extLst>
           </p:cNvPr>
           <p:cNvSpPr>
-            <a:spLocks xmlns:a="http://schemas.openxmlformats.org/drawingml/2006/main" noGrp="1"/>
+            <a:spLocks noGrp="1"/>
           </p:cNvSpPr>
           <p:nvPr/>
         </p:nvSpPr>
         <p:spPr>
-          <a:xfrm xmlns:a="http://schemas.openxmlformats.org/drawingml/2006/main">
+          <a:xfrm>
             <a:off x="6524625" y="1619250"/>
             <a:ext cx="4476750" cy="381000"/>
           </a:xfrm>
-          <a:prstGeom xmlns:a="http://schemas.openxmlformats.org/drawingml/2006/main" prst="rect">
+          <a:prstGeom prst="rect">
             <a:avLst/>
           </a:prstGeom>
-          <a:noFill xmlns:a="http://schemas.openxmlformats.org/drawingml/2006/main"/>
-          <a:ln xmlns:a="http://schemas.openxmlformats.org/drawingml/2006/main" w="0">
+          <a:noFill/>
+          <a:ln w="0">
             <a:noFill/>
           </a:ln>
         </p:spPr>
         <p:txBody>
-          <a:bodyPr xmlns:a="http://schemas.openxmlformats.org/drawingml/2006/main" anchor="ctr">
+          <a:bodyPr anchor="ctr">
             <a:noAutofit/>
           </a:bodyPr>
-          <a:lstStyle xmlns:a="http://schemas.openxmlformats.org/drawingml/2006/main"/>
-          <a:p xmlns:a="http://schemas.openxmlformats.org/drawingml/2006/main">
+          <a:lstStyle/>
+          <a:p>
             <a:pPr algn="l">
               <a:defRPr sz="1800" b="1">
                 <a:solidFill>
@@ -5313,39 +5476,39 @@
       </p:sp>
       <p:sp>
         <p:nvSpPr>
-          <p:cNvPr id="7" name="">
-            <a:extLst xmlns:a="http://schemas.openxmlformats.org/drawingml/2006/main">
+          <p:cNvPr id="7" name="Rechteck 6">
+            <a:extLst>
               <a:ext uri="{FF2B5EF4-FFF2-40B4-BE49-F238E27FC236}">
                 <a16:creationId xmlns:a16="http://schemas.microsoft.com/office/drawing/2014/main" id="{8E2D615B-E2F0-4DCA-9593-83F02DD976F0}"/>
               </a:ext>
             </a:extLst>
           </p:cNvPr>
           <p:cNvSpPr>
-            <a:spLocks xmlns:a="http://schemas.openxmlformats.org/drawingml/2006/main" noGrp="1"/>
+            <a:spLocks noGrp="1"/>
           </p:cNvSpPr>
           <p:nvPr/>
         </p:nvSpPr>
         <p:spPr>
-          <a:xfrm xmlns:a="http://schemas.openxmlformats.org/drawingml/2006/main">
+          <a:xfrm>
             <a:off x="6524625" y="2095500"/>
             <a:ext cx="4762500" cy="1381125"/>
           </a:xfrm>
-          <a:prstGeom xmlns:a="http://schemas.openxmlformats.org/drawingml/2006/main" prst="rect">
+          <a:prstGeom prst="rect">
             <a:avLst/>
           </a:prstGeom>
-          <a:solidFill xmlns:a="http://schemas.openxmlformats.org/drawingml/2006/main">
+          <a:solidFill>
             <a:srgbClr val="EEF9F3"/>
           </a:solidFill>
-          <a:ln xmlns:a="http://schemas.openxmlformats.org/drawingml/2006/main" w="0">
+          <a:ln w="0">
             <a:noFill/>
           </a:ln>
         </p:spPr>
         <p:txBody>
-          <a:bodyPr xmlns:a="http://schemas.openxmlformats.org/drawingml/2006/main" anchor="ctr">
+          <a:bodyPr anchor="ctr">
             <a:noAutofit/>
           </a:bodyPr>
-          <a:lstStyle xmlns:a="http://schemas.openxmlformats.org/drawingml/2006/main"/>
-          <a:p xmlns:a="http://schemas.openxmlformats.org/drawingml/2006/main">
+          <a:lstStyle/>
+          <a:p>
             <a:pPr algn="l">
               <a:defRPr sz="1425" b="0">
                 <a:solidFill>
@@ -5368,7 +5531,7 @@
               <a:t>function canEditTask(user, task) {</a:t>
             </a:r>
           </a:p>
-          <a:p xmlns:a="http://schemas.openxmlformats.org/drawingml/2006/main">
+          <a:p>
             <a:pPr algn="l">
               <a:defRPr sz="1425" b="0">
                 <a:solidFill>
@@ -5391,7 +5554,7 @@
               <a:t>  return user.role === 'admin' || task.ownerId === user.id;</a:t>
             </a:r>
           </a:p>
-          <a:p xmlns:a="http://schemas.openxmlformats.org/drawingml/2006/main">
+          <a:p>
             <a:pPr algn="l">
               <a:defRPr sz="1425" b="0">
                 <a:solidFill>
@@ -5418,37 +5581,37 @@
       </p:sp>
       <p:sp>
         <p:nvSpPr>
-          <p:cNvPr id="8" name="">
-            <a:extLst xmlns:a="http://schemas.openxmlformats.org/drawingml/2006/main">
+          <p:cNvPr id="8" name="Rechteck 7">
+            <a:extLst>
               <a:ext uri="{FF2B5EF4-FFF2-40B4-BE49-F238E27FC236}">
                 <a16:creationId xmlns:a16="http://schemas.microsoft.com/office/drawing/2014/main" id="{BF101C35-7C2C-4E55-9F22-EE65B71540A3}"/>
               </a:ext>
             </a:extLst>
           </p:cNvPr>
           <p:cNvSpPr>
-            <a:spLocks xmlns:a="http://schemas.openxmlformats.org/drawingml/2006/main" noGrp="1"/>
+            <a:spLocks noGrp="1"/>
           </p:cNvSpPr>
           <p:nvPr/>
         </p:nvSpPr>
         <p:spPr>
-          <a:xfrm xmlns:a="http://schemas.openxmlformats.org/drawingml/2006/main">
+          <a:xfrm>
             <a:off x="6524625" y="3667125"/>
             <a:ext cx="4762500" cy="685800"/>
           </a:xfrm>
-          <a:prstGeom xmlns:a="http://schemas.openxmlformats.org/drawingml/2006/main" prst="rect">
+          <a:prstGeom prst="rect">
             <a:avLst/>
           </a:prstGeom>
-          <a:noFill xmlns:a="http://schemas.openxmlformats.org/drawingml/2006/main"/>
-          <a:ln xmlns:a="http://schemas.openxmlformats.org/drawingml/2006/main" w="0">
+          <a:noFill/>
+          <a:ln w="0">
             <a:noFill/>
           </a:ln>
         </p:spPr>
         <p:txBody>
-          <a:bodyPr xmlns:a="http://schemas.openxmlformats.org/drawingml/2006/main" anchor="ctr">
+          <a:bodyPr anchor="ctr">
             <a:noAutofit/>
           </a:bodyPr>
-          <a:lstStyle xmlns:a="http://schemas.openxmlformats.org/drawingml/2006/main"/>
-          <a:p xmlns:a="http://schemas.openxmlformats.org/drawingml/2006/main">
+          <a:lstStyle/>
+          <a:p>
             <a:pPr algn="l">
               <a:defRPr sz="1575" b="1">
                 <a:solidFill>
@@ -5475,37 +5638,37 @@
       </p:sp>
       <p:sp>
         <p:nvSpPr>
-          <p:cNvPr id="9" name="">
-            <a:extLst xmlns:a="http://schemas.openxmlformats.org/drawingml/2006/main">
+          <p:cNvPr id="9" name="Rechteck 8">
+            <a:extLst>
               <a:ext uri="{FF2B5EF4-FFF2-40B4-BE49-F238E27FC236}">
                 <a16:creationId xmlns:a16="http://schemas.microsoft.com/office/drawing/2014/main" id="{E08B5496-86E5-4154-9685-8DD4E892718B}"/>
               </a:ext>
             </a:extLst>
           </p:cNvPr>
           <p:cNvSpPr>
-            <a:spLocks xmlns:a="http://schemas.openxmlformats.org/drawingml/2006/main" noGrp="1"/>
+            <a:spLocks noGrp="1"/>
           </p:cNvSpPr>
           <p:nvPr/>
         </p:nvSpPr>
         <p:spPr>
-          <a:xfrm xmlns:a="http://schemas.openxmlformats.org/drawingml/2006/main">
+          <a:xfrm>
             <a:off x="1524000" y="5000625"/>
             <a:ext cx="3905250" cy="523875"/>
           </a:xfrm>
-          <a:prstGeom xmlns:a="http://schemas.openxmlformats.org/drawingml/2006/main" prst="rect">
+          <a:prstGeom prst="rect">
             <a:avLst/>
           </a:prstGeom>
-          <a:noFill xmlns:a="http://schemas.openxmlformats.org/drawingml/2006/main"/>
-          <a:ln xmlns:a="http://schemas.openxmlformats.org/drawingml/2006/main" w="0">
+          <a:noFill/>
+          <a:ln w="0">
             <a:noFill/>
           </a:ln>
         </p:spPr>
         <p:txBody>
-          <a:bodyPr xmlns:a="http://schemas.openxmlformats.org/drawingml/2006/main" anchor="ctr">
+          <a:bodyPr anchor="ctr">
             <a:noAutofit/>
           </a:bodyPr>
-          <a:lstStyle xmlns:a="http://schemas.openxmlformats.org/drawingml/2006/main"/>
-          <a:p xmlns:a="http://schemas.openxmlformats.org/drawingml/2006/main">
+          <a:lstStyle/>
+          <a:p>
             <a:pPr algn="ctr">
               <a:defRPr sz="1875" b="1">
                 <a:solidFill>
@@ -5532,37 +5695,37 @@
       </p:sp>
       <p:sp>
         <p:nvSpPr>
-          <p:cNvPr id="10" name="">
-            <a:extLst xmlns:a="http://schemas.openxmlformats.org/drawingml/2006/main">
+          <p:cNvPr id="10" name="Rechteck 9">
+            <a:extLst>
               <a:ext uri="{FF2B5EF4-FFF2-40B4-BE49-F238E27FC236}">
                 <a16:creationId xmlns:a16="http://schemas.microsoft.com/office/drawing/2014/main" id="{4587DCD5-F1E5-410F-A361-5C577072E300}"/>
               </a:ext>
             </a:extLst>
           </p:cNvPr>
           <p:cNvSpPr>
-            <a:spLocks xmlns:a="http://schemas.openxmlformats.org/drawingml/2006/main" noGrp="1"/>
+            <a:spLocks noGrp="1"/>
           </p:cNvSpPr>
           <p:nvPr/>
         </p:nvSpPr>
         <p:spPr>
-          <a:xfrm xmlns:a="http://schemas.openxmlformats.org/drawingml/2006/main">
+          <a:xfrm>
             <a:off x="6286500" y="5000625"/>
             <a:ext cx="4476750" cy="523875"/>
           </a:xfrm>
-          <a:prstGeom xmlns:a="http://schemas.openxmlformats.org/drawingml/2006/main" prst="rect">
+          <a:prstGeom prst="rect">
             <a:avLst/>
           </a:prstGeom>
-          <a:noFill xmlns:a="http://schemas.openxmlformats.org/drawingml/2006/main"/>
-          <a:ln xmlns:a="http://schemas.openxmlformats.org/drawingml/2006/main" w="0">
+          <a:noFill/>
+          <a:ln w="0">
             <a:noFill/>
           </a:ln>
         </p:spPr>
         <p:txBody>
-          <a:bodyPr xmlns:a="http://schemas.openxmlformats.org/drawingml/2006/main" anchor="ctr">
+          <a:bodyPr anchor="ctr">
             <a:noAutofit/>
           </a:bodyPr>
-          <a:lstStyle xmlns:a="http://schemas.openxmlformats.org/drawingml/2006/main"/>
-          <a:p xmlns:a="http://schemas.openxmlformats.org/drawingml/2006/main">
+          <a:lstStyle/>
+          <a:p>
             <a:pPr algn="ctr">
               <a:defRPr sz="1875" b="1">
                 <a:solidFill>
@@ -5589,37 +5752,37 @@
       </p:sp>
       <p:sp>
         <p:nvSpPr>
-          <p:cNvPr id="11" name="">
-            <a:extLst xmlns:a="http://schemas.openxmlformats.org/drawingml/2006/main">
+          <p:cNvPr id="11" name="Rechteck 10">
+            <a:extLst>
               <a:ext uri="{FF2B5EF4-FFF2-40B4-BE49-F238E27FC236}">
                 <a16:creationId xmlns:a16="http://schemas.microsoft.com/office/drawing/2014/main" id="{6F024117-DB37-49C8-AE80-5E672D10924F}"/>
               </a:ext>
             </a:extLst>
           </p:cNvPr>
           <p:cNvSpPr>
-            <a:spLocks xmlns:a="http://schemas.openxmlformats.org/drawingml/2006/main" noGrp="1"/>
+            <a:spLocks noGrp="1"/>
           </p:cNvSpPr>
           <p:nvPr/>
         </p:nvSpPr>
         <p:spPr>
-          <a:xfrm xmlns:a="http://schemas.openxmlformats.org/drawingml/2006/main">
+          <a:xfrm>
             <a:off x="685800" y="6496050"/>
             <a:ext cx="10820400" cy="209550"/>
           </a:xfrm>
-          <a:prstGeom xmlns:a="http://schemas.openxmlformats.org/drawingml/2006/main" prst="rect">
+          <a:prstGeom prst="rect">
             <a:avLst/>
           </a:prstGeom>
-          <a:noFill xmlns:a="http://schemas.openxmlformats.org/drawingml/2006/main"/>
-          <a:ln xmlns:a="http://schemas.openxmlformats.org/drawingml/2006/main" w="0">
+          <a:noFill/>
+          <a:ln w="0">
             <a:noFill/>
           </a:ln>
         </p:spPr>
         <p:txBody>
-          <a:bodyPr xmlns:a="http://schemas.openxmlformats.org/drawingml/2006/main" anchor="ctr">
+          <a:bodyPr anchor="ctr">
             <a:noAutofit/>
           </a:bodyPr>
-          <a:lstStyle xmlns:a="http://schemas.openxmlformats.org/drawingml/2006/main"/>
-          <a:p xmlns:a="http://schemas.openxmlformats.org/drawingml/2006/main">
+          <a:lstStyle/>
+          <a:p>
             <a:pPr algn="r">
               <a:defRPr sz="900" b="0">
                 <a:solidFill>
@@ -5651,17 +5814,21 @@
       </p:ext>
     </p:extLst>
   </p:cSld>
+  <p:clrMapOvr>
+    <a:masterClrMapping/>
+  </p:clrMapOvr>
 </p:sld>
 </file>
 
 <file path=ppt/slides/slide7.xml><?xml version="1.0" encoding="utf-8"?>
-<p:sld xmlns:p="http://schemas.openxmlformats.org/presentationml/2006/main">
+<p:sld xmlns:a="http://schemas.openxmlformats.org/drawingml/2006/main" xmlns:r="http://schemas.openxmlformats.org/officeDocument/2006/relationships" xmlns:p="http://schemas.openxmlformats.org/presentationml/2006/main">
   <p:cSld>
     <p:bg>
       <p:bgPr>
-        <a:solidFill xmlns:a="http://schemas.openxmlformats.org/drawingml/2006/main">
+        <a:solidFill>
           <a:srgbClr val="FFFFFF"/>
         </a:solidFill>
+        <a:effectLst/>
       </p:bgPr>
     </p:bg>
     <p:spTree>
@@ -5671,41 +5838,46 @@
         <p:nvPr/>
       </p:nvGrpSpPr>
       <p:grpSpPr>
-        <a:xfrm xmlns:a="http://schemas.openxmlformats.org/drawingml/2006/main"/>
+        <a:xfrm>
+          <a:off x="0" y="0"/>
+          <a:ext cx="0" cy="0"/>
+          <a:chOff x="0" y="0"/>
+          <a:chExt cx="0" cy="0"/>
+        </a:xfrm>
       </p:grpSpPr>
       <p:sp>
         <p:nvSpPr>
-          <p:cNvPr id="12" name="">
-            <a:extLst xmlns:a="http://schemas.openxmlformats.org/drawingml/2006/main">
+          <p:cNvPr id="12" name="Rechteck 11">
+            <a:extLst>
               <a:ext uri="{FF2B5EF4-FFF2-40B4-BE49-F238E27FC236}">
                 <a16:creationId xmlns:a16="http://schemas.microsoft.com/office/drawing/2014/main" id="{41678ACA-D36A-46E0-AD32-85C8B4F094D5}"/>
               </a:ext>
             </a:extLst>
           </p:cNvPr>
           <p:cNvSpPr>
-            <a:spLocks xmlns:a="http://schemas.openxmlformats.org/drawingml/2006/main" noGrp="1"/>
+            <a:spLocks noGrp="1"/>
           </p:cNvSpPr>
           <p:nvPr/>
         </p:nvSpPr>
         <p:spPr>
-          <a:xfrm xmlns:a="http://schemas.openxmlformats.org/drawingml/2006/main">
+          <a:xfrm>
             <a:off x="666750" y="400050"/>
             <a:ext cx="10858500" cy="552450"/>
           </a:xfrm>
-          <a:prstGeom xmlns:a="http://schemas.openxmlformats.org/drawingml/2006/main" prst="rect">
+          <a:prstGeom prst="rect">
             <a:avLst/>
           </a:prstGeom>
-          <a:noFill xmlns:a="http://schemas.openxmlformats.org/drawingml/2006/main"/>
-          <a:ln xmlns:a="http://schemas.openxmlformats.org/drawingml/2006/main" w="0">
+          <a:noFill/>
+          <a:ln w="0">
             <a:noFill/>
           </a:ln>
         </p:spPr>
         <p:txBody>
-          <a:bodyPr xmlns:a="http://schemas.openxmlformats.org/drawingml/2006/main" anchor="ctr">
+          <a:bodyPr anchor="ctr">
             <a:noAutofit/>
           </a:bodyPr>
-          <a:lstStyle xmlns:a="http://schemas.openxmlformats.org/drawingml/2006/main"/>
-          <a:p xmlns:a="http://schemas.openxmlformats.org/drawingml/2006/main">
+          <a:lstStyle/>
+          <a:p>
             <a:pPr algn="l">
               <a:defRPr sz="2700" b="1">
                 <a:solidFill>
@@ -5732,37 +5904,37 @@
       </p:sp>
       <p:sp>
         <p:nvSpPr>
-          <p:cNvPr id="2" name="">
-            <a:extLst xmlns:a="http://schemas.openxmlformats.org/drawingml/2006/main">
+          <p:cNvPr id="2" name="Rechteck 1">
+            <a:extLst>
               <a:ext uri="{FF2B5EF4-FFF2-40B4-BE49-F238E27FC236}">
                 <a16:creationId xmlns:a16="http://schemas.microsoft.com/office/drawing/2014/main" id="{2653CE2E-971E-4D29-93BF-3AD332CA0C1D}"/>
               </a:ext>
             </a:extLst>
           </p:cNvPr>
           <p:cNvSpPr>
-            <a:spLocks xmlns:a="http://schemas.openxmlformats.org/drawingml/2006/main" noGrp="1"/>
+            <a:spLocks noGrp="1"/>
           </p:cNvSpPr>
           <p:nvPr/>
         </p:nvSpPr>
         <p:spPr>
-          <a:xfrm xmlns:a="http://schemas.openxmlformats.org/drawingml/2006/main">
+          <a:xfrm>
             <a:off x="685800" y="962025"/>
             <a:ext cx="10668000" cy="323850"/>
           </a:xfrm>
-          <a:prstGeom xmlns:a="http://schemas.openxmlformats.org/drawingml/2006/main" prst="rect">
+          <a:prstGeom prst="rect">
             <a:avLst/>
           </a:prstGeom>
-          <a:noFill xmlns:a="http://schemas.openxmlformats.org/drawingml/2006/main"/>
-          <a:ln xmlns:a="http://schemas.openxmlformats.org/drawingml/2006/main" w="0">
+          <a:noFill/>
+          <a:ln w="0">
             <a:noFill/>
           </a:ln>
         </p:spPr>
         <p:txBody>
-          <a:bodyPr xmlns:a="http://schemas.openxmlformats.org/drawingml/2006/main" anchor="ctr">
+          <a:bodyPr anchor="ctr">
             <a:noAutofit/>
           </a:bodyPr>
-          <a:lstStyle xmlns:a="http://schemas.openxmlformats.org/drawingml/2006/main"/>
-          <a:p xmlns:a="http://schemas.openxmlformats.org/drawingml/2006/main">
+          <a:lstStyle/>
+          <a:p>
             <a:pPr algn="l">
               <a:defRPr sz="1350" b="0">
                 <a:solidFill>
@@ -5789,59 +5961,59 @@
       </p:sp>
       <p:pic>
         <p:nvPicPr>
-          <p:cNvPr id="14" name=""/>
+          <p:cNvPr id="14" name="Grafik 13"/>
           <p:cNvPicPr>
-            <a:picLocks xmlns:a="http://schemas.openxmlformats.org/drawingml/2006/main" noChangeAspect="1"/>
+            <a:picLocks noChangeAspect="1"/>
           </p:cNvPicPr>
           <p:nvPr/>
         </p:nvPicPr>
         <p:blipFill>
-          <a:blip xmlns:r="http://schemas.openxmlformats.org/officeDocument/2006/relationships" xmlns:a="http://schemas.openxmlformats.org/drawingml/2006/main" r:embed="R166cafe267334d7e"/>
-          <a:stretch xmlns:a="http://schemas.openxmlformats.org/drawingml/2006/main"/>
+          <a:blip r:embed="rId3"/>
+          <a:stretch/>
         </p:blipFill>
         <p:spPr>
-          <a:xfrm xmlns:a="http://schemas.openxmlformats.org/drawingml/2006/main">
+          <a:xfrm>
             <a:off x="5095875" y="2133413"/>
             <a:ext cx="6572250" cy="2495925"/>
           </a:xfrm>
-          <a:prstGeom xmlns:a="http://schemas.openxmlformats.org/drawingml/2006/main" prst="rect">
+          <a:prstGeom prst="rect">
             <a:avLst/>
           </a:prstGeom>
         </p:spPr>
       </p:pic>
       <p:sp>
         <p:nvSpPr>
-          <p:cNvPr id="4" name="">
-            <a:extLst xmlns:a="http://schemas.openxmlformats.org/drawingml/2006/main">
+          <p:cNvPr id="4" name="Rechteck 3">
+            <a:extLst>
               <a:ext uri="{FF2B5EF4-FFF2-40B4-BE49-F238E27FC236}">
                 <a16:creationId xmlns:a16="http://schemas.microsoft.com/office/drawing/2014/main" id="{11681484-8118-43D3-9A90-6DE9BDC0E466}"/>
               </a:ext>
             </a:extLst>
           </p:cNvPr>
           <p:cNvSpPr>
-            <a:spLocks xmlns:a="http://schemas.openxmlformats.org/drawingml/2006/main" noGrp="1"/>
+            <a:spLocks noGrp="1"/>
           </p:cNvSpPr>
           <p:nvPr/>
         </p:nvSpPr>
         <p:spPr>
-          <a:xfrm xmlns:a="http://schemas.openxmlformats.org/drawingml/2006/main">
+          <a:xfrm>
             <a:off x="809625" y="1762125"/>
             <a:ext cx="666750" cy="619125"/>
           </a:xfrm>
-          <a:prstGeom xmlns:a="http://schemas.openxmlformats.org/drawingml/2006/main" prst="rect">
+          <a:prstGeom prst="rect">
             <a:avLst/>
           </a:prstGeom>
-          <a:noFill xmlns:a="http://schemas.openxmlformats.org/drawingml/2006/main"/>
-          <a:ln xmlns:a="http://schemas.openxmlformats.org/drawingml/2006/main" w="0">
+          <a:noFill/>
+          <a:ln w="0">
             <a:noFill/>
           </a:ln>
         </p:spPr>
         <p:txBody>
-          <a:bodyPr xmlns:a="http://schemas.openxmlformats.org/drawingml/2006/main" anchor="ctr">
+          <a:bodyPr anchor="ctr">
             <a:noAutofit/>
           </a:bodyPr>
-          <a:lstStyle xmlns:a="http://schemas.openxmlformats.org/drawingml/2006/main"/>
-          <a:p xmlns:a="http://schemas.openxmlformats.org/drawingml/2006/main">
+          <a:lstStyle/>
+          <a:p>
             <a:pPr algn="ctr">
               <a:defRPr sz="3375" b="1">
                 <a:solidFill>
@@ -5868,37 +6040,37 @@
       </p:sp>
       <p:sp>
         <p:nvSpPr>
-          <p:cNvPr id="5" name="">
-            <a:extLst xmlns:a="http://schemas.openxmlformats.org/drawingml/2006/main">
+          <p:cNvPr id="5" name="Rechteck 4">
+            <a:extLst>
               <a:ext uri="{FF2B5EF4-FFF2-40B4-BE49-F238E27FC236}">
                 <a16:creationId xmlns:a16="http://schemas.microsoft.com/office/drawing/2014/main" id="{C35AAAAC-CB6D-4DA4-89B2-F0AF65389B32}"/>
               </a:ext>
             </a:extLst>
           </p:cNvPr>
           <p:cNvSpPr>
-            <a:spLocks xmlns:a="http://schemas.openxmlformats.org/drawingml/2006/main" noGrp="1"/>
+            <a:spLocks noGrp="1"/>
           </p:cNvSpPr>
           <p:nvPr/>
         </p:nvSpPr>
         <p:spPr>
-          <a:xfrm xmlns:a="http://schemas.openxmlformats.org/drawingml/2006/main">
+          <a:xfrm>
             <a:off x="1571625" y="1762125"/>
             <a:ext cx="2857500" cy="619125"/>
           </a:xfrm>
-          <a:prstGeom xmlns:a="http://schemas.openxmlformats.org/drawingml/2006/main" prst="rect">
+          <a:prstGeom prst="rect">
             <a:avLst/>
           </a:prstGeom>
-          <a:noFill xmlns:a="http://schemas.openxmlformats.org/drawingml/2006/main"/>
-          <a:ln xmlns:a="http://schemas.openxmlformats.org/drawingml/2006/main" w="0">
+          <a:noFill/>
+          <a:ln w="0">
             <a:noFill/>
           </a:ln>
         </p:spPr>
         <p:txBody>
-          <a:bodyPr xmlns:a="http://schemas.openxmlformats.org/drawingml/2006/main" anchor="ctr">
+          <a:bodyPr anchor="ctr">
             <a:noAutofit/>
           </a:bodyPr>
-          <a:lstStyle xmlns:a="http://schemas.openxmlformats.org/drawingml/2006/main"/>
-          <a:p xmlns:a="http://schemas.openxmlformats.org/drawingml/2006/main">
+          <a:lstStyle/>
+          <a:p>
             <a:pPr algn="l">
               <a:defRPr sz="2100" b="1">
                 <a:solidFill>
@@ -5925,37 +6097,37 @@
       </p:sp>
       <p:sp>
         <p:nvSpPr>
-          <p:cNvPr id="6" name="">
-            <a:extLst xmlns:a="http://schemas.openxmlformats.org/drawingml/2006/main">
+          <p:cNvPr id="6" name="Rechteck 5">
+            <a:extLst>
               <a:ext uri="{FF2B5EF4-FFF2-40B4-BE49-F238E27FC236}">
                 <a16:creationId xmlns:a16="http://schemas.microsoft.com/office/drawing/2014/main" id="{E4237B78-A86A-486B-9058-7E0C58C8611E}"/>
               </a:ext>
             </a:extLst>
           </p:cNvPr>
           <p:cNvSpPr>
-            <a:spLocks xmlns:a="http://schemas.openxmlformats.org/drawingml/2006/main" noGrp="1"/>
+            <a:spLocks noGrp="1"/>
           </p:cNvSpPr>
           <p:nvPr/>
         </p:nvSpPr>
         <p:spPr>
-          <a:xfrm xmlns:a="http://schemas.openxmlformats.org/drawingml/2006/main">
+          <a:xfrm>
             <a:off x="1571625" y="2362200"/>
             <a:ext cx="2952750" cy="666750"/>
           </a:xfrm>
-          <a:prstGeom xmlns:a="http://schemas.openxmlformats.org/drawingml/2006/main" prst="rect">
+          <a:prstGeom prst="rect">
             <a:avLst/>
           </a:prstGeom>
-          <a:noFill xmlns:a="http://schemas.openxmlformats.org/drawingml/2006/main"/>
-          <a:ln xmlns:a="http://schemas.openxmlformats.org/drawingml/2006/main" w="0">
+          <a:noFill/>
+          <a:ln w="0">
             <a:noFill/>
           </a:ln>
         </p:spPr>
         <p:txBody>
-          <a:bodyPr xmlns:a="http://schemas.openxmlformats.org/drawingml/2006/main" anchor="ctr">
+          <a:bodyPr anchor="ctr">
             <a:noAutofit/>
           </a:bodyPr>
-          <a:lstStyle xmlns:a="http://schemas.openxmlformats.org/drawingml/2006/main"/>
-          <a:p xmlns:a="http://schemas.openxmlformats.org/drawingml/2006/main">
+          <a:lstStyle/>
+          <a:p>
             <a:pPr algn="l">
               <a:defRPr sz="1500" b="0">
                 <a:solidFill>
@@ -5982,37 +6154,37 @@
       </p:sp>
       <p:sp>
         <p:nvSpPr>
-          <p:cNvPr id="7" name="">
-            <a:extLst xmlns:a="http://schemas.openxmlformats.org/drawingml/2006/main">
+          <p:cNvPr id="7" name="Rechteck 6">
+            <a:extLst>
               <a:ext uri="{FF2B5EF4-FFF2-40B4-BE49-F238E27FC236}">
                 <a16:creationId xmlns:a16="http://schemas.microsoft.com/office/drawing/2014/main" id="{16546F46-8BE9-442E-BDE9-48257F1A9074}"/>
               </a:ext>
             </a:extLst>
           </p:cNvPr>
           <p:cNvSpPr>
-            <a:spLocks xmlns:a="http://schemas.openxmlformats.org/drawingml/2006/main" noGrp="1"/>
+            <a:spLocks noGrp="1"/>
           </p:cNvSpPr>
           <p:nvPr/>
         </p:nvSpPr>
         <p:spPr>
-          <a:xfrm xmlns:a="http://schemas.openxmlformats.org/drawingml/2006/main">
+          <a:xfrm>
             <a:off x="809625" y="3381375"/>
             <a:ext cx="666750" cy="619125"/>
           </a:xfrm>
-          <a:prstGeom xmlns:a="http://schemas.openxmlformats.org/drawingml/2006/main" prst="rect">
+          <a:prstGeom prst="rect">
             <a:avLst/>
           </a:prstGeom>
-          <a:noFill xmlns:a="http://schemas.openxmlformats.org/drawingml/2006/main"/>
-          <a:ln xmlns:a="http://schemas.openxmlformats.org/drawingml/2006/main" w="0">
+          <a:noFill/>
+          <a:ln w="0">
             <a:noFill/>
           </a:ln>
         </p:spPr>
         <p:txBody>
-          <a:bodyPr xmlns:a="http://schemas.openxmlformats.org/drawingml/2006/main" anchor="ctr">
+          <a:bodyPr anchor="ctr">
             <a:noAutofit/>
           </a:bodyPr>
-          <a:lstStyle xmlns:a="http://schemas.openxmlformats.org/drawingml/2006/main"/>
-          <a:p xmlns:a="http://schemas.openxmlformats.org/drawingml/2006/main">
+          <a:lstStyle/>
+          <a:p>
             <a:pPr algn="ctr">
               <a:defRPr sz="3375" b="1">
                 <a:solidFill>
@@ -6039,37 +6211,37 @@
       </p:sp>
       <p:sp>
         <p:nvSpPr>
-          <p:cNvPr id="8" name="">
-            <a:extLst xmlns:a="http://schemas.openxmlformats.org/drawingml/2006/main">
+          <p:cNvPr id="8" name="Rechteck 7">
+            <a:extLst>
               <a:ext uri="{FF2B5EF4-FFF2-40B4-BE49-F238E27FC236}">
                 <a16:creationId xmlns:a16="http://schemas.microsoft.com/office/drawing/2014/main" id="{F1C5A639-C928-484E-87BF-4454AE07EC8C}"/>
               </a:ext>
             </a:extLst>
           </p:cNvPr>
           <p:cNvSpPr>
-            <a:spLocks xmlns:a="http://schemas.openxmlformats.org/drawingml/2006/main" noGrp="1"/>
+            <a:spLocks noGrp="1"/>
           </p:cNvSpPr>
           <p:nvPr/>
         </p:nvSpPr>
         <p:spPr>
-          <a:xfrm xmlns:a="http://schemas.openxmlformats.org/drawingml/2006/main">
+          <a:xfrm>
             <a:off x="1571625" y="3381375"/>
             <a:ext cx="3238500" cy="619125"/>
           </a:xfrm>
-          <a:prstGeom xmlns:a="http://schemas.openxmlformats.org/drawingml/2006/main" prst="rect">
+          <a:prstGeom prst="rect">
             <a:avLst/>
           </a:prstGeom>
-          <a:noFill xmlns:a="http://schemas.openxmlformats.org/drawingml/2006/main"/>
-          <a:ln xmlns:a="http://schemas.openxmlformats.org/drawingml/2006/main" w="0">
+          <a:noFill/>
+          <a:ln w="0">
             <a:noFill/>
           </a:ln>
         </p:spPr>
         <p:txBody>
-          <a:bodyPr xmlns:a="http://schemas.openxmlformats.org/drawingml/2006/main" anchor="ctr">
+          <a:bodyPr anchor="ctr">
             <a:noAutofit/>
           </a:bodyPr>
-          <a:lstStyle xmlns:a="http://schemas.openxmlformats.org/drawingml/2006/main"/>
-          <a:p xmlns:a="http://schemas.openxmlformats.org/drawingml/2006/main">
+          <a:lstStyle/>
+          <a:p>
             <a:pPr algn="l">
               <a:defRPr sz="1800" b="1">
                 <a:solidFill>
@@ -6096,37 +6268,37 @@
       </p:sp>
       <p:sp>
         <p:nvSpPr>
-          <p:cNvPr id="9" name="">
-            <a:extLst xmlns:a="http://schemas.openxmlformats.org/drawingml/2006/main">
+          <p:cNvPr id="9" name="Rechteck 8">
+            <a:extLst>
               <a:ext uri="{FF2B5EF4-FFF2-40B4-BE49-F238E27FC236}">
                 <a16:creationId xmlns:a16="http://schemas.microsoft.com/office/drawing/2014/main" id="{1B1EEC97-50F6-46EF-BDAA-E4F57234A026}"/>
               </a:ext>
             </a:extLst>
           </p:cNvPr>
           <p:cNvSpPr>
-            <a:spLocks xmlns:a="http://schemas.openxmlformats.org/drawingml/2006/main" noGrp="1"/>
+            <a:spLocks noGrp="1"/>
           </p:cNvSpPr>
           <p:nvPr/>
         </p:nvSpPr>
         <p:spPr>
-          <a:xfrm xmlns:a="http://schemas.openxmlformats.org/drawingml/2006/main">
+          <a:xfrm>
             <a:off x="1571625" y="4000500"/>
             <a:ext cx="3095625" cy="857250"/>
           </a:xfrm>
-          <a:prstGeom xmlns:a="http://schemas.openxmlformats.org/drawingml/2006/main" prst="rect">
+          <a:prstGeom prst="rect">
             <a:avLst/>
           </a:prstGeom>
-          <a:noFill xmlns:a="http://schemas.openxmlformats.org/drawingml/2006/main"/>
-          <a:ln xmlns:a="http://schemas.openxmlformats.org/drawingml/2006/main" w="0">
+          <a:noFill/>
+          <a:ln w="0">
             <a:noFill/>
           </a:ln>
         </p:spPr>
         <p:txBody>
-          <a:bodyPr xmlns:a="http://schemas.openxmlformats.org/drawingml/2006/main" anchor="ctr">
+          <a:bodyPr anchor="ctr">
             <a:noAutofit/>
           </a:bodyPr>
-          <a:lstStyle xmlns:a="http://schemas.openxmlformats.org/drawingml/2006/main"/>
-          <a:p xmlns:a="http://schemas.openxmlformats.org/drawingml/2006/main">
+          <a:lstStyle/>
+          <a:p>
             <a:pPr algn="l">
               <a:defRPr sz="1500" b="0">
                 <a:solidFill>
@@ -6153,37 +6325,37 @@
       </p:sp>
       <p:sp>
         <p:nvSpPr>
-          <p:cNvPr id="10" name="">
-            <a:extLst xmlns:a="http://schemas.openxmlformats.org/drawingml/2006/main">
+          <p:cNvPr id="10" name="Rechteck 9">
+            <a:extLst>
               <a:ext uri="{FF2B5EF4-FFF2-40B4-BE49-F238E27FC236}">
                 <a16:creationId xmlns:a16="http://schemas.microsoft.com/office/drawing/2014/main" id="{D3846E3E-E8D6-4F9D-B494-2EC5E7E00F94}"/>
               </a:ext>
             </a:extLst>
           </p:cNvPr>
           <p:cNvSpPr>
-            <a:spLocks xmlns:a="http://schemas.openxmlformats.org/drawingml/2006/main" noGrp="1"/>
+            <a:spLocks noGrp="1"/>
           </p:cNvSpPr>
           <p:nvPr/>
         </p:nvSpPr>
         <p:spPr>
-          <a:xfrm xmlns:a="http://schemas.openxmlformats.org/drawingml/2006/main">
+          <a:xfrm>
             <a:off x="1143000" y="5619750"/>
             <a:ext cx="9906000" cy="476250"/>
           </a:xfrm>
-          <a:prstGeom xmlns:a="http://schemas.openxmlformats.org/drawingml/2006/main" prst="rect">
+          <a:prstGeom prst="rect">
             <a:avLst/>
           </a:prstGeom>
-          <a:noFill xmlns:a="http://schemas.openxmlformats.org/drawingml/2006/main"/>
-          <a:ln xmlns:a="http://schemas.openxmlformats.org/drawingml/2006/main" w="0">
+          <a:noFill/>
+          <a:ln w="0">
             <a:noFill/>
           </a:ln>
         </p:spPr>
         <p:txBody>
-          <a:bodyPr xmlns:a="http://schemas.openxmlformats.org/drawingml/2006/main" anchor="ctr">
+          <a:bodyPr anchor="ctr">
             <a:noAutofit/>
           </a:bodyPr>
-          <a:lstStyle xmlns:a="http://schemas.openxmlformats.org/drawingml/2006/main"/>
-          <a:p xmlns:a="http://schemas.openxmlformats.org/drawingml/2006/main">
+          <a:lstStyle/>
+          <a:p>
             <a:pPr algn="ctr">
               <a:defRPr sz="1800" b="1">
                 <a:solidFill>
@@ -6210,37 +6382,37 @@
       </p:sp>
       <p:sp>
         <p:nvSpPr>
-          <p:cNvPr id="11" name="">
-            <a:extLst xmlns:a="http://schemas.openxmlformats.org/drawingml/2006/main">
+          <p:cNvPr id="11" name="Rechteck 10">
+            <a:extLst>
               <a:ext uri="{FF2B5EF4-FFF2-40B4-BE49-F238E27FC236}">
                 <a16:creationId xmlns:a16="http://schemas.microsoft.com/office/drawing/2014/main" id="{75AC96CA-2642-4AF9-AD05-23CF8AF39C6A}"/>
               </a:ext>
             </a:extLst>
           </p:cNvPr>
           <p:cNvSpPr>
-            <a:spLocks xmlns:a="http://schemas.openxmlformats.org/drawingml/2006/main" noGrp="1"/>
+            <a:spLocks noGrp="1"/>
           </p:cNvSpPr>
           <p:nvPr/>
         </p:nvSpPr>
         <p:spPr>
-          <a:xfrm xmlns:a="http://schemas.openxmlformats.org/drawingml/2006/main">
+          <a:xfrm>
             <a:off x="685800" y="6496050"/>
             <a:ext cx="10820400" cy="209550"/>
           </a:xfrm>
-          <a:prstGeom xmlns:a="http://schemas.openxmlformats.org/drawingml/2006/main" prst="rect">
+          <a:prstGeom prst="rect">
             <a:avLst/>
           </a:prstGeom>
-          <a:noFill xmlns:a="http://schemas.openxmlformats.org/drawingml/2006/main"/>
-          <a:ln xmlns:a="http://schemas.openxmlformats.org/drawingml/2006/main" w="0">
+          <a:noFill/>
+          <a:ln w="0">
             <a:noFill/>
           </a:ln>
         </p:spPr>
         <p:txBody>
-          <a:bodyPr xmlns:a="http://schemas.openxmlformats.org/drawingml/2006/main" anchor="ctr">
+          <a:bodyPr anchor="ctr">
             <a:noAutofit/>
           </a:bodyPr>
-          <a:lstStyle xmlns:a="http://schemas.openxmlformats.org/drawingml/2006/main"/>
-          <a:p xmlns:a="http://schemas.openxmlformats.org/drawingml/2006/main">
+          <a:lstStyle/>
+          <a:p>
             <a:pPr algn="r">
               <a:defRPr sz="900" b="0">
                 <a:solidFill>
@@ -6272,17 +6444,21 @@
       </p:ext>
     </p:extLst>
   </p:cSld>
+  <p:clrMapOvr>
+    <a:masterClrMapping/>
+  </p:clrMapOvr>
 </p:sld>
 </file>
 
 <file path=ppt/slides/slide8.xml><?xml version="1.0" encoding="utf-8"?>
-<p:sld xmlns:p="http://schemas.openxmlformats.org/presentationml/2006/main">
+<p:sld xmlns:a="http://schemas.openxmlformats.org/drawingml/2006/main" xmlns:r="http://schemas.openxmlformats.org/officeDocument/2006/relationships" xmlns:p="http://schemas.openxmlformats.org/presentationml/2006/main">
   <p:cSld>
     <p:bg>
       <p:bgPr>
-        <a:solidFill xmlns:a="http://schemas.openxmlformats.org/drawingml/2006/main">
+        <a:solidFill>
           <a:srgbClr val="102A43"/>
         </a:solidFill>
+        <a:effectLst/>
       </p:bgPr>
     </p:bg>
     <p:spTree>
@@ -6292,41 +6468,46 @@
         <p:nvPr/>
       </p:nvGrpSpPr>
       <p:grpSpPr>
-        <a:xfrm xmlns:a="http://schemas.openxmlformats.org/drawingml/2006/main"/>
+        <a:xfrm>
+          <a:off x="0" y="0"/>
+          <a:ext cx="0" cy="0"/>
+          <a:chOff x="0" y="0"/>
+          <a:chExt cx="0" cy="0"/>
+        </a:xfrm>
       </p:grpSpPr>
       <p:sp>
         <p:nvSpPr>
-          <p:cNvPr id="9" name="">
-            <a:extLst xmlns:a="http://schemas.openxmlformats.org/drawingml/2006/main">
+          <p:cNvPr id="9" name="Rechteck 8">
+            <a:extLst>
               <a:ext uri="{FF2B5EF4-FFF2-40B4-BE49-F238E27FC236}">
                 <a16:creationId xmlns:a16="http://schemas.microsoft.com/office/drawing/2014/main" id="{E9A083F1-421F-4F56-A29A-BDF8286CBF82}"/>
               </a:ext>
             </a:extLst>
           </p:cNvPr>
           <p:cNvSpPr>
-            <a:spLocks xmlns:a="http://schemas.openxmlformats.org/drawingml/2006/main" noGrp="1"/>
+            <a:spLocks noGrp="1"/>
           </p:cNvSpPr>
           <p:nvPr/>
         </p:nvSpPr>
         <p:spPr>
-          <a:xfrm xmlns:a="http://schemas.openxmlformats.org/drawingml/2006/main">
+          <a:xfrm>
             <a:off x="762000" y="619125"/>
             <a:ext cx="7620000" cy="609600"/>
           </a:xfrm>
-          <a:prstGeom xmlns:a="http://schemas.openxmlformats.org/drawingml/2006/main" prst="rect">
+          <a:prstGeom prst="rect">
             <a:avLst/>
           </a:prstGeom>
-          <a:noFill xmlns:a="http://schemas.openxmlformats.org/drawingml/2006/main"/>
-          <a:ln xmlns:a="http://schemas.openxmlformats.org/drawingml/2006/main" w="0">
+          <a:noFill/>
+          <a:ln w="0">
             <a:noFill/>
           </a:ln>
         </p:spPr>
         <p:txBody>
-          <a:bodyPr xmlns:a="http://schemas.openxmlformats.org/drawingml/2006/main" anchor="ctr">
+          <a:bodyPr anchor="ctr">
             <a:noAutofit/>
           </a:bodyPr>
-          <a:lstStyle xmlns:a="http://schemas.openxmlformats.org/drawingml/2006/main"/>
-          <a:p xmlns:a="http://schemas.openxmlformats.org/drawingml/2006/main">
+          <a:lstStyle/>
+          <a:p>
             <a:pPr algn="l">
               <a:defRPr sz="2850" b="1">
                 <a:solidFill>
@@ -6353,37 +6534,37 @@
       </p:sp>
       <p:sp>
         <p:nvSpPr>
-          <p:cNvPr id="2" name="">
-            <a:extLst xmlns:a="http://schemas.openxmlformats.org/drawingml/2006/main">
+          <p:cNvPr id="2" name="Rechteck 1">
+            <a:extLst>
               <a:ext uri="{FF2B5EF4-FFF2-40B4-BE49-F238E27FC236}">
                 <a16:creationId xmlns:a16="http://schemas.microsoft.com/office/drawing/2014/main" id="{A87F52E0-B8BB-4247-9C41-D10204B5DD92}"/>
               </a:ext>
             </a:extLst>
           </p:cNvPr>
           <p:cNvSpPr>
-            <a:spLocks xmlns:a="http://schemas.openxmlformats.org/drawingml/2006/main" noGrp="1"/>
+            <a:spLocks noGrp="1"/>
           </p:cNvSpPr>
           <p:nvPr/>
         </p:nvSpPr>
         <p:spPr>
-          <a:xfrm xmlns:a="http://schemas.openxmlformats.org/drawingml/2006/main">
+          <a:xfrm>
             <a:off x="762000" y="1619250"/>
             <a:ext cx="4762500" cy="1095375"/>
           </a:xfrm>
-          <a:prstGeom xmlns:a="http://schemas.openxmlformats.org/drawingml/2006/main" prst="rect">
+          <a:prstGeom prst="rect">
             <a:avLst/>
           </a:prstGeom>
-          <a:noFill xmlns:a="http://schemas.openxmlformats.org/drawingml/2006/main"/>
-          <a:ln xmlns:a="http://schemas.openxmlformats.org/drawingml/2006/main" w="0">
+          <a:noFill/>
+          <a:ln w="0">
             <a:noFill/>
           </a:ln>
         </p:spPr>
         <p:txBody>
-          <a:bodyPr xmlns:a="http://schemas.openxmlformats.org/drawingml/2006/main" anchor="ctr">
+          <a:bodyPr anchor="ctr">
             <a:noAutofit/>
           </a:bodyPr>
-          <a:lstStyle xmlns:a="http://schemas.openxmlformats.org/drawingml/2006/main"/>
-          <a:p xmlns:a="http://schemas.openxmlformats.org/drawingml/2006/main">
+          <a:lstStyle/>
+          <a:p>
             <a:pPr algn="l">
               <a:defRPr sz="5700" b="1">
                 <a:solidFill>
@@ -6410,37 +6591,37 @@
       </p:sp>
       <p:sp>
         <p:nvSpPr>
-          <p:cNvPr id="3" name="">
-            <a:extLst xmlns:a="http://schemas.openxmlformats.org/drawingml/2006/main">
+          <p:cNvPr id="3" name="Rechteck 2">
+            <a:extLst>
               <a:ext uri="{FF2B5EF4-FFF2-40B4-BE49-F238E27FC236}">
                 <a16:creationId xmlns:a16="http://schemas.microsoft.com/office/drawing/2014/main" id="{79EF46D9-8CBB-4648-BE8B-89EF2656B2E4}"/>
               </a:ext>
             </a:extLst>
           </p:cNvPr>
           <p:cNvSpPr>
-            <a:spLocks xmlns:a="http://schemas.openxmlformats.org/drawingml/2006/main" noGrp="1"/>
+            <a:spLocks noGrp="1"/>
           </p:cNvSpPr>
           <p:nvPr/>
         </p:nvSpPr>
         <p:spPr>
-          <a:xfrm xmlns:a="http://schemas.openxmlformats.org/drawingml/2006/main">
+          <a:xfrm>
             <a:off x="762000" y="2809875"/>
             <a:ext cx="6667500" cy="904875"/>
           </a:xfrm>
-          <a:prstGeom xmlns:a="http://schemas.openxmlformats.org/drawingml/2006/main" prst="rect">
+          <a:prstGeom prst="rect">
             <a:avLst/>
           </a:prstGeom>
-          <a:noFill xmlns:a="http://schemas.openxmlformats.org/drawingml/2006/main"/>
-          <a:ln xmlns:a="http://schemas.openxmlformats.org/drawingml/2006/main" w="0">
+          <a:noFill/>
+          <a:ln w="0">
             <a:noFill/>
           </a:ln>
         </p:spPr>
         <p:txBody>
-          <a:bodyPr xmlns:a="http://schemas.openxmlformats.org/drawingml/2006/main" anchor="ctr">
+          <a:bodyPr anchor="ctr">
             <a:noAutofit/>
           </a:bodyPr>
-          <a:lstStyle xmlns:a="http://schemas.openxmlformats.org/drawingml/2006/main"/>
-          <a:p xmlns:a="http://schemas.openxmlformats.org/drawingml/2006/main">
+          <a:lstStyle/>
+          <a:p>
             <a:pPr algn="l">
               <a:defRPr sz="2250" b="1">
                 <a:solidFill>
@@ -6467,37 +6648,37 @@
       </p:sp>
       <p:sp>
         <p:nvSpPr>
-          <p:cNvPr id="4" name="">
-            <a:extLst xmlns:a="http://schemas.openxmlformats.org/drawingml/2006/main">
+          <p:cNvPr id="4" name="Rechteck 3">
+            <a:extLst>
               <a:ext uri="{FF2B5EF4-FFF2-40B4-BE49-F238E27FC236}">
                 <a16:creationId xmlns:a16="http://schemas.microsoft.com/office/drawing/2014/main" id="{3A7EB80B-9544-4969-84A4-D06927399D8C}"/>
               </a:ext>
             </a:extLst>
           </p:cNvPr>
           <p:cNvSpPr>
-            <a:spLocks xmlns:a="http://schemas.openxmlformats.org/drawingml/2006/main" noGrp="1"/>
+            <a:spLocks noGrp="1"/>
           </p:cNvSpPr>
           <p:nvPr/>
         </p:nvSpPr>
         <p:spPr>
-          <a:xfrm xmlns:a="http://schemas.openxmlformats.org/drawingml/2006/main">
+          <a:xfrm>
             <a:off x="7620000" y="1619250"/>
             <a:ext cx="3714750" cy="400050"/>
           </a:xfrm>
-          <a:prstGeom xmlns:a="http://schemas.openxmlformats.org/drawingml/2006/main" prst="rect">
+          <a:prstGeom prst="rect">
             <a:avLst/>
           </a:prstGeom>
-          <a:noFill xmlns:a="http://schemas.openxmlformats.org/drawingml/2006/main"/>
-          <a:ln xmlns:a="http://schemas.openxmlformats.org/drawingml/2006/main" w="0">
+          <a:noFill/>
+          <a:ln w="0">
             <a:noFill/>
           </a:ln>
         </p:spPr>
         <p:txBody>
-          <a:bodyPr xmlns:a="http://schemas.openxmlformats.org/drawingml/2006/main" anchor="ctr">
+          <a:bodyPr anchor="ctr">
             <a:noAutofit/>
           </a:bodyPr>
-          <a:lstStyle xmlns:a="http://schemas.openxmlformats.org/drawingml/2006/main"/>
-          <a:p xmlns:a="http://schemas.openxmlformats.org/drawingml/2006/main">
+          <a:lstStyle/>
+          <a:p>
             <a:pPr algn="l">
               <a:defRPr sz="1725" b="1">
                 <a:solidFill>
@@ -6524,37 +6705,37 @@
       </p:sp>
       <p:sp>
         <p:nvSpPr>
-          <p:cNvPr id="5" name="">
-            <a:extLst xmlns:a="http://schemas.openxmlformats.org/drawingml/2006/main">
+          <p:cNvPr id="5" name="Rechteck 4">
+            <a:extLst>
               <a:ext uri="{FF2B5EF4-FFF2-40B4-BE49-F238E27FC236}">
                 <a16:creationId xmlns:a16="http://schemas.microsoft.com/office/drawing/2014/main" id="{E206DA65-9B6E-4FF3-BD0D-87FE5D7C3205}"/>
               </a:ext>
             </a:extLst>
           </p:cNvPr>
           <p:cNvSpPr>
-            <a:spLocks xmlns:a="http://schemas.openxmlformats.org/drawingml/2006/main" noGrp="1"/>
+            <a:spLocks noGrp="1"/>
           </p:cNvSpPr>
           <p:nvPr/>
         </p:nvSpPr>
         <p:spPr>
-          <a:xfrm xmlns:a="http://schemas.openxmlformats.org/drawingml/2006/main">
+          <a:xfrm>
             <a:off x="7620000" y="2143125"/>
-            <a:ext cx="3810000" cy="2857500"/>
+            <a:ext cx="3810000" cy="4286250"/>
           </a:xfrm>
-          <a:prstGeom xmlns:a="http://schemas.openxmlformats.org/drawingml/2006/main" prst="rect">
+          <a:prstGeom prst="rect">
             <a:avLst/>
           </a:prstGeom>
-          <a:noFill xmlns:a="http://schemas.openxmlformats.org/drawingml/2006/main"/>
-          <a:ln xmlns:a="http://schemas.openxmlformats.org/drawingml/2006/main" w="0">
+          <a:noFill/>
+          <a:ln w="0">
             <a:noFill/>
           </a:ln>
         </p:spPr>
         <p:txBody>
-          <a:bodyPr xmlns:a="http://schemas.openxmlformats.org/drawingml/2006/main" anchor="ctr">
+          <a:bodyPr anchor="ctr">
             <a:noAutofit/>
           </a:bodyPr>
-          <a:lstStyle xmlns:a="http://schemas.openxmlformats.org/drawingml/2006/main"/>
-          <a:p xmlns:a="http://schemas.openxmlformats.org/drawingml/2006/main">
+          <a:lstStyle/>
+          <a:p>
             <a:pPr algn="l">
               <a:defRPr sz="1650" b="0">
                 <a:solidFill>
@@ -6566,7 +6747,7 @@
               </a:defRPr>
             </a:pPr>
             <a:r>
-              <a:rPr sz="1650" b="0">
+              <a:rPr sz="1650" b="0" dirty="0">
                 <a:solidFill>
                   <a:srgbClr val="FFFFFF"/>
                 </a:solidFill>
@@ -6574,16 +6755,42 @@
                 <a:ea typeface="Bitstream Charter"/>
                 <a:cs typeface="Bitstream Charter"/>
               </a:rPr>
-              <a:t>DEF-01 und DEF-05 korrigieren</a:t>
-            </a:r>
-          </a:p>
-          <a:p xmlns:a="http://schemas.openxmlformats.org/drawingml/2006/main">
-            <a:r>
-              <a:t/>
-            </a:r>
-          </a:p>
-          <a:p xmlns:a="http://schemas.openxmlformats.org/drawingml/2006/main">
-            <a:pPr algn="l">
+              <a:t>DEF-01 und DEF-05 </a:t>
+            </a:r>
+            <a:r>
+              <a:rPr sz="1650" b="0" dirty="0" err="1">
+                <a:solidFill>
+                  <a:srgbClr val="FFFFFF"/>
+                </a:solidFill>
+                <a:latin typeface="Bitstream Charter"/>
+                <a:ea typeface="Bitstream Charter"/>
+                <a:cs typeface="Bitstream Charter"/>
+              </a:rPr>
+              <a:t>korrigieren</a:t>
+            </a:r>
+            <a:endParaRPr sz="1650" b="0" dirty="0">
+              <a:solidFill>
+                <a:srgbClr val="FFFFFF"/>
+              </a:solidFill>
+              <a:latin typeface="Bitstream Charter"/>
+              <a:ea typeface="Bitstream Charter"/>
+              <a:cs typeface="Bitstream Charter"/>
+            </a:endParaRPr>
+          </a:p>
+          <a:p>
+            <a:endParaRPr sz="1650" b="0" dirty="0">
+              <a:solidFill>
+                <a:srgbClr val="FFFFFF"/>
+              </a:solidFill>
+              <a:latin typeface="Bitstream Charter"/>
+              <a:ea typeface="Bitstream Charter"/>
+              <a:cs typeface="Bitstream Charter"/>
+            </a:endParaRPr>
+          </a:p>
+          <a:p>
+            <a:pPr marL="285750" indent="-285750">
+              <a:buFont typeface="Arial" panose="020B0604020202020204" pitchFamily="34" charset="0"/>
+              <a:buChar char="•"/>
               <a:defRPr sz="1650" b="0">
                 <a:solidFill>
                   <a:srgbClr val="FFFFFF"/>
@@ -6594,7 +6801,7 @@
               </a:defRPr>
             </a:pPr>
             <a:r>
-              <a:rPr sz="1650" b="0">
+              <a:rPr lang="de-DE" sz="1650" dirty="0">
                 <a:solidFill>
                   <a:srgbClr val="FFFFFF"/>
                 </a:solidFill>
@@ -6602,16 +6809,13 @@
                 <a:ea typeface="Bitstream Charter"/>
                 <a:cs typeface="Bitstream Charter"/>
               </a:rPr>
-              <a:t>Standardpriorität auf MEDIUM setzen</a:t>
-            </a:r>
-          </a:p>
-          <a:p xmlns:a="http://schemas.openxmlformats.org/drawingml/2006/main">
-            <a:r>
-              <a:t/>
-            </a:r>
-          </a:p>
-          <a:p xmlns:a="http://schemas.openxmlformats.org/drawingml/2006/main">
-            <a:pPr algn="l">
+              <a:t>Berechtigungsprüfung und sichere Fehlerbehandlung korrigieren</a:t>
+            </a:r>
+          </a:p>
+          <a:p>
+            <a:pPr marL="285750" indent="-285750">
+              <a:buFont typeface="Arial" panose="020B0604020202020204" pitchFamily="34" charset="0"/>
+              <a:buChar char="•"/>
               <a:defRPr sz="1650" b="0">
                 <a:solidFill>
                   <a:srgbClr val="FFFFFF"/>
@@ -6622,7 +6826,7 @@
               </a:defRPr>
             </a:pPr>
             <a:r>
-              <a:rPr sz="1650" b="0">
+              <a:rPr lang="de-DE" sz="1650" dirty="0">
                 <a:solidFill>
                   <a:srgbClr val="FFFFFF"/>
                 </a:solidFill>
@@ -6630,16 +6834,13 @@
                 <a:ea typeface="Bitstream Charter"/>
                 <a:cs typeface="Bitstream Charter"/>
               </a:rPr>
-              <a:t>Titellänge korrekt validieren</a:t>
-            </a:r>
-          </a:p>
-          <a:p xmlns:a="http://schemas.openxmlformats.org/drawingml/2006/main">
-            <a:r>
-              <a:t/>
-            </a:r>
-          </a:p>
-          <a:p xmlns:a="http://schemas.openxmlformats.org/drawingml/2006/main">
-            <a:pPr algn="l">
+              <a:t>Kontosperre nach genau fünf Fehlversuchen auslösen</a:t>
+            </a:r>
+          </a:p>
+          <a:p>
+            <a:pPr marL="285750" indent="-285750">
+              <a:buFont typeface="Arial" panose="020B0604020202020204" pitchFamily="34" charset="0"/>
+              <a:buChar char="•"/>
               <a:defRPr sz="1650" b="0">
                 <a:solidFill>
                   <a:srgbClr val="FFFFFF"/>
@@ -6650,7 +6851,7 @@
               </a:defRPr>
             </a:pPr>
             <a:r>
-              <a:rPr sz="1650" b="0">
+              <a:rPr lang="de-DE" sz="1650" dirty="0">
                 <a:solidFill>
                   <a:srgbClr val="FFFFFF"/>
                 </a:solidFill>
@@ -6658,74 +6859,125 @@
                 <a:ea typeface="Bitstream Charter"/>
                 <a:cs typeface="Bitstream Charter"/>
               </a:rPr>
-              <a:t>Retests und vollständige Regression</a:t>
-            </a:r>
-          </a:p>
-        </p:txBody>
-      </p:sp>
-      <p:sp>
-        <p:nvSpPr>
-          <p:cNvPr id="6" name="">
-            <a:extLst xmlns:a="http://schemas.openxmlformats.org/drawingml/2006/main">
+              <a:t>Fehlversuchszähler nach erfolgreichem Login zurücksetzen</a:t>
+            </a:r>
+          </a:p>
+          <a:p>
+            <a:pPr marL="285750" indent="-285750">
+              <a:buFont typeface="Arial" panose="020B0604020202020204" pitchFamily="34" charset="0"/>
+              <a:buChar char="•"/>
+              <a:defRPr sz="1650" b="0">
+                <a:solidFill>
+                  <a:srgbClr val="FFFFFF"/>
+                </a:solidFill>
+                <a:latin typeface="Bitstream Charter"/>
+                <a:ea typeface="Bitstream Charter"/>
+                <a:cs typeface="Bitstream Charter"/>
+              </a:defRPr>
+            </a:pPr>
+            <a:r>
+              <a:rPr lang="de-DE" sz="1650" dirty="0" err="1">
+                <a:solidFill>
+                  <a:srgbClr val="FFFFFF"/>
+                </a:solidFill>
+                <a:latin typeface="Bitstream Charter"/>
+                <a:ea typeface="Bitstream Charter"/>
+                <a:cs typeface="Bitstream Charter"/>
+              </a:rPr>
+              <a:t>Retests</a:t>
+            </a:r>
+            <a:r>
+              <a:rPr lang="de-DE" sz="1650" dirty="0">
+                <a:solidFill>
+                  <a:srgbClr val="FFFFFF"/>
+                </a:solidFill>
+                <a:latin typeface="Bitstream Charter"/>
+                <a:ea typeface="Bitstream Charter"/>
+                <a:cs typeface="Bitstream Charter"/>
+              </a:rPr>
+              <a:t> und vollständige Regression durchführen</a:t>
+            </a:r>
+            <a:endParaRPr sz="1650" b="0" dirty="0">
+              <a:solidFill>
+                <a:srgbClr val="FFFFFF"/>
+              </a:solidFill>
+              <a:latin typeface="Bitstream Charter"/>
+              <a:ea typeface="Bitstream Charter"/>
+              <a:cs typeface="Bitstream Charter"/>
+            </a:endParaRPr>
+          </a:p>
+        </p:txBody>
+      </p:sp>
+      <p:sp>
+        <p:nvSpPr>
+          <p:cNvPr id="6" name="Rechteck 5">
+            <a:extLst>
               <a:ext uri="{FF2B5EF4-FFF2-40B4-BE49-F238E27FC236}">
                 <a16:creationId xmlns:a16="http://schemas.microsoft.com/office/drawing/2014/main" id="{132D0331-08D9-46C0-B35B-EFD95A797D43}"/>
               </a:ext>
             </a:extLst>
           </p:cNvPr>
           <p:cNvSpPr>
-            <a:spLocks xmlns:a="http://schemas.openxmlformats.org/drawingml/2006/main" noGrp="1"/>
+            <a:spLocks noGrp="1"/>
           </p:cNvSpPr>
           <p:nvPr/>
         </p:nvSpPr>
         <p:spPr>
-          <a:xfrm xmlns:a="http://schemas.openxmlformats.org/drawingml/2006/main">
+          <a:xfrm>
             <a:off x="762000" y="4095750"/>
             <a:ext cx="2571750" cy="47625"/>
           </a:xfrm>
-          <a:prstGeom xmlns:a="http://schemas.openxmlformats.org/drawingml/2006/main" prst="rect">
+          <a:prstGeom prst="rect">
             <a:avLst/>
           </a:prstGeom>
-          <a:solidFill xmlns:a="http://schemas.openxmlformats.org/drawingml/2006/main">
+          <a:solidFill>
             <a:srgbClr val="2CB1BC"/>
           </a:solidFill>
-          <a:ln xmlns:a="http://schemas.openxmlformats.org/drawingml/2006/main" w="0">
+          <a:ln w="0">
             <a:noFill/>
           </a:ln>
         </p:spPr>
-      </p:sp>
-      <p:sp>
-        <p:nvSpPr>
-          <p:cNvPr id="7" name="">
-            <a:extLst xmlns:a="http://schemas.openxmlformats.org/drawingml/2006/main">
+        <p:txBody>
+          <a:bodyPr/>
+          <a:lstStyle/>
+          <a:p>
+            <a:endParaRPr lang="de-CH"/>
+          </a:p>
+        </p:txBody>
+      </p:sp>
+      <p:sp>
+        <p:nvSpPr>
+          <p:cNvPr id="7" name="Rechteck 6">
+            <a:extLst>
               <a:ext uri="{FF2B5EF4-FFF2-40B4-BE49-F238E27FC236}">
                 <a16:creationId xmlns:a16="http://schemas.microsoft.com/office/drawing/2014/main" id="{648658A5-496B-4CBF-BEEC-3D45C7D54763}"/>
               </a:ext>
             </a:extLst>
           </p:cNvPr>
           <p:cNvSpPr>
-            <a:spLocks xmlns:a="http://schemas.openxmlformats.org/drawingml/2006/main" noGrp="1"/>
+            <a:spLocks noGrp="1"/>
           </p:cNvSpPr>
           <p:nvPr/>
         </p:nvSpPr>
         <p:spPr>
-          <a:xfrm xmlns:a="http://schemas.openxmlformats.org/drawingml/2006/main">
+          <a:xfrm>
             <a:off x="762000" y="4429125"/>
             <a:ext cx="6191250" cy="1190625"/>
           </a:xfrm>
-          <a:prstGeom xmlns:a="http://schemas.openxmlformats.org/drawingml/2006/main" prst="rect">
+          <a:prstGeom prst="rect">
             <a:avLst/>
           </a:prstGeom>
-          <a:noFill xmlns:a="http://schemas.openxmlformats.org/drawingml/2006/main"/>
-          <a:ln xmlns:a="http://schemas.openxmlformats.org/drawingml/2006/main" w="0">
+          <a:noFill/>
+          <a:ln w="0">
             <a:noFill/>
           </a:ln>
         </p:spPr>
         <p:txBody>
-          <a:bodyPr xmlns:a="http://schemas.openxmlformats.org/drawingml/2006/main" anchor="ctr">
+          <a:bodyPr anchor="ctr">
             <a:noAutofit/>
           </a:bodyPr>
-          <a:lstStyle xmlns:a="http://schemas.openxmlformats.org/drawingml/2006/main"/>
-          <a:p xmlns:a="http://schemas.openxmlformats.org/drawingml/2006/main">
+          <a:lstStyle/>
+          <a:p>
             <a:pPr algn="l">
               <a:defRPr sz="2025" b="0">
                 <a:solidFill>
@@ -6752,37 +7004,37 @@
       </p:sp>
       <p:sp>
         <p:nvSpPr>
-          <p:cNvPr id="8" name="">
-            <a:extLst xmlns:a="http://schemas.openxmlformats.org/drawingml/2006/main">
+          <p:cNvPr id="8" name="Rechteck 7">
+            <a:extLst>
               <a:ext uri="{FF2B5EF4-FFF2-40B4-BE49-F238E27FC236}">
                 <a16:creationId xmlns:a16="http://schemas.microsoft.com/office/drawing/2014/main" id="{5DBA4646-5AA3-4F56-A438-1D1BE158A06F}"/>
               </a:ext>
             </a:extLst>
           </p:cNvPr>
           <p:cNvSpPr>
-            <a:spLocks xmlns:a="http://schemas.openxmlformats.org/drawingml/2006/main" noGrp="1"/>
+            <a:spLocks noGrp="1"/>
           </p:cNvSpPr>
           <p:nvPr/>
         </p:nvSpPr>
         <p:spPr>
-          <a:xfrm xmlns:a="http://schemas.openxmlformats.org/drawingml/2006/main">
+          <a:xfrm>
             <a:off x="762000" y="6000750"/>
             <a:ext cx="2857500" cy="428625"/>
           </a:xfrm>
-          <a:prstGeom xmlns:a="http://schemas.openxmlformats.org/drawingml/2006/main" prst="rect">
+          <a:prstGeom prst="rect">
             <a:avLst/>
           </a:prstGeom>
-          <a:noFill xmlns:a="http://schemas.openxmlformats.org/drawingml/2006/main"/>
-          <a:ln xmlns:a="http://schemas.openxmlformats.org/drawingml/2006/main" w="0">
+          <a:noFill/>
+          <a:ln w="0">
             <a:noFill/>
           </a:ln>
         </p:spPr>
         <p:txBody>
-          <a:bodyPr xmlns:a="http://schemas.openxmlformats.org/drawingml/2006/main" anchor="ctr">
+          <a:bodyPr anchor="ctr">
             <a:noAutofit/>
           </a:bodyPr>
-          <a:lstStyle xmlns:a="http://schemas.openxmlformats.org/drawingml/2006/main"/>
-          <a:p xmlns:a="http://schemas.openxmlformats.org/drawingml/2006/main">
+          <a:lstStyle/>
+          <a:p>
             <a:pPr algn="l">
               <a:defRPr sz="1650" b="1">
                 <a:solidFill>
@@ -6814,6 +7066,9 @@
       </p:ext>
     </p:extLst>
   </p:cSld>
+  <p:clrMapOvr>
+    <a:masterClrMapping/>
+  </p:clrMapOvr>
 </p:sld>
 </file>
 
@@ -7059,5 +7314,254 @@
       </a:bgFillStyleLst>
     </a:fmtScheme>
   </a:themeElements>
+  <a:objectDefaults/>
+  <a:extraClrSchemeLst/>
+</a:theme>
+</file>
+
+<file path=ppt/theme/theme2.xml><?xml version="1.0" encoding="utf-8"?>
+<a:theme xmlns:a="http://schemas.openxmlformats.org/drawingml/2006/main" name="ChatGPT">
+  <a:themeElements>
+    <a:clrScheme name="ChatGPT">
+      <a:dk1>
+        <a:srgbClr val="000000"/>
+      </a:dk1>
+      <a:lt1>
+        <a:srgbClr val="FFFFFF"/>
+      </a:lt1>
+      <a:dk2>
+        <a:srgbClr val="0E2841"/>
+      </a:dk2>
+      <a:lt2>
+        <a:srgbClr val="E8E8E8"/>
+      </a:lt2>
+      <a:accent1>
+        <a:srgbClr val="156082"/>
+      </a:accent1>
+      <a:accent2>
+        <a:srgbClr val="E97132"/>
+      </a:accent2>
+      <a:accent3>
+        <a:srgbClr val="196B24"/>
+      </a:accent3>
+      <a:accent4>
+        <a:srgbClr val="0F9ED5"/>
+      </a:accent4>
+      <a:accent5>
+        <a:srgbClr val="A02B93"/>
+      </a:accent5>
+      <a:accent6>
+        <a:srgbClr val="4EA72E"/>
+      </a:accent6>
+      <a:hlink>
+        <a:srgbClr val="467886"/>
+      </a:hlink>
+      <a:folHlink>
+        <a:srgbClr val="96607D"/>
+      </a:folHlink>
+    </a:clrScheme>
+    <a:fontScheme name="Office">
+      <a:majorFont>
+        <a:latin typeface="Calibri Light"/>
+        <a:ea typeface="Calibri Light"/>
+        <a:cs typeface="Calibri Light"/>
+      </a:majorFont>
+      <a:minorFont>
+        <a:latin typeface="Calibri"/>
+        <a:ea typeface="Calibri"/>
+        <a:cs typeface="Calibri"/>
+      </a:minorFont>
+    </a:fontScheme>
+    <a:fmtScheme name="ChatGPT">
+      <a:fillStyleLst>
+        <a:solidFill>
+          <a:schemeClr val="phClr"/>
+        </a:solidFill>
+        <a:gradFill>
+          <a:gsLst>
+            <a:gs pos="0">
+              <a:schemeClr val="phClr">
+                <a:tint val="67000"/>
+                <a:lumMod val="110000"/>
+                <a:satMod val="105000"/>
+              </a:schemeClr>
+            </a:gs>
+            <a:gs pos="50000">
+              <a:schemeClr val="phClr">
+                <a:tint val="73000"/>
+                <a:lumMod val="105000"/>
+                <a:satMod val="103000"/>
+              </a:schemeClr>
+            </a:gs>
+            <a:gs pos="100000">
+              <a:schemeClr val="phClr">
+                <a:tint val="81000"/>
+                <a:lumMod val="105000"/>
+                <a:satMod val="109000"/>
+              </a:schemeClr>
+            </a:gs>
+          </a:gsLst>
+          <a:lin ang="5400000" scaled="0"/>
+        </a:gradFill>
+        <a:gradFill>
+          <a:gsLst>
+            <a:gs pos="0">
+              <a:schemeClr val="phClr">
+                <a:tint val="94000"/>
+                <a:lumMod val="102000"/>
+                <a:satMod val="103000"/>
+              </a:schemeClr>
+            </a:gs>
+            <a:gs pos="50000">
+              <a:schemeClr val="phClr">
+                <a:shade val="100000"/>
+                <a:lumMod val="100000"/>
+                <a:satMod val="110000"/>
+              </a:schemeClr>
+            </a:gs>
+            <a:gs pos="100000">
+              <a:schemeClr val="phClr">
+                <a:shade val="78000"/>
+                <a:lumMod val="99000"/>
+                <a:satMod val="120000"/>
+              </a:schemeClr>
+            </a:gs>
+          </a:gsLst>
+          <a:lin ang="5400000" scaled="0"/>
+        </a:gradFill>
+      </a:fillStyleLst>
+      <a:lnStyleLst>
+        <a:ln w="12700">
+          <a:solidFill>
+            <a:schemeClr val="phClr"/>
+          </a:solidFill>
+          <a:prstDash val="solid"/>
+        </a:ln>
+        <a:ln w="19050">
+          <a:solidFill>
+            <a:schemeClr val="phClr"/>
+          </a:solidFill>
+          <a:prstDash val="solid"/>
+        </a:ln>
+        <a:ln w="25400">
+          <a:solidFill>
+            <a:schemeClr val="phClr"/>
+          </a:solidFill>
+          <a:prstDash val="solid"/>
+        </a:ln>
+      </a:lnStyleLst>
+      <a:effectStyleLst>
+        <a:effectStyle>
+          <a:effectLst/>
+        </a:effectStyle>
+        <a:effectStyle>
+          <a:effectLst/>
+        </a:effectStyle>
+        <a:effectStyle>
+          <a:effectLst>
+            <a:outerShdw blurRad="57150" dist="19050" dir="5400000">
+              <a:srgbClr val="000000">
+                <a:alpha val="16000"/>
+              </a:srgbClr>
+            </a:outerShdw>
+          </a:effectLst>
+        </a:effectStyle>
+        <a:effectStyle>
+          <a:effectLst>
+            <a:outerShdw blurRad="19050" dist="9525" dir="5400000">
+              <a:srgbClr val="000000">
+                <a:alpha val="6000"/>
+              </a:srgbClr>
+            </a:outerShdw>
+          </a:effectLst>
+        </a:effectStyle>
+        <a:effectStyle>
+          <a:effectLst>
+            <a:outerShdw blurRad="28575" dist="9525" dir="5400000">
+              <a:srgbClr val="000000">
+                <a:alpha val="8000"/>
+              </a:srgbClr>
+            </a:outerShdw>
+          </a:effectLst>
+        </a:effectStyle>
+        <a:effectStyle>
+          <a:effectLst>
+            <a:outerShdw blurRad="57150" dist="19050" dir="5400000">
+              <a:srgbClr val="000000">
+                <a:alpha val="10000"/>
+              </a:srgbClr>
+            </a:outerShdw>
+          </a:effectLst>
+        </a:effectStyle>
+        <a:effectStyle>
+          <a:effectLst>
+            <a:outerShdw blurRad="114300" dist="38100" dir="5400000">
+              <a:srgbClr val="000000">
+                <a:alpha val="12000"/>
+              </a:srgbClr>
+            </a:outerShdw>
+          </a:effectLst>
+        </a:effectStyle>
+        <a:effectStyle>
+          <a:effectLst>
+            <a:outerShdw blurRad="171450" dist="57150" dir="5400000">
+              <a:srgbClr val="000000">
+                <a:alpha val="16000"/>
+              </a:srgbClr>
+            </a:outerShdw>
+          </a:effectLst>
+        </a:effectStyle>
+        <a:effectStyle>
+          <a:effectLst>
+            <a:outerShdw blurRad="266700" dist="95250" dir="5400000">
+              <a:srgbClr val="000000">
+                <a:alpha val="24000"/>
+              </a:srgbClr>
+            </a:outerShdw>
+          </a:effectLst>
+        </a:effectStyle>
+      </a:effectStyleLst>
+      <a:bgFillStyleLst>
+        <a:solidFill>
+          <a:schemeClr val="phClr"/>
+        </a:solidFill>
+        <a:solidFill>
+          <a:schemeClr val="phClr">
+            <a:tint val="95000"/>
+            <a:satMod val="170000"/>
+          </a:schemeClr>
+        </a:solidFill>
+        <a:gradFill>
+          <a:gsLst>
+            <a:gs pos="0">
+              <a:schemeClr val="phClr">
+                <a:tint val="93000"/>
+                <a:shade val="98000"/>
+                <a:lumMod val="102000"/>
+                <a:satMod val="150000"/>
+              </a:schemeClr>
+            </a:gs>
+            <a:gs pos="50000">
+              <a:schemeClr val="phClr">
+                <a:tint val="98000"/>
+                <a:shade val="90000"/>
+                <a:lumMod val="103000"/>
+                <a:satMod val="130000"/>
+              </a:schemeClr>
+            </a:gs>
+            <a:gs pos="100000">
+              <a:schemeClr val="phClr">
+                <a:shade val="63000"/>
+                <a:satMod val="120000"/>
+              </a:schemeClr>
+            </a:gs>
+          </a:gsLst>
+          <a:lin ang="5400000" scaled="0"/>
+        </a:gradFill>
+      </a:bgFillStyleLst>
+    </a:fmtScheme>
+  </a:themeElements>
+  <a:objectDefaults/>
+  <a:extraClrSchemeLst/>
 </a:theme>
 </file>